--- a/(6.24) .pptx
+++ b/(6.24) .pptx
@@ -17,29 +17,6 @@
     <p:sldId id="263" r:id="rId11"/>
     <p:sldId id="268" r:id="rId12"/>
     <p:sldId id="267" r:id="rId13"/>
-    <p:sldId id="270" r:id="rId14"/>
-    <p:sldId id="276" r:id="rId15"/>
-    <p:sldId id="277" r:id="rId16"/>
-    <p:sldId id="278" r:id="rId17"/>
-    <p:sldId id="279" r:id="rId18"/>
-    <p:sldId id="280" r:id="rId19"/>
-    <p:sldId id="281" r:id="rId20"/>
-    <p:sldId id="282" r:id="rId21"/>
-    <p:sldId id="283" r:id="rId22"/>
-    <p:sldId id="284" r:id="rId23"/>
-    <p:sldId id="285" r:id="rId24"/>
-    <p:sldId id="286" r:id="rId25"/>
-    <p:sldId id="287" r:id="rId26"/>
-    <p:sldId id="288" r:id="rId27"/>
-    <p:sldId id="289" r:id="rId28"/>
-    <p:sldId id="290" r:id="rId29"/>
-    <p:sldId id="291" r:id="rId30"/>
-    <p:sldId id="292" r:id="rId31"/>
-    <p:sldId id="293" r:id="rId32"/>
-    <p:sldId id="294" r:id="rId33"/>
-    <p:sldId id="295" r:id="rId34"/>
-    <p:sldId id="296" r:id="rId35"/>
-    <p:sldId id="297" r:id="rId36"/>
   </p:sldIdLst>
   <p:sldSz cx="12192000" cy="6858000"/>
   <p:notesSz cx="6858000" cy="9144000"/>
@@ -146,6 +123,181 @@
 </p:presentation>
 </file>
 
+<file path=ppt/changesInfos/changesInfo1.xml><?xml version="1.0" encoding="utf-8"?>
+<pc:chgInfo xmlns:a="http://schemas.openxmlformats.org/drawingml/2006/main" xmlns:r="http://schemas.openxmlformats.org/officeDocument/2006/relationships" xmlns:ac="http://schemas.microsoft.com/office/drawing/2013/main/command" xmlns:pc="http://schemas.microsoft.com/office/powerpoint/2013/main/command">
+  <pc:docChgLst>
+    <pc:chgData name="musukie52@gmail.com" userId="017bd91f96aa8751" providerId="LiveId" clId="{5B2C3894-F97E-4CAB-8812-5BB4D83AAC6A}"/>
+    <pc:docChg chg="delSld">
+      <pc:chgData name="musukie52@gmail.com" userId="017bd91f96aa8751" providerId="LiveId" clId="{5B2C3894-F97E-4CAB-8812-5BB4D83AAC6A}" dt="2026-06-25T02:30:39.284" v="0" actId="47"/>
+      <pc:docMkLst>
+        <pc:docMk/>
+      </pc:docMkLst>
+      <pc:sldChg chg="del">
+        <pc:chgData name="musukie52@gmail.com" userId="017bd91f96aa8751" providerId="LiveId" clId="{5B2C3894-F97E-4CAB-8812-5BB4D83AAC6A}" dt="2026-06-25T02:30:39.284" v="0" actId="47"/>
+        <pc:sldMkLst>
+          <pc:docMk/>
+          <pc:sldMk cId="4226763096" sldId="270"/>
+        </pc:sldMkLst>
+      </pc:sldChg>
+      <pc:sldChg chg="del">
+        <pc:chgData name="musukie52@gmail.com" userId="017bd91f96aa8751" providerId="LiveId" clId="{5B2C3894-F97E-4CAB-8812-5BB4D83AAC6A}" dt="2026-06-25T02:30:39.284" v="0" actId="47"/>
+        <pc:sldMkLst>
+          <pc:docMk/>
+          <pc:sldMk cId="288418547" sldId="276"/>
+        </pc:sldMkLst>
+      </pc:sldChg>
+      <pc:sldChg chg="del">
+        <pc:chgData name="musukie52@gmail.com" userId="017bd91f96aa8751" providerId="LiveId" clId="{5B2C3894-F97E-4CAB-8812-5BB4D83AAC6A}" dt="2026-06-25T02:30:39.284" v="0" actId="47"/>
+        <pc:sldMkLst>
+          <pc:docMk/>
+          <pc:sldMk cId="2676944836" sldId="277"/>
+        </pc:sldMkLst>
+      </pc:sldChg>
+      <pc:sldChg chg="del">
+        <pc:chgData name="musukie52@gmail.com" userId="017bd91f96aa8751" providerId="LiveId" clId="{5B2C3894-F97E-4CAB-8812-5BB4D83AAC6A}" dt="2026-06-25T02:30:39.284" v="0" actId="47"/>
+        <pc:sldMkLst>
+          <pc:docMk/>
+          <pc:sldMk cId="1564240696" sldId="278"/>
+        </pc:sldMkLst>
+      </pc:sldChg>
+      <pc:sldChg chg="del">
+        <pc:chgData name="musukie52@gmail.com" userId="017bd91f96aa8751" providerId="LiveId" clId="{5B2C3894-F97E-4CAB-8812-5BB4D83AAC6A}" dt="2026-06-25T02:30:39.284" v="0" actId="47"/>
+        <pc:sldMkLst>
+          <pc:docMk/>
+          <pc:sldMk cId="3579418456" sldId="279"/>
+        </pc:sldMkLst>
+      </pc:sldChg>
+      <pc:sldChg chg="del">
+        <pc:chgData name="musukie52@gmail.com" userId="017bd91f96aa8751" providerId="LiveId" clId="{5B2C3894-F97E-4CAB-8812-5BB4D83AAC6A}" dt="2026-06-25T02:30:39.284" v="0" actId="47"/>
+        <pc:sldMkLst>
+          <pc:docMk/>
+          <pc:sldMk cId="1689659867" sldId="280"/>
+        </pc:sldMkLst>
+      </pc:sldChg>
+      <pc:sldChg chg="del">
+        <pc:chgData name="musukie52@gmail.com" userId="017bd91f96aa8751" providerId="LiveId" clId="{5B2C3894-F97E-4CAB-8812-5BB4D83AAC6A}" dt="2026-06-25T02:30:39.284" v="0" actId="47"/>
+        <pc:sldMkLst>
+          <pc:docMk/>
+          <pc:sldMk cId="3416103802" sldId="281"/>
+        </pc:sldMkLst>
+      </pc:sldChg>
+      <pc:sldChg chg="del">
+        <pc:chgData name="musukie52@gmail.com" userId="017bd91f96aa8751" providerId="LiveId" clId="{5B2C3894-F97E-4CAB-8812-5BB4D83AAC6A}" dt="2026-06-25T02:30:39.284" v="0" actId="47"/>
+        <pc:sldMkLst>
+          <pc:docMk/>
+          <pc:sldMk cId="3492165951" sldId="282"/>
+        </pc:sldMkLst>
+      </pc:sldChg>
+      <pc:sldChg chg="del">
+        <pc:chgData name="musukie52@gmail.com" userId="017bd91f96aa8751" providerId="LiveId" clId="{5B2C3894-F97E-4CAB-8812-5BB4D83AAC6A}" dt="2026-06-25T02:30:39.284" v="0" actId="47"/>
+        <pc:sldMkLst>
+          <pc:docMk/>
+          <pc:sldMk cId="1476836200" sldId="283"/>
+        </pc:sldMkLst>
+      </pc:sldChg>
+      <pc:sldChg chg="del">
+        <pc:chgData name="musukie52@gmail.com" userId="017bd91f96aa8751" providerId="LiveId" clId="{5B2C3894-F97E-4CAB-8812-5BB4D83AAC6A}" dt="2026-06-25T02:30:39.284" v="0" actId="47"/>
+        <pc:sldMkLst>
+          <pc:docMk/>
+          <pc:sldMk cId="1863423515" sldId="284"/>
+        </pc:sldMkLst>
+      </pc:sldChg>
+      <pc:sldChg chg="del">
+        <pc:chgData name="musukie52@gmail.com" userId="017bd91f96aa8751" providerId="LiveId" clId="{5B2C3894-F97E-4CAB-8812-5BB4D83AAC6A}" dt="2026-06-25T02:30:39.284" v="0" actId="47"/>
+        <pc:sldMkLst>
+          <pc:docMk/>
+          <pc:sldMk cId="1464112840" sldId="285"/>
+        </pc:sldMkLst>
+      </pc:sldChg>
+      <pc:sldChg chg="del">
+        <pc:chgData name="musukie52@gmail.com" userId="017bd91f96aa8751" providerId="LiveId" clId="{5B2C3894-F97E-4CAB-8812-5BB4D83AAC6A}" dt="2026-06-25T02:30:39.284" v="0" actId="47"/>
+        <pc:sldMkLst>
+          <pc:docMk/>
+          <pc:sldMk cId="1832786870" sldId="286"/>
+        </pc:sldMkLst>
+      </pc:sldChg>
+      <pc:sldChg chg="del">
+        <pc:chgData name="musukie52@gmail.com" userId="017bd91f96aa8751" providerId="LiveId" clId="{5B2C3894-F97E-4CAB-8812-5BB4D83AAC6A}" dt="2026-06-25T02:30:39.284" v="0" actId="47"/>
+        <pc:sldMkLst>
+          <pc:docMk/>
+          <pc:sldMk cId="2426901003" sldId="287"/>
+        </pc:sldMkLst>
+      </pc:sldChg>
+      <pc:sldChg chg="del">
+        <pc:chgData name="musukie52@gmail.com" userId="017bd91f96aa8751" providerId="LiveId" clId="{5B2C3894-F97E-4CAB-8812-5BB4D83AAC6A}" dt="2026-06-25T02:30:39.284" v="0" actId="47"/>
+        <pc:sldMkLst>
+          <pc:docMk/>
+          <pc:sldMk cId="919743998" sldId="288"/>
+        </pc:sldMkLst>
+      </pc:sldChg>
+      <pc:sldChg chg="del">
+        <pc:chgData name="musukie52@gmail.com" userId="017bd91f96aa8751" providerId="LiveId" clId="{5B2C3894-F97E-4CAB-8812-5BB4D83AAC6A}" dt="2026-06-25T02:30:39.284" v="0" actId="47"/>
+        <pc:sldMkLst>
+          <pc:docMk/>
+          <pc:sldMk cId="651504962" sldId="289"/>
+        </pc:sldMkLst>
+      </pc:sldChg>
+      <pc:sldChg chg="del">
+        <pc:chgData name="musukie52@gmail.com" userId="017bd91f96aa8751" providerId="LiveId" clId="{5B2C3894-F97E-4CAB-8812-5BB4D83AAC6A}" dt="2026-06-25T02:30:39.284" v="0" actId="47"/>
+        <pc:sldMkLst>
+          <pc:docMk/>
+          <pc:sldMk cId="4082190073" sldId="290"/>
+        </pc:sldMkLst>
+      </pc:sldChg>
+      <pc:sldChg chg="del">
+        <pc:chgData name="musukie52@gmail.com" userId="017bd91f96aa8751" providerId="LiveId" clId="{5B2C3894-F97E-4CAB-8812-5BB4D83AAC6A}" dt="2026-06-25T02:30:39.284" v="0" actId="47"/>
+        <pc:sldMkLst>
+          <pc:docMk/>
+          <pc:sldMk cId="2613412630" sldId="291"/>
+        </pc:sldMkLst>
+      </pc:sldChg>
+      <pc:sldChg chg="del">
+        <pc:chgData name="musukie52@gmail.com" userId="017bd91f96aa8751" providerId="LiveId" clId="{5B2C3894-F97E-4CAB-8812-5BB4D83AAC6A}" dt="2026-06-25T02:30:39.284" v="0" actId="47"/>
+        <pc:sldMkLst>
+          <pc:docMk/>
+          <pc:sldMk cId="1986544078" sldId="292"/>
+        </pc:sldMkLst>
+      </pc:sldChg>
+      <pc:sldChg chg="del">
+        <pc:chgData name="musukie52@gmail.com" userId="017bd91f96aa8751" providerId="LiveId" clId="{5B2C3894-F97E-4CAB-8812-5BB4D83AAC6A}" dt="2026-06-25T02:30:39.284" v="0" actId="47"/>
+        <pc:sldMkLst>
+          <pc:docMk/>
+          <pc:sldMk cId="1277656511" sldId="293"/>
+        </pc:sldMkLst>
+      </pc:sldChg>
+      <pc:sldChg chg="del">
+        <pc:chgData name="musukie52@gmail.com" userId="017bd91f96aa8751" providerId="LiveId" clId="{5B2C3894-F97E-4CAB-8812-5BB4D83AAC6A}" dt="2026-06-25T02:30:39.284" v="0" actId="47"/>
+        <pc:sldMkLst>
+          <pc:docMk/>
+          <pc:sldMk cId="545765313" sldId="294"/>
+        </pc:sldMkLst>
+      </pc:sldChg>
+      <pc:sldChg chg="del">
+        <pc:chgData name="musukie52@gmail.com" userId="017bd91f96aa8751" providerId="LiveId" clId="{5B2C3894-F97E-4CAB-8812-5BB4D83AAC6A}" dt="2026-06-25T02:30:39.284" v="0" actId="47"/>
+        <pc:sldMkLst>
+          <pc:docMk/>
+          <pc:sldMk cId="1815935716" sldId="295"/>
+        </pc:sldMkLst>
+      </pc:sldChg>
+      <pc:sldChg chg="del">
+        <pc:chgData name="musukie52@gmail.com" userId="017bd91f96aa8751" providerId="LiveId" clId="{5B2C3894-F97E-4CAB-8812-5BB4D83AAC6A}" dt="2026-06-25T02:30:39.284" v="0" actId="47"/>
+        <pc:sldMkLst>
+          <pc:docMk/>
+          <pc:sldMk cId="13818139" sldId="296"/>
+        </pc:sldMkLst>
+      </pc:sldChg>
+      <pc:sldChg chg="del">
+        <pc:chgData name="musukie52@gmail.com" userId="017bd91f96aa8751" providerId="LiveId" clId="{5B2C3894-F97E-4CAB-8812-5BB4D83AAC6A}" dt="2026-06-25T02:30:39.284" v="0" actId="47"/>
+        <pc:sldMkLst>
+          <pc:docMk/>
+          <pc:sldMk cId="1539058159" sldId="297"/>
+        </pc:sldMkLst>
+      </pc:sldChg>
+    </pc:docChg>
+  </pc:docChgLst>
+</pc:chgInfo>
+</file>
+
 <file path=ppt/slideLayouts/slideLayout1.xml><?xml version="1.0" encoding="utf-8"?>
 <p:sldLayout xmlns:a="http://schemas.openxmlformats.org/drawingml/2006/main" xmlns:r="http://schemas.openxmlformats.org/officeDocument/2006/relationships" xmlns:p="http://schemas.openxmlformats.org/presentationml/2006/main" type="title" preserve="1">
   <p:cSld name="제목 슬라이드">
@@ -188,10 +340,9 @@
           </a:lstStyle>
           <a:p>
             <a:r>
-              <a:rPr lang="ko-KR" altLang="en-US" smtClean="0"/>
+              <a:rPr lang="ko-KR" altLang="en-US"/>
               <a:t>마스터 제목 스타일 편집</a:t>
             </a:r>
-            <a:endParaRPr lang="ko-KR" altLang="en-US"/>
           </a:p>
         </p:txBody>
       </p:sp>
@@ -253,10 +404,9 @@
           </a:lstStyle>
           <a:p>
             <a:r>
-              <a:rPr lang="ko-KR" altLang="en-US" smtClean="0"/>
+              <a:rPr lang="ko-KR" altLang="en-US"/>
               <a:t>클릭하여 마스터 부제목 스타일 편집</a:t>
             </a:r>
-            <a:endParaRPr lang="ko-KR" altLang="en-US"/>
           </a:p>
         </p:txBody>
       </p:sp>
@@ -277,7 +427,7 @@
           <a:p>
             <a:fld id="{0EC51566-5989-45AC-91CB-762D94C485C8}" type="datetimeFigureOut">
               <a:rPr lang="ko-KR" altLang="en-US" smtClean="0"/>
-              <a:t>2026-06-24</a:t>
+              <a:t>2026-06-25</a:t>
             </a:fld>
             <a:endParaRPr lang="ko-KR" altLang="en-US" dirty="0"/>
           </a:p>
@@ -371,10 +521,9 @@
           <a:lstStyle/>
           <a:p>
             <a:r>
-              <a:rPr lang="ko-KR" altLang="en-US" smtClean="0"/>
+              <a:rPr lang="ko-KR" altLang="en-US"/>
               <a:t>마스터 제목 스타일 편집</a:t>
             </a:r>
-            <a:endParaRPr lang="ko-KR" altLang="en-US"/>
           </a:p>
         </p:txBody>
       </p:sp>
@@ -395,38 +544,37 @@
           <a:p>
             <a:pPr lvl="0"/>
             <a:r>
-              <a:rPr lang="ko-KR" altLang="en-US" smtClean="0"/>
+              <a:rPr lang="ko-KR" altLang="en-US"/>
               <a:t>마스터 텍스트 스타일 편집</a:t>
             </a:r>
           </a:p>
           <a:p>
             <a:pPr lvl="1"/>
             <a:r>
-              <a:rPr lang="ko-KR" altLang="en-US" smtClean="0"/>
+              <a:rPr lang="ko-KR" altLang="en-US"/>
               <a:t>둘째 수준</a:t>
             </a:r>
           </a:p>
           <a:p>
             <a:pPr lvl="2"/>
             <a:r>
-              <a:rPr lang="ko-KR" altLang="en-US" smtClean="0"/>
+              <a:rPr lang="ko-KR" altLang="en-US"/>
               <a:t>셋째 수준</a:t>
             </a:r>
           </a:p>
           <a:p>
             <a:pPr lvl="3"/>
             <a:r>
-              <a:rPr lang="ko-KR" altLang="en-US" smtClean="0"/>
+              <a:rPr lang="ko-KR" altLang="en-US"/>
               <a:t>넷째 수준</a:t>
             </a:r>
           </a:p>
           <a:p>
             <a:pPr lvl="4"/>
             <a:r>
-              <a:rPr lang="ko-KR" altLang="en-US" smtClean="0"/>
+              <a:rPr lang="ko-KR" altLang="en-US"/>
               <a:t>다섯째 수준</a:t>
             </a:r>
-            <a:endParaRPr lang="ko-KR" altLang="en-US"/>
           </a:p>
         </p:txBody>
       </p:sp>
@@ -447,7 +595,7 @@
           <a:p>
             <a:fld id="{0EC51566-5989-45AC-91CB-762D94C485C8}" type="datetimeFigureOut">
               <a:rPr lang="ko-KR" altLang="en-US" smtClean="0"/>
-              <a:t>2026-06-24</a:t>
+              <a:t>2026-06-25</a:t>
             </a:fld>
             <a:endParaRPr lang="ko-KR" altLang="en-US" dirty="0"/>
           </a:p>
@@ -546,10 +694,9 @@
           <a:lstStyle/>
           <a:p>
             <a:r>
-              <a:rPr lang="ko-KR" altLang="en-US" smtClean="0"/>
+              <a:rPr lang="ko-KR" altLang="en-US"/>
               <a:t>마스터 제목 스타일 편집</a:t>
             </a:r>
-            <a:endParaRPr lang="ko-KR" altLang="en-US"/>
           </a:p>
         </p:txBody>
       </p:sp>
@@ -575,38 +722,37 @@
           <a:p>
             <a:pPr lvl="0"/>
             <a:r>
-              <a:rPr lang="ko-KR" altLang="en-US" smtClean="0"/>
+              <a:rPr lang="ko-KR" altLang="en-US"/>
               <a:t>마스터 텍스트 스타일 편집</a:t>
             </a:r>
           </a:p>
           <a:p>
             <a:pPr lvl="1"/>
             <a:r>
-              <a:rPr lang="ko-KR" altLang="en-US" smtClean="0"/>
+              <a:rPr lang="ko-KR" altLang="en-US"/>
               <a:t>둘째 수준</a:t>
             </a:r>
           </a:p>
           <a:p>
             <a:pPr lvl="2"/>
             <a:r>
-              <a:rPr lang="ko-KR" altLang="en-US" smtClean="0"/>
+              <a:rPr lang="ko-KR" altLang="en-US"/>
               <a:t>셋째 수준</a:t>
             </a:r>
           </a:p>
           <a:p>
             <a:pPr lvl="3"/>
             <a:r>
-              <a:rPr lang="ko-KR" altLang="en-US" smtClean="0"/>
+              <a:rPr lang="ko-KR" altLang="en-US"/>
               <a:t>넷째 수준</a:t>
             </a:r>
           </a:p>
           <a:p>
             <a:pPr lvl="4"/>
             <a:r>
-              <a:rPr lang="ko-KR" altLang="en-US" smtClean="0"/>
+              <a:rPr lang="ko-KR" altLang="en-US"/>
               <a:t>다섯째 수준</a:t>
             </a:r>
-            <a:endParaRPr lang="ko-KR" altLang="en-US"/>
           </a:p>
         </p:txBody>
       </p:sp>
@@ -627,7 +773,7 @@
           <a:p>
             <a:fld id="{0EC51566-5989-45AC-91CB-762D94C485C8}" type="datetimeFigureOut">
               <a:rPr lang="ko-KR" altLang="en-US" smtClean="0"/>
-              <a:t>2026-06-24</a:t>
+              <a:t>2026-06-25</a:t>
             </a:fld>
             <a:endParaRPr lang="ko-KR" altLang="en-US" dirty="0"/>
           </a:p>
@@ -721,10 +867,9 @@
           <a:lstStyle/>
           <a:p>
             <a:r>
-              <a:rPr lang="ko-KR" altLang="en-US" smtClean="0"/>
+              <a:rPr lang="ko-KR" altLang="en-US"/>
               <a:t>마스터 제목 스타일 편집</a:t>
             </a:r>
-            <a:endParaRPr lang="ko-KR" altLang="en-US"/>
           </a:p>
         </p:txBody>
       </p:sp>
@@ -745,38 +890,37 @@
           <a:p>
             <a:pPr lvl="0"/>
             <a:r>
-              <a:rPr lang="ko-KR" altLang="en-US" smtClean="0"/>
+              <a:rPr lang="ko-KR" altLang="en-US"/>
               <a:t>마스터 텍스트 스타일 편집</a:t>
             </a:r>
           </a:p>
           <a:p>
             <a:pPr lvl="1"/>
             <a:r>
-              <a:rPr lang="ko-KR" altLang="en-US" smtClean="0"/>
+              <a:rPr lang="ko-KR" altLang="en-US"/>
               <a:t>둘째 수준</a:t>
             </a:r>
           </a:p>
           <a:p>
             <a:pPr lvl="2"/>
             <a:r>
-              <a:rPr lang="ko-KR" altLang="en-US" smtClean="0"/>
+              <a:rPr lang="ko-KR" altLang="en-US"/>
               <a:t>셋째 수준</a:t>
             </a:r>
           </a:p>
           <a:p>
             <a:pPr lvl="3"/>
             <a:r>
-              <a:rPr lang="ko-KR" altLang="en-US" smtClean="0"/>
+              <a:rPr lang="ko-KR" altLang="en-US"/>
               <a:t>넷째 수준</a:t>
             </a:r>
           </a:p>
           <a:p>
             <a:pPr lvl="4"/>
             <a:r>
-              <a:rPr lang="ko-KR" altLang="en-US" smtClean="0"/>
+              <a:rPr lang="ko-KR" altLang="en-US"/>
               <a:t>다섯째 수준</a:t>
             </a:r>
-            <a:endParaRPr lang="ko-KR" altLang="en-US"/>
           </a:p>
         </p:txBody>
       </p:sp>
@@ -797,7 +941,7 @@
           <a:p>
             <a:fld id="{0EC51566-5989-45AC-91CB-762D94C485C8}" type="datetimeFigureOut">
               <a:rPr lang="ko-KR" altLang="en-US" smtClean="0"/>
-              <a:t>2026-06-24</a:t>
+              <a:t>2026-06-25</a:t>
             </a:fld>
             <a:endParaRPr lang="ko-KR" altLang="en-US" dirty="0"/>
           </a:p>
@@ -900,10 +1044,9 @@
           </a:lstStyle>
           <a:p>
             <a:r>
-              <a:rPr lang="ko-KR" altLang="en-US" smtClean="0"/>
+              <a:rPr lang="ko-KR" altLang="en-US"/>
               <a:t>마스터 제목 스타일 편집</a:t>
             </a:r>
-            <a:endParaRPr lang="ko-KR" altLang="en-US"/>
           </a:p>
         </p:txBody>
       </p:sp>
@@ -1020,7 +1163,7 @@
           <a:p>
             <a:pPr lvl="0"/>
             <a:r>
-              <a:rPr lang="ko-KR" altLang="en-US" smtClean="0"/>
+              <a:rPr lang="ko-KR" altLang="en-US"/>
               <a:t>마스터 텍스트 스타일 편집</a:t>
             </a:r>
           </a:p>
@@ -1043,7 +1186,7 @@
           <a:p>
             <a:fld id="{0EC51566-5989-45AC-91CB-762D94C485C8}" type="datetimeFigureOut">
               <a:rPr lang="ko-KR" altLang="en-US" smtClean="0"/>
-              <a:t>2026-06-24</a:t>
+              <a:t>2026-06-25</a:t>
             </a:fld>
             <a:endParaRPr lang="ko-KR" altLang="en-US" dirty="0"/>
           </a:p>
@@ -1137,10 +1280,9 @@
           <a:lstStyle/>
           <a:p>
             <a:r>
-              <a:rPr lang="ko-KR" altLang="en-US" smtClean="0"/>
+              <a:rPr lang="ko-KR" altLang="en-US"/>
               <a:t>마스터 제목 스타일 편집</a:t>
             </a:r>
-            <a:endParaRPr lang="ko-KR" altLang="en-US"/>
           </a:p>
         </p:txBody>
       </p:sp>
@@ -1166,38 +1308,37 @@
           <a:p>
             <a:pPr lvl="0"/>
             <a:r>
-              <a:rPr lang="ko-KR" altLang="en-US" smtClean="0"/>
+              <a:rPr lang="ko-KR" altLang="en-US"/>
               <a:t>마스터 텍스트 스타일 편집</a:t>
             </a:r>
           </a:p>
           <a:p>
             <a:pPr lvl="1"/>
             <a:r>
-              <a:rPr lang="ko-KR" altLang="en-US" smtClean="0"/>
+              <a:rPr lang="ko-KR" altLang="en-US"/>
               <a:t>둘째 수준</a:t>
             </a:r>
           </a:p>
           <a:p>
             <a:pPr lvl="2"/>
             <a:r>
-              <a:rPr lang="ko-KR" altLang="en-US" smtClean="0"/>
+              <a:rPr lang="ko-KR" altLang="en-US"/>
               <a:t>셋째 수준</a:t>
             </a:r>
           </a:p>
           <a:p>
             <a:pPr lvl="3"/>
             <a:r>
-              <a:rPr lang="ko-KR" altLang="en-US" smtClean="0"/>
+              <a:rPr lang="ko-KR" altLang="en-US"/>
               <a:t>넷째 수준</a:t>
             </a:r>
           </a:p>
           <a:p>
             <a:pPr lvl="4"/>
             <a:r>
-              <a:rPr lang="ko-KR" altLang="en-US" smtClean="0"/>
+              <a:rPr lang="ko-KR" altLang="en-US"/>
               <a:t>다섯째 수준</a:t>
             </a:r>
-            <a:endParaRPr lang="ko-KR" altLang="en-US"/>
           </a:p>
         </p:txBody>
       </p:sp>
@@ -1223,38 +1364,37 @@
           <a:p>
             <a:pPr lvl="0"/>
             <a:r>
-              <a:rPr lang="ko-KR" altLang="en-US" smtClean="0"/>
+              <a:rPr lang="ko-KR" altLang="en-US"/>
               <a:t>마스터 텍스트 스타일 편집</a:t>
             </a:r>
           </a:p>
           <a:p>
             <a:pPr lvl="1"/>
             <a:r>
-              <a:rPr lang="ko-KR" altLang="en-US" smtClean="0"/>
+              <a:rPr lang="ko-KR" altLang="en-US"/>
               <a:t>둘째 수준</a:t>
             </a:r>
           </a:p>
           <a:p>
             <a:pPr lvl="2"/>
             <a:r>
-              <a:rPr lang="ko-KR" altLang="en-US" smtClean="0"/>
+              <a:rPr lang="ko-KR" altLang="en-US"/>
               <a:t>셋째 수준</a:t>
             </a:r>
           </a:p>
           <a:p>
             <a:pPr lvl="3"/>
             <a:r>
-              <a:rPr lang="ko-KR" altLang="en-US" smtClean="0"/>
+              <a:rPr lang="ko-KR" altLang="en-US"/>
               <a:t>넷째 수준</a:t>
             </a:r>
           </a:p>
           <a:p>
             <a:pPr lvl="4"/>
             <a:r>
-              <a:rPr lang="ko-KR" altLang="en-US" smtClean="0"/>
+              <a:rPr lang="ko-KR" altLang="en-US"/>
               <a:t>다섯째 수준</a:t>
             </a:r>
-            <a:endParaRPr lang="ko-KR" altLang="en-US"/>
           </a:p>
         </p:txBody>
       </p:sp>
@@ -1275,7 +1415,7 @@
           <a:p>
             <a:fld id="{0EC51566-5989-45AC-91CB-762D94C485C8}" type="datetimeFigureOut">
               <a:rPr lang="ko-KR" altLang="en-US" smtClean="0"/>
-              <a:t>2026-06-24</a:t>
+              <a:t>2026-06-25</a:t>
             </a:fld>
             <a:endParaRPr lang="ko-KR" altLang="en-US" dirty="0"/>
           </a:p>
@@ -1374,10 +1514,9 @@
           <a:lstStyle/>
           <a:p>
             <a:r>
-              <a:rPr lang="ko-KR" altLang="en-US" smtClean="0"/>
+              <a:rPr lang="ko-KR" altLang="en-US"/>
               <a:t>마스터 제목 스타일 편집</a:t>
             </a:r>
-            <a:endParaRPr lang="ko-KR" altLang="en-US"/>
           </a:p>
         </p:txBody>
       </p:sp>
@@ -1440,7 +1579,7 @@
           <a:p>
             <a:pPr lvl="0"/>
             <a:r>
-              <a:rPr lang="ko-KR" altLang="en-US" smtClean="0"/>
+              <a:rPr lang="ko-KR" altLang="en-US"/>
               <a:t>마스터 텍스트 스타일 편집</a:t>
             </a:r>
           </a:p>
@@ -1468,38 +1607,37 @@
           <a:p>
             <a:pPr lvl="0"/>
             <a:r>
-              <a:rPr lang="ko-KR" altLang="en-US" smtClean="0"/>
+              <a:rPr lang="ko-KR" altLang="en-US"/>
               <a:t>마스터 텍스트 스타일 편집</a:t>
             </a:r>
           </a:p>
           <a:p>
             <a:pPr lvl="1"/>
             <a:r>
-              <a:rPr lang="ko-KR" altLang="en-US" smtClean="0"/>
+              <a:rPr lang="ko-KR" altLang="en-US"/>
               <a:t>둘째 수준</a:t>
             </a:r>
           </a:p>
           <a:p>
             <a:pPr lvl="2"/>
             <a:r>
-              <a:rPr lang="ko-KR" altLang="en-US" smtClean="0"/>
+              <a:rPr lang="ko-KR" altLang="en-US"/>
               <a:t>셋째 수준</a:t>
             </a:r>
           </a:p>
           <a:p>
             <a:pPr lvl="3"/>
             <a:r>
-              <a:rPr lang="ko-KR" altLang="en-US" smtClean="0"/>
+              <a:rPr lang="ko-KR" altLang="en-US"/>
               <a:t>넷째 수준</a:t>
             </a:r>
           </a:p>
           <a:p>
             <a:pPr lvl="4"/>
             <a:r>
-              <a:rPr lang="ko-KR" altLang="en-US" smtClean="0"/>
+              <a:rPr lang="ko-KR" altLang="en-US"/>
               <a:t>다섯째 수준</a:t>
             </a:r>
-            <a:endParaRPr lang="ko-KR" altLang="en-US"/>
           </a:p>
         </p:txBody>
       </p:sp>
@@ -1562,7 +1700,7 @@
           <a:p>
             <a:pPr lvl="0"/>
             <a:r>
-              <a:rPr lang="ko-KR" altLang="en-US" smtClean="0"/>
+              <a:rPr lang="ko-KR" altLang="en-US"/>
               <a:t>마스터 텍스트 스타일 편집</a:t>
             </a:r>
           </a:p>
@@ -1590,38 +1728,37 @@
           <a:p>
             <a:pPr lvl="0"/>
             <a:r>
-              <a:rPr lang="ko-KR" altLang="en-US" smtClean="0"/>
+              <a:rPr lang="ko-KR" altLang="en-US"/>
               <a:t>마스터 텍스트 스타일 편집</a:t>
             </a:r>
           </a:p>
           <a:p>
             <a:pPr lvl="1"/>
             <a:r>
-              <a:rPr lang="ko-KR" altLang="en-US" smtClean="0"/>
+              <a:rPr lang="ko-KR" altLang="en-US"/>
               <a:t>둘째 수준</a:t>
             </a:r>
           </a:p>
           <a:p>
             <a:pPr lvl="2"/>
             <a:r>
-              <a:rPr lang="ko-KR" altLang="en-US" smtClean="0"/>
+              <a:rPr lang="ko-KR" altLang="en-US"/>
               <a:t>셋째 수준</a:t>
             </a:r>
           </a:p>
           <a:p>
             <a:pPr lvl="3"/>
             <a:r>
-              <a:rPr lang="ko-KR" altLang="en-US" smtClean="0"/>
+              <a:rPr lang="ko-KR" altLang="en-US"/>
               <a:t>넷째 수준</a:t>
             </a:r>
           </a:p>
           <a:p>
             <a:pPr lvl="4"/>
             <a:r>
-              <a:rPr lang="ko-KR" altLang="en-US" smtClean="0"/>
+              <a:rPr lang="ko-KR" altLang="en-US"/>
               <a:t>다섯째 수준</a:t>
             </a:r>
-            <a:endParaRPr lang="ko-KR" altLang="en-US"/>
           </a:p>
         </p:txBody>
       </p:sp>
@@ -1642,7 +1779,7 @@
           <a:p>
             <a:fld id="{0EC51566-5989-45AC-91CB-762D94C485C8}" type="datetimeFigureOut">
               <a:rPr lang="ko-KR" altLang="en-US" smtClean="0"/>
-              <a:t>2026-06-24</a:t>
+              <a:t>2026-06-25</a:t>
             </a:fld>
             <a:endParaRPr lang="ko-KR" altLang="en-US" dirty="0"/>
           </a:p>
@@ -1736,10 +1873,9 @@
           <a:lstStyle/>
           <a:p>
             <a:r>
-              <a:rPr lang="ko-KR" altLang="en-US" smtClean="0"/>
+              <a:rPr lang="ko-KR" altLang="en-US"/>
               <a:t>마스터 제목 스타일 편집</a:t>
             </a:r>
-            <a:endParaRPr lang="ko-KR" altLang="en-US"/>
           </a:p>
         </p:txBody>
       </p:sp>
@@ -1760,7 +1896,7 @@
           <a:p>
             <a:fld id="{0EC51566-5989-45AC-91CB-762D94C485C8}" type="datetimeFigureOut">
               <a:rPr lang="ko-KR" altLang="en-US" smtClean="0"/>
-              <a:t>2026-06-24</a:t>
+              <a:t>2026-06-25</a:t>
             </a:fld>
             <a:endParaRPr lang="ko-KR" altLang="en-US" dirty="0"/>
           </a:p>
@@ -1855,7 +1991,7 @@
           <a:p>
             <a:fld id="{0EC51566-5989-45AC-91CB-762D94C485C8}" type="datetimeFigureOut">
               <a:rPr lang="ko-KR" altLang="en-US" smtClean="0"/>
-              <a:t>2026-06-24</a:t>
+              <a:t>2026-06-25</a:t>
             </a:fld>
             <a:endParaRPr lang="ko-KR" altLang="en-US" dirty="0"/>
           </a:p>
@@ -1958,10 +2094,9 @@
           </a:lstStyle>
           <a:p>
             <a:r>
-              <a:rPr lang="ko-KR" altLang="en-US" smtClean="0"/>
+              <a:rPr lang="ko-KR" altLang="en-US"/>
               <a:t>마스터 제목 스타일 편집</a:t>
             </a:r>
-            <a:endParaRPr lang="ko-KR" altLang="en-US"/>
           </a:p>
         </p:txBody>
       </p:sp>
@@ -2015,38 +2150,37 @@
           <a:p>
             <a:pPr lvl="0"/>
             <a:r>
-              <a:rPr lang="ko-KR" altLang="en-US" smtClean="0"/>
+              <a:rPr lang="ko-KR" altLang="en-US"/>
               <a:t>마스터 텍스트 스타일 편집</a:t>
             </a:r>
           </a:p>
           <a:p>
             <a:pPr lvl="1"/>
             <a:r>
-              <a:rPr lang="ko-KR" altLang="en-US" smtClean="0"/>
+              <a:rPr lang="ko-KR" altLang="en-US"/>
               <a:t>둘째 수준</a:t>
             </a:r>
           </a:p>
           <a:p>
             <a:pPr lvl="2"/>
             <a:r>
-              <a:rPr lang="ko-KR" altLang="en-US" smtClean="0"/>
+              <a:rPr lang="ko-KR" altLang="en-US"/>
               <a:t>셋째 수준</a:t>
             </a:r>
           </a:p>
           <a:p>
             <a:pPr lvl="3"/>
             <a:r>
-              <a:rPr lang="ko-KR" altLang="en-US" smtClean="0"/>
+              <a:rPr lang="ko-KR" altLang="en-US"/>
               <a:t>넷째 수준</a:t>
             </a:r>
           </a:p>
           <a:p>
             <a:pPr lvl="4"/>
             <a:r>
-              <a:rPr lang="ko-KR" altLang="en-US" smtClean="0"/>
+              <a:rPr lang="ko-KR" altLang="en-US"/>
               <a:t>다섯째 수준</a:t>
             </a:r>
-            <a:endParaRPr lang="ko-KR" altLang="en-US"/>
           </a:p>
         </p:txBody>
       </p:sp>
@@ -2109,7 +2243,7 @@
           <a:p>
             <a:pPr lvl="0"/>
             <a:r>
-              <a:rPr lang="ko-KR" altLang="en-US" smtClean="0"/>
+              <a:rPr lang="ko-KR" altLang="en-US"/>
               <a:t>마스터 텍스트 스타일 편집</a:t>
             </a:r>
           </a:p>
@@ -2132,7 +2266,7 @@
           <a:p>
             <a:fld id="{0EC51566-5989-45AC-91CB-762D94C485C8}" type="datetimeFigureOut">
               <a:rPr lang="ko-KR" altLang="en-US" smtClean="0"/>
-              <a:t>2026-06-24</a:t>
+              <a:t>2026-06-25</a:t>
             </a:fld>
             <a:endParaRPr lang="ko-KR" altLang="en-US" dirty="0"/>
           </a:p>
@@ -2235,10 +2369,9 @@
           </a:lstStyle>
           <a:p>
             <a:r>
-              <a:rPr lang="ko-KR" altLang="en-US" smtClean="0"/>
+              <a:rPr lang="ko-KR" altLang="en-US"/>
               <a:t>마스터 제목 스타일 편집</a:t>
             </a:r>
-            <a:endParaRPr lang="ko-KR" altLang="en-US"/>
           </a:p>
         </p:txBody>
       </p:sp>
@@ -2362,7 +2495,7 @@
           <a:p>
             <a:pPr lvl="0"/>
             <a:r>
-              <a:rPr lang="ko-KR" altLang="en-US" smtClean="0"/>
+              <a:rPr lang="ko-KR" altLang="en-US"/>
               <a:t>마스터 텍스트 스타일 편집</a:t>
             </a:r>
           </a:p>
@@ -2385,7 +2518,7 @@
           <a:p>
             <a:fld id="{0EC51566-5989-45AC-91CB-762D94C485C8}" type="datetimeFigureOut">
               <a:rPr lang="ko-KR" altLang="en-US" smtClean="0"/>
-              <a:t>2026-06-24</a:t>
+              <a:t>2026-06-25</a:t>
             </a:fld>
             <a:endParaRPr lang="ko-KR" altLang="en-US" dirty="0"/>
           </a:p>
@@ -2494,10 +2627,9 @@
           <a:lstStyle/>
           <a:p>
             <a:r>
-              <a:rPr lang="ko-KR" altLang="en-US" smtClean="0"/>
+              <a:rPr lang="ko-KR" altLang="en-US"/>
               <a:t>마스터 제목 스타일 편집</a:t>
             </a:r>
-            <a:endParaRPr lang="ko-KR" altLang="en-US"/>
           </a:p>
         </p:txBody>
       </p:sp>
@@ -2528,38 +2660,37 @@
           <a:p>
             <a:pPr lvl="0"/>
             <a:r>
-              <a:rPr lang="ko-KR" altLang="en-US" smtClean="0"/>
+              <a:rPr lang="ko-KR" altLang="en-US"/>
               <a:t>마스터 텍스트 스타일 편집</a:t>
             </a:r>
           </a:p>
           <a:p>
             <a:pPr lvl="1"/>
             <a:r>
-              <a:rPr lang="ko-KR" altLang="en-US" smtClean="0"/>
+              <a:rPr lang="ko-KR" altLang="en-US"/>
               <a:t>둘째 수준</a:t>
             </a:r>
           </a:p>
           <a:p>
             <a:pPr lvl="2"/>
             <a:r>
-              <a:rPr lang="ko-KR" altLang="en-US" smtClean="0"/>
+              <a:rPr lang="ko-KR" altLang="en-US"/>
               <a:t>셋째 수준</a:t>
             </a:r>
           </a:p>
           <a:p>
             <a:pPr lvl="3"/>
             <a:r>
-              <a:rPr lang="ko-KR" altLang="en-US" smtClean="0"/>
+              <a:rPr lang="ko-KR" altLang="en-US"/>
               <a:t>넷째 수준</a:t>
             </a:r>
           </a:p>
           <a:p>
             <a:pPr lvl="4"/>
             <a:r>
-              <a:rPr lang="ko-KR" altLang="en-US" smtClean="0"/>
+              <a:rPr lang="ko-KR" altLang="en-US"/>
               <a:t>다섯째 수준</a:t>
             </a:r>
-            <a:endParaRPr lang="ko-KR" altLang="en-US"/>
           </a:p>
         </p:txBody>
       </p:sp>
@@ -2598,7 +2729,7 @@
           <a:p>
             <a:fld id="{0EC51566-5989-45AC-91CB-762D94C485C8}" type="datetimeFigureOut">
               <a:rPr lang="ko-KR" altLang="en-US" smtClean="0"/>
-              <a:t>2026-06-24</a:t>
+              <a:t>2026-06-25</a:t>
             </a:fld>
             <a:endParaRPr lang="ko-KR" altLang="en-US" dirty="0"/>
           </a:p>
@@ -3073,10 +3204,9 @@
           <a:lstStyle/>
           <a:p>
             <a:r>
-              <a:rPr lang="ko-KR" altLang="en-US" smtClean="0"/>
+              <a:rPr lang="ko-KR" altLang="en-US"/>
               <a:t>고객을 오해하게 만들기</a:t>
             </a:r>
-            <a:endParaRPr lang="ko-KR" altLang="en-US"/>
           </a:p>
         </p:txBody>
       </p:sp>
@@ -3096,11 +3226,11 @@
           <a:lstStyle/>
           <a:p>
             <a:r>
-              <a:rPr lang="ko-KR" altLang="en-US" smtClean="0"/>
+              <a:rPr lang="ko-KR" altLang="en-US"/>
               <a:t>이 부분은 살짝 어렵다고 선생님께서 말씀하셨다</a:t>
             </a:r>
             <a:r>
-              <a:rPr lang="en-US" altLang="ko-KR" smtClean="0"/>
+              <a:rPr lang="en-US" altLang="ko-KR"/>
               <a:t>…</a:t>
             </a:r>
           </a:p>
@@ -3179,10 +3309,9 @@
           <a:lstStyle/>
           <a:p>
             <a:r>
-              <a:rPr lang="ko-KR" altLang="en-US" smtClean="0"/>
+              <a:rPr lang="ko-KR" altLang="en-US"/>
               <a:t>퀘스트</a:t>
             </a:r>
-            <a:endParaRPr lang="ko-KR" altLang="en-US"/>
           </a:p>
         </p:txBody>
       </p:sp>
@@ -3202,62 +3331,62 @@
           <a:lstStyle/>
           <a:p>
             <a:r>
-              <a:rPr lang="ko-KR" altLang="en-US" smtClean="0"/>
+              <a:rPr lang="ko-KR" altLang="en-US"/>
               <a:t>렐름 </a:t>
             </a:r>
             <a:r>
-              <a:rPr lang="en-US" altLang="ko-KR" smtClean="0"/>
+              <a:rPr lang="en-US" altLang="ko-KR"/>
               <a:t>vs </a:t>
             </a:r>
             <a:r>
-              <a:rPr lang="ko-KR" altLang="en-US" smtClean="0"/>
+              <a:rPr lang="ko-KR" altLang="en-US"/>
               <a:t>렐름 </a:t>
             </a:r>
             <a:r>
-              <a:rPr lang="en-US" altLang="ko-KR" smtClean="0"/>
+              <a:rPr lang="en-US" altLang="ko-KR"/>
               <a:t>=&gt; RvR </a:t>
             </a:r>
             <a:r>
-              <a:rPr lang="ko-KR" altLang="en-US" smtClean="0"/>
+              <a:rPr lang="ko-KR" altLang="en-US"/>
               <a:t>게임</a:t>
             </a:r>
-            <a:endParaRPr lang="en-US" altLang="ko-KR" smtClean="0"/>
-          </a:p>
-          <a:p>
-            <a:r>
-              <a:rPr lang="ko-KR" altLang="en-US" smtClean="0"/>
+            <a:endParaRPr lang="en-US" altLang="ko-KR"/>
+          </a:p>
+          <a:p>
+            <a:r>
+              <a:rPr lang="ko-KR" altLang="en-US"/>
               <a:t>모든 스테이지가 장기판</a:t>
             </a:r>
-            <a:endParaRPr lang="en-US" altLang="ko-KR" smtClean="0"/>
-          </a:p>
-          <a:p>
             <a:endParaRPr lang="en-US" altLang="ko-KR"/>
           </a:p>
           <a:p>
-            <a:r>
-              <a:rPr lang="ko-KR" altLang="en-US" smtClean="0"/>
+            <a:endParaRPr lang="en-US" altLang="ko-KR"/>
+          </a:p>
+          <a:p>
+            <a:r>
+              <a:rPr lang="ko-KR" altLang="en-US"/>
               <a:t>퀘스트 설계 </a:t>
             </a:r>
             <a:r>
-              <a:rPr lang="en-US" altLang="ko-KR" smtClean="0"/>
+              <a:rPr lang="en-US" altLang="ko-KR"/>
               <a:t>=&gt; </a:t>
             </a:r>
             <a:r>
-              <a:rPr lang="ko-KR" altLang="en-US" smtClean="0"/>
+              <a:rPr lang="ko-KR" altLang="en-US"/>
               <a:t>영화 감독에 비유할 수 있다</a:t>
             </a:r>
             <a:r>
-              <a:rPr lang="en-US" altLang="ko-KR" smtClean="0"/>
+              <a:rPr lang="en-US" altLang="ko-KR"/>
               <a:t>.</a:t>
             </a:r>
           </a:p>
           <a:p>
             <a:r>
-              <a:rPr lang="ko-KR" altLang="en-US" smtClean="0"/>
+              <a:rPr lang="ko-KR" altLang="en-US"/>
               <a:t>모든 영역을 다 알고 있어야 하기 때문에</a:t>
             </a:r>
             <a:r>
-              <a:rPr lang="en-US" altLang="ko-KR" smtClean="0"/>
+              <a:rPr lang="en-US" altLang="ko-KR"/>
               <a:t>.</a:t>
             </a:r>
           </a:p>
@@ -3266,7 +3395,7 @@
           </a:p>
           <a:p>
             <a:r>
-              <a:rPr lang="ko-KR" altLang="en-US" b="1" smtClean="0">
+              <a:rPr lang="ko-KR" altLang="en-US" b="1">
                 <a:solidFill>
                   <a:schemeClr val="accent4"/>
                 </a:solidFill>
@@ -3274,7 +3403,7 @@
               <a:t>퀘스트 디자이너는 많이 뽑는다</a:t>
             </a:r>
             <a:r>
-              <a:rPr lang="en-US" altLang="ko-KR" b="1" smtClean="0">
+              <a:rPr lang="en-US" altLang="ko-KR" b="1">
                 <a:solidFill>
                   <a:schemeClr val="accent4"/>
                 </a:solidFill>
@@ -3284,7 +3413,7 @@
           </a:p>
           <a:p>
             <a:r>
-              <a:rPr lang="ko-KR" altLang="en-US" b="1" smtClean="0">
+              <a:rPr lang="ko-KR" altLang="en-US" b="1">
                 <a:solidFill>
                   <a:schemeClr val="accent4"/>
                 </a:solidFill>
@@ -3292,7 +3421,7 @@
               <a:t>게임 디자이너가 거의 다 해야 해서</a:t>
             </a:r>
             <a:r>
-              <a:rPr lang="en-US" altLang="ko-KR" b="1" smtClean="0">
+              <a:rPr lang="en-US" altLang="ko-KR" b="1">
                 <a:solidFill>
                   <a:schemeClr val="accent4"/>
                 </a:solidFill>
@@ -3300,7 +3429,7 @@
               <a:t>, </a:t>
             </a:r>
             <a:r>
-              <a:rPr lang="ko-KR" altLang="en-US" b="1" smtClean="0">
+              <a:rPr lang="ko-KR" altLang="en-US" b="1">
                 <a:solidFill>
                   <a:schemeClr val="accent4"/>
                 </a:solidFill>
@@ -3308,7 +3437,7 @@
               <a:t>대체 불가능하기 때문</a:t>
             </a:r>
             <a:r>
-              <a:rPr lang="en-US" altLang="ko-KR" b="1" smtClean="0">
+              <a:rPr lang="en-US" altLang="ko-KR" b="1">
                 <a:solidFill>
                   <a:schemeClr val="accent4"/>
                 </a:solidFill>
@@ -3369,18 +3498,17 @@
           <a:lstStyle/>
           <a:p>
             <a:r>
-              <a:rPr lang="ko-KR" altLang="en-US" smtClean="0"/>
+              <a:rPr lang="ko-KR" altLang="en-US"/>
               <a:t>스케치업 </a:t>
             </a:r>
             <a:r>
-              <a:rPr lang="en-US" altLang="ko-KR" smtClean="0"/>
+              <a:rPr lang="en-US" altLang="ko-KR"/>
               <a:t>-&gt; </a:t>
             </a:r>
             <a:r>
-              <a:rPr lang="ko-KR" altLang="en-US" smtClean="0"/>
+              <a:rPr lang="ko-KR" altLang="en-US"/>
               <a:t>유니티</a:t>
             </a:r>
-            <a:endParaRPr lang="ko-KR" altLang="en-US"/>
           </a:p>
         </p:txBody>
       </p:sp>
@@ -3400,11 +3528,11 @@
           <a:lstStyle/>
           <a:p>
             <a:r>
-              <a:rPr lang="ko-KR" altLang="en-US" smtClean="0"/>
+              <a:rPr lang="ko-KR" altLang="en-US"/>
               <a:t>스케치업 파일을 컨버트 프로그램으로 유니티 파일로 바꿔서 해보자</a:t>
             </a:r>
             <a:r>
-              <a:rPr lang="en-US" altLang="ko-KR" smtClean="0"/>
+              <a:rPr lang="en-US" altLang="ko-KR"/>
               <a:t>.</a:t>
             </a:r>
             <a:endParaRPr lang="ko-KR" altLang="en-US"/>
@@ -3455,904 +3583,6 @@
     <p:extLst>
       <p:ext uri="{BB962C8B-B14F-4D97-AF65-F5344CB8AC3E}">
         <p14:creationId xmlns:p14="http://schemas.microsoft.com/office/powerpoint/2010/main" val="4000900669"/>
-      </p:ext>
-    </p:extLst>
-  </p:cSld>
-  <p:clrMapOvr>
-    <a:masterClrMapping/>
-  </p:clrMapOvr>
-</p:sld>
-</file>
-
-<file path=ppt/slides/slide13.xml><?xml version="1.0" encoding="utf-8"?>
-<p:sld xmlns:a="http://schemas.openxmlformats.org/drawingml/2006/main" xmlns:r="http://schemas.openxmlformats.org/officeDocument/2006/relationships" xmlns:p="http://schemas.openxmlformats.org/presentationml/2006/main">
-  <p:cSld>
-    <p:spTree>
-      <p:nvGrpSpPr>
-        <p:cNvPr id="1" name=""/>
-        <p:cNvGrpSpPr/>
-        <p:nvPr/>
-      </p:nvGrpSpPr>
-      <p:grpSpPr>
-        <a:xfrm>
-          <a:off x="0" y="0"/>
-          <a:ext cx="0" cy="0"/>
-          <a:chOff x="0" y="0"/>
-          <a:chExt cx="0" cy="0"/>
-        </a:xfrm>
-      </p:grpSpPr>
-      <p:sp>
-        <p:nvSpPr>
-          <p:cNvPr id="2" name="제목 1"/>
-          <p:cNvSpPr>
-            <a:spLocks noGrp="1"/>
-          </p:cNvSpPr>
-          <p:nvPr>
-            <p:ph type="title"/>
-          </p:nvPr>
-        </p:nvSpPr>
-        <p:spPr/>
-        <p:txBody>
-          <a:bodyPr/>
-          <a:lstStyle/>
-          <a:p>
-            <a:r>
-              <a:rPr lang="ko-KR" altLang="en-US" smtClean="0"/>
-              <a:t>암기</a:t>
-            </a:r>
-            <a:r>
-              <a:rPr lang="en-US" altLang="ko-KR" smtClean="0"/>
-              <a:t>! </a:t>
-            </a:r>
-            <a:r>
-              <a:rPr lang="ko-KR" altLang="en-US" smtClean="0"/>
-              <a:t>연습</a:t>
-            </a:r>
-            <a:r>
-              <a:rPr lang="en-US" altLang="ko-KR" smtClean="0"/>
-              <a:t>!</a:t>
-            </a:r>
-            <a:endParaRPr lang="ko-KR" altLang="en-US"/>
-          </a:p>
-        </p:txBody>
-      </p:sp>
-      <p:sp>
-        <p:nvSpPr>
-          <p:cNvPr id="3" name="내용 개체 틀 2"/>
-          <p:cNvSpPr>
-            <a:spLocks noGrp="1"/>
-          </p:cNvSpPr>
-          <p:nvPr>
-            <p:ph idx="1"/>
-          </p:nvPr>
-        </p:nvSpPr>
-        <p:spPr/>
-        <p:txBody>
-          <a:bodyPr/>
-          <a:lstStyle/>
-          <a:p>
-            <a:endParaRPr lang="ko-KR" altLang="en-US"/>
-          </a:p>
-        </p:txBody>
-      </p:sp>
-    </p:spTree>
-    <p:extLst>
-      <p:ext uri="{BB962C8B-B14F-4D97-AF65-F5344CB8AC3E}">
-        <p14:creationId xmlns:p14="http://schemas.microsoft.com/office/powerpoint/2010/main" val="4226763096"/>
-      </p:ext>
-    </p:extLst>
-  </p:cSld>
-  <p:clrMapOvr>
-    <a:masterClrMapping/>
-  </p:clrMapOvr>
-</p:sld>
-</file>
-
-<file path=ppt/slides/slide14.xml><?xml version="1.0" encoding="utf-8"?>
-<p:sld xmlns:a="http://schemas.openxmlformats.org/drawingml/2006/main" xmlns:r="http://schemas.openxmlformats.org/officeDocument/2006/relationships" xmlns:p="http://schemas.openxmlformats.org/presentationml/2006/main">
-  <p:cSld>
-    <p:spTree>
-      <p:nvGrpSpPr>
-        <p:cNvPr id="1" name=""/>
-        <p:cNvGrpSpPr/>
-        <p:nvPr/>
-      </p:nvGrpSpPr>
-      <p:grpSpPr>
-        <a:xfrm>
-          <a:off x="0" y="0"/>
-          <a:ext cx="0" cy="0"/>
-          <a:chOff x="0" y="0"/>
-          <a:chExt cx="0" cy="0"/>
-        </a:xfrm>
-      </p:grpSpPr>
-      <p:sp>
-        <p:nvSpPr>
-          <p:cNvPr id="2" name="제목 1"/>
-          <p:cNvSpPr>
-            <a:spLocks noGrp="1"/>
-          </p:cNvSpPr>
-          <p:nvPr>
-            <p:ph type="title"/>
-          </p:nvPr>
-        </p:nvSpPr>
-        <p:spPr/>
-        <p:txBody>
-          <a:bodyPr/>
-          <a:lstStyle/>
-          <a:p>
-            <a:r>
-              <a:rPr lang="ko-KR" altLang="en-US" smtClean="0"/>
-              <a:t>퀘스트</a:t>
-            </a:r>
-            <a:endParaRPr lang="ko-KR" altLang="en-US"/>
-          </a:p>
-        </p:txBody>
-      </p:sp>
-      <p:sp>
-        <p:nvSpPr>
-          <p:cNvPr id="3" name="내용 개체 틀 2"/>
-          <p:cNvSpPr>
-            <a:spLocks noGrp="1"/>
-          </p:cNvSpPr>
-          <p:nvPr>
-            <p:ph idx="1"/>
-          </p:nvPr>
-        </p:nvSpPr>
-        <p:spPr/>
-        <p:txBody>
-          <a:bodyPr/>
-          <a:lstStyle/>
-          <a:p>
-            <a:r>
-              <a:rPr lang="en-US" altLang="ko-KR" smtClean="0"/>
-              <a:t>‘</a:t>
-            </a:r>
-            <a:r>
-              <a:rPr lang="ko-KR" altLang="en-US" smtClean="0"/>
-              <a:t>게임이 지닌 상황을 리드하고 리딩한다</a:t>
-            </a:r>
-            <a:r>
-              <a:rPr lang="en-US" altLang="ko-KR" smtClean="0"/>
-              <a:t>.’</a:t>
-            </a:r>
-          </a:p>
-          <a:p>
-            <a:r>
-              <a:rPr lang="ko-KR" altLang="en-US" smtClean="0"/>
-              <a:t>상황 </a:t>
-            </a:r>
-            <a:r>
-              <a:rPr lang="en-US" altLang="ko-KR" smtClean="0"/>
-              <a:t>= </a:t>
-            </a:r>
-            <a:r>
-              <a:rPr lang="ko-KR" altLang="en-US" smtClean="0"/>
-              <a:t>등장인물 </a:t>
-            </a:r>
-            <a:r>
-              <a:rPr lang="en-US" altLang="ko-KR" smtClean="0"/>
-              <a:t>+ </a:t>
-            </a:r>
-            <a:r>
-              <a:rPr lang="ko-KR" altLang="en-US" smtClean="0"/>
-              <a:t>등장무대 </a:t>
-            </a:r>
-            <a:r>
-              <a:rPr lang="en-US" altLang="ko-KR" smtClean="0"/>
-              <a:t>+</a:t>
-            </a:r>
-            <a:r>
-              <a:rPr lang="ko-KR" altLang="en-US"/>
-              <a:t> </a:t>
-            </a:r>
-            <a:r>
-              <a:rPr lang="ko-KR" altLang="en-US" smtClean="0"/>
-              <a:t>대본</a:t>
-            </a:r>
-            <a:endParaRPr lang="en-US" altLang="ko-KR" smtClean="0"/>
-          </a:p>
-          <a:p>
-            <a:r>
-              <a:rPr lang="en-US" altLang="ko-KR" smtClean="0"/>
-              <a:t>‘</a:t>
-            </a:r>
-            <a:r>
-              <a:rPr lang="ko-KR" altLang="en-US" smtClean="0"/>
-              <a:t>조건</a:t>
-            </a:r>
-            <a:r>
-              <a:rPr lang="en-US" altLang="ko-KR" smtClean="0"/>
-              <a:t>＇</a:t>
-            </a:r>
-            <a:r>
-              <a:rPr lang="ko-KR" altLang="en-US" smtClean="0"/>
-              <a:t>이 중요</a:t>
-            </a:r>
-            <a:endParaRPr lang="en-US" altLang="ko-KR" smtClean="0"/>
-          </a:p>
-          <a:p>
-            <a:endParaRPr lang="en-US" altLang="ko-KR"/>
-          </a:p>
-          <a:p>
-            <a:r>
-              <a:rPr lang="en-US" altLang="ko-KR" smtClean="0"/>
-              <a:t>Game Design – Game system/Game tutorial/</a:t>
-            </a:r>
-            <a:r>
-              <a:rPr lang="ko-KR" altLang="en-US" smtClean="0"/>
-              <a:t>킬러 콘텐츠</a:t>
-            </a:r>
-            <a:endParaRPr lang="en-US" altLang="ko-KR" smtClean="0"/>
-          </a:p>
-          <a:p>
-            <a:r>
-              <a:rPr lang="ko-KR" altLang="en-US" smtClean="0"/>
-              <a:t>연출 </a:t>
-            </a:r>
-            <a:r>
-              <a:rPr lang="en-US" altLang="ko-KR" smtClean="0"/>
-              <a:t>– </a:t>
-            </a:r>
-            <a:r>
-              <a:rPr lang="ko-KR" altLang="en-US" smtClean="0"/>
-              <a:t>프로젝트의 규모 및 구현 수준 </a:t>
-            </a:r>
-            <a:r>
-              <a:rPr lang="en-US" altLang="ko-KR" smtClean="0"/>
-              <a:t>/ Cinematic + Narrative</a:t>
-            </a:r>
-            <a:endParaRPr lang="ko-KR" altLang="en-US"/>
-          </a:p>
-        </p:txBody>
-      </p:sp>
-    </p:spTree>
-    <p:extLst>
-      <p:ext uri="{BB962C8B-B14F-4D97-AF65-F5344CB8AC3E}">
-        <p14:creationId xmlns:p14="http://schemas.microsoft.com/office/powerpoint/2010/main" val="288418547"/>
-      </p:ext>
-    </p:extLst>
-  </p:cSld>
-  <p:clrMapOvr>
-    <a:masterClrMapping/>
-  </p:clrMapOvr>
-</p:sld>
-</file>
-
-<file path=ppt/slides/slide15.xml><?xml version="1.0" encoding="utf-8"?>
-<p:sld xmlns:a="http://schemas.openxmlformats.org/drawingml/2006/main" xmlns:r="http://schemas.openxmlformats.org/officeDocument/2006/relationships" xmlns:p="http://schemas.openxmlformats.org/presentationml/2006/main">
-  <p:cSld>
-    <p:spTree>
-      <p:nvGrpSpPr>
-        <p:cNvPr id="1" name=""/>
-        <p:cNvGrpSpPr/>
-        <p:nvPr/>
-      </p:nvGrpSpPr>
-      <p:grpSpPr>
-        <a:xfrm>
-          <a:off x="0" y="0"/>
-          <a:ext cx="0" cy="0"/>
-          <a:chOff x="0" y="0"/>
-          <a:chExt cx="0" cy="0"/>
-        </a:xfrm>
-      </p:grpSpPr>
-      <p:sp>
-        <p:nvSpPr>
-          <p:cNvPr id="2" name="제목 1"/>
-          <p:cNvSpPr>
-            <a:spLocks noGrp="1"/>
-          </p:cNvSpPr>
-          <p:nvPr>
-            <p:ph type="title"/>
-          </p:nvPr>
-        </p:nvSpPr>
-        <p:spPr/>
-        <p:txBody>
-          <a:bodyPr/>
-          <a:lstStyle/>
-          <a:p>
-            <a:r>
-              <a:rPr lang="ko-KR" altLang="en-US" smtClean="0"/>
-              <a:t>퀘스트 구성</a:t>
-            </a:r>
-            <a:endParaRPr lang="ko-KR" altLang="en-US"/>
-          </a:p>
-        </p:txBody>
-      </p:sp>
-      <p:sp>
-        <p:nvSpPr>
-          <p:cNvPr id="3" name="내용 개체 틀 2"/>
-          <p:cNvSpPr>
-            <a:spLocks noGrp="1"/>
-          </p:cNvSpPr>
-          <p:nvPr>
-            <p:ph idx="1"/>
-          </p:nvPr>
-        </p:nvSpPr>
-        <p:spPr/>
-        <p:txBody>
-          <a:bodyPr/>
-          <a:lstStyle/>
-          <a:p>
-            <a:pPr marL="514350" indent="-514350">
-              <a:buFont typeface="+mj-lt"/>
-              <a:buAutoNum type="arabicPeriod"/>
-            </a:pPr>
-            <a:r>
-              <a:rPr lang="ko-KR" altLang="en-US" smtClean="0"/>
-              <a:t>시나리오</a:t>
-            </a:r>
-            <a:endParaRPr lang="en-US" altLang="ko-KR" smtClean="0"/>
-          </a:p>
-          <a:p>
-            <a:pPr marL="514350" indent="-514350">
-              <a:buFont typeface="+mj-lt"/>
-              <a:buAutoNum type="arabicPeriod"/>
-            </a:pPr>
-            <a:r>
-              <a:rPr lang="ko-KR" altLang="en-US" smtClean="0"/>
-              <a:t>설정</a:t>
-            </a:r>
-            <a:endParaRPr lang="en-US" altLang="ko-KR" smtClean="0"/>
-          </a:p>
-          <a:p>
-            <a:pPr marL="514350" indent="-514350">
-              <a:buFont typeface="+mj-lt"/>
-              <a:buAutoNum type="arabicPeriod"/>
-            </a:pPr>
-            <a:r>
-              <a:rPr lang="ko-KR" altLang="en-US" smtClean="0"/>
-              <a:t>레벨</a:t>
-            </a:r>
-            <a:endParaRPr lang="en-US" altLang="ko-KR" smtClean="0"/>
-          </a:p>
-          <a:p>
-            <a:pPr marL="514350" indent="-514350">
-              <a:buFont typeface="+mj-lt"/>
-              <a:buAutoNum type="arabicPeriod"/>
-            </a:pPr>
-            <a:r>
-              <a:rPr lang="ko-KR" altLang="en-US" smtClean="0"/>
-              <a:t>콘텐츠</a:t>
-            </a:r>
-            <a:endParaRPr lang="en-US" altLang="ko-KR" smtClean="0"/>
-          </a:p>
-          <a:p>
-            <a:pPr marL="514350" indent="-514350">
-              <a:buFont typeface="+mj-lt"/>
-              <a:buAutoNum type="arabicPeriod"/>
-            </a:pPr>
-            <a:r>
-              <a:rPr lang="ko-KR" altLang="en-US" smtClean="0"/>
-              <a:t>밸런스</a:t>
-            </a:r>
-            <a:endParaRPr lang="en-US" altLang="ko-KR" smtClean="0"/>
-          </a:p>
-          <a:p>
-            <a:pPr marL="514350" indent="-514350">
-              <a:buFont typeface="+mj-lt"/>
-              <a:buAutoNum type="arabicPeriod"/>
-            </a:pPr>
-            <a:r>
-              <a:rPr lang="ko-KR" altLang="en-US" smtClean="0"/>
-              <a:t>시스템</a:t>
-            </a:r>
-            <a:endParaRPr lang="en-US" altLang="ko-KR" smtClean="0"/>
-          </a:p>
-          <a:p>
-            <a:pPr marL="514350" indent="-514350">
-              <a:buFont typeface="+mj-lt"/>
-              <a:buAutoNum type="arabicPeriod"/>
-            </a:pPr>
-            <a:r>
-              <a:rPr lang="ko-KR" altLang="en-US" smtClean="0"/>
-              <a:t>웃음</a:t>
-            </a:r>
-            <a:endParaRPr lang="en-US" altLang="ko-KR" smtClean="0"/>
-          </a:p>
-          <a:p>
-            <a:pPr marL="514350" indent="-514350">
-              <a:buFont typeface="+mj-lt"/>
-              <a:buAutoNum type="arabicPeriod"/>
-            </a:pPr>
-            <a:r>
-              <a:rPr lang="ko-KR" altLang="en-US" smtClean="0"/>
-              <a:t>이벤트</a:t>
-            </a:r>
-            <a:endParaRPr lang="ko-KR" altLang="en-US"/>
-          </a:p>
-        </p:txBody>
-      </p:sp>
-    </p:spTree>
-    <p:extLst>
-      <p:ext uri="{BB962C8B-B14F-4D97-AF65-F5344CB8AC3E}">
-        <p14:creationId xmlns:p14="http://schemas.microsoft.com/office/powerpoint/2010/main" val="2676944836"/>
-      </p:ext>
-    </p:extLst>
-  </p:cSld>
-  <p:clrMapOvr>
-    <a:masterClrMapping/>
-  </p:clrMapOvr>
-</p:sld>
-</file>
-
-<file path=ppt/slides/slide16.xml><?xml version="1.0" encoding="utf-8"?>
-<p:sld xmlns:a="http://schemas.openxmlformats.org/drawingml/2006/main" xmlns:r="http://schemas.openxmlformats.org/officeDocument/2006/relationships" xmlns:p="http://schemas.openxmlformats.org/presentationml/2006/main">
-  <p:cSld>
-    <p:spTree>
-      <p:nvGrpSpPr>
-        <p:cNvPr id="1" name=""/>
-        <p:cNvGrpSpPr/>
-        <p:nvPr/>
-      </p:nvGrpSpPr>
-      <p:grpSpPr>
-        <a:xfrm>
-          <a:off x="0" y="0"/>
-          <a:ext cx="0" cy="0"/>
-          <a:chOff x="0" y="0"/>
-          <a:chExt cx="0" cy="0"/>
-        </a:xfrm>
-      </p:grpSpPr>
-      <p:sp>
-        <p:nvSpPr>
-          <p:cNvPr id="2" name="제목 1"/>
-          <p:cNvSpPr>
-            <a:spLocks noGrp="1"/>
-          </p:cNvSpPr>
-          <p:nvPr>
-            <p:ph type="title"/>
-          </p:nvPr>
-        </p:nvSpPr>
-        <p:spPr/>
-        <p:txBody>
-          <a:bodyPr/>
-          <a:lstStyle/>
-          <a:p>
-            <a:r>
-              <a:rPr lang="ko-KR" altLang="en-US" smtClean="0"/>
-              <a:t>시나리오</a:t>
-            </a:r>
-            <a:endParaRPr lang="ko-KR" altLang="en-US"/>
-          </a:p>
-        </p:txBody>
-      </p:sp>
-      <p:sp>
-        <p:nvSpPr>
-          <p:cNvPr id="3" name="내용 개체 틀 2"/>
-          <p:cNvSpPr>
-            <a:spLocks noGrp="1"/>
-          </p:cNvSpPr>
-          <p:nvPr>
-            <p:ph idx="1"/>
-          </p:nvPr>
-        </p:nvSpPr>
-        <p:spPr/>
-        <p:txBody>
-          <a:bodyPr/>
-          <a:lstStyle/>
-          <a:p>
-            <a:r>
-              <a:rPr lang="ko-KR" altLang="en-US" smtClean="0"/>
-              <a:t>콘텐츠의 당위성을 부여하는 영역</a:t>
-            </a:r>
-            <a:endParaRPr lang="en-US" altLang="ko-KR" smtClean="0"/>
-          </a:p>
-          <a:p>
-            <a:endParaRPr lang="en-US" altLang="ko-KR"/>
-          </a:p>
-          <a:p>
-            <a:r>
-              <a:rPr lang="ko-KR" altLang="en-US" smtClean="0"/>
-              <a:t>보스 </a:t>
-            </a:r>
-            <a:r>
-              <a:rPr lang="en-US" altLang="ko-KR" smtClean="0"/>
-              <a:t>– </a:t>
-            </a:r>
-            <a:r>
-              <a:rPr lang="ko-KR" altLang="en-US" smtClean="0"/>
-              <a:t>과거</a:t>
-            </a:r>
-            <a:endParaRPr lang="en-US" altLang="ko-KR" smtClean="0"/>
-          </a:p>
-          <a:p>
-            <a:r>
-              <a:rPr lang="en-US" altLang="ko-KR" smtClean="0"/>
-              <a:t>NPC Hero – </a:t>
-            </a:r>
-            <a:r>
-              <a:rPr lang="ko-KR" altLang="en-US" smtClean="0"/>
-              <a:t>현재</a:t>
-            </a:r>
-            <a:endParaRPr lang="en-US" altLang="ko-KR" smtClean="0"/>
-          </a:p>
-          <a:p>
-            <a:r>
-              <a:rPr lang="en-US" altLang="ko-KR" smtClean="0"/>
-              <a:t>PC </a:t>
-            </a:r>
-            <a:r>
-              <a:rPr lang="ko-KR" altLang="en-US" smtClean="0"/>
-              <a:t>액션 </a:t>
-            </a:r>
-            <a:r>
-              <a:rPr lang="en-US" altLang="ko-KR" smtClean="0"/>
-              <a:t>– </a:t>
-            </a:r>
-            <a:r>
-              <a:rPr lang="ko-KR" altLang="en-US" smtClean="0"/>
-              <a:t>미래</a:t>
-            </a:r>
-            <a:endParaRPr lang="en-US" altLang="ko-KR" smtClean="0"/>
-          </a:p>
-        </p:txBody>
-      </p:sp>
-    </p:spTree>
-    <p:extLst>
-      <p:ext uri="{BB962C8B-B14F-4D97-AF65-F5344CB8AC3E}">
-        <p14:creationId xmlns:p14="http://schemas.microsoft.com/office/powerpoint/2010/main" val="1564240696"/>
-      </p:ext>
-    </p:extLst>
-  </p:cSld>
-  <p:clrMapOvr>
-    <a:masterClrMapping/>
-  </p:clrMapOvr>
-</p:sld>
-</file>
-
-<file path=ppt/slides/slide17.xml><?xml version="1.0" encoding="utf-8"?>
-<p:sld xmlns:a="http://schemas.openxmlformats.org/drawingml/2006/main" xmlns:r="http://schemas.openxmlformats.org/officeDocument/2006/relationships" xmlns:p="http://schemas.openxmlformats.org/presentationml/2006/main">
-  <p:cSld>
-    <p:spTree>
-      <p:nvGrpSpPr>
-        <p:cNvPr id="1" name=""/>
-        <p:cNvGrpSpPr/>
-        <p:nvPr/>
-      </p:nvGrpSpPr>
-      <p:grpSpPr>
-        <a:xfrm>
-          <a:off x="0" y="0"/>
-          <a:ext cx="0" cy="0"/>
-          <a:chOff x="0" y="0"/>
-          <a:chExt cx="0" cy="0"/>
-        </a:xfrm>
-      </p:grpSpPr>
-      <p:sp>
-        <p:nvSpPr>
-          <p:cNvPr id="2" name="제목 1"/>
-          <p:cNvSpPr>
-            <a:spLocks noGrp="1"/>
-          </p:cNvSpPr>
-          <p:nvPr>
-            <p:ph type="title"/>
-          </p:nvPr>
-        </p:nvSpPr>
-        <p:spPr/>
-        <p:txBody>
-          <a:bodyPr/>
-          <a:lstStyle/>
-          <a:p>
-            <a:r>
-              <a:rPr lang="ko-KR" altLang="en-US" smtClean="0"/>
-              <a:t>설정</a:t>
-            </a:r>
-            <a:endParaRPr lang="ko-KR" altLang="en-US"/>
-          </a:p>
-        </p:txBody>
-      </p:sp>
-      <p:sp>
-        <p:nvSpPr>
-          <p:cNvPr id="3" name="내용 개체 틀 2"/>
-          <p:cNvSpPr>
-            <a:spLocks noGrp="1"/>
-          </p:cNvSpPr>
-          <p:nvPr>
-            <p:ph idx="1"/>
-          </p:nvPr>
-        </p:nvSpPr>
-        <p:spPr/>
-        <p:txBody>
-          <a:bodyPr/>
-          <a:lstStyle/>
-          <a:p>
-            <a:r>
-              <a:rPr lang="ko-KR" altLang="en-US" smtClean="0"/>
-              <a:t>선정의 이유</a:t>
-            </a:r>
-            <a:endParaRPr lang="en-US" altLang="ko-KR" smtClean="0"/>
-          </a:p>
-          <a:p>
-            <a:endParaRPr lang="en-US" altLang="ko-KR"/>
-          </a:p>
-          <a:p>
-            <a:r>
-              <a:rPr lang="ko-KR" altLang="en-US" smtClean="0"/>
-              <a:t>맵의 특성</a:t>
-            </a:r>
-            <a:endParaRPr lang="en-US" altLang="ko-KR" smtClean="0"/>
-          </a:p>
-          <a:p>
-            <a:r>
-              <a:rPr lang="ko-KR" altLang="en-US" smtClean="0"/>
-              <a:t>몬스터의 특성</a:t>
-            </a:r>
-            <a:endParaRPr lang="en-US" altLang="ko-KR" smtClean="0"/>
-          </a:p>
-          <a:p>
-            <a:r>
-              <a:rPr lang="en-US" altLang="ko-KR" smtClean="0"/>
-              <a:t>NPC</a:t>
-            </a:r>
-            <a:r>
-              <a:rPr lang="ko-KR" altLang="en-US" smtClean="0"/>
-              <a:t>의 특성</a:t>
-            </a:r>
-            <a:endParaRPr lang="en-US" altLang="ko-KR" smtClean="0"/>
-          </a:p>
-          <a:p>
-            <a:r>
-              <a:rPr lang="ko-KR" altLang="en-US" smtClean="0"/>
-              <a:t>오브젝트의 특성</a:t>
-            </a:r>
-            <a:endParaRPr lang="ko-KR" altLang="en-US"/>
-          </a:p>
-        </p:txBody>
-      </p:sp>
-    </p:spTree>
-    <p:extLst>
-      <p:ext uri="{BB962C8B-B14F-4D97-AF65-F5344CB8AC3E}">
-        <p14:creationId xmlns:p14="http://schemas.microsoft.com/office/powerpoint/2010/main" val="3579418456"/>
-      </p:ext>
-    </p:extLst>
-  </p:cSld>
-  <p:clrMapOvr>
-    <a:masterClrMapping/>
-  </p:clrMapOvr>
-</p:sld>
-</file>
-
-<file path=ppt/slides/slide18.xml><?xml version="1.0" encoding="utf-8"?>
-<p:sld xmlns:a="http://schemas.openxmlformats.org/drawingml/2006/main" xmlns:r="http://schemas.openxmlformats.org/officeDocument/2006/relationships" xmlns:p="http://schemas.openxmlformats.org/presentationml/2006/main">
-  <p:cSld>
-    <p:spTree>
-      <p:nvGrpSpPr>
-        <p:cNvPr id="1" name=""/>
-        <p:cNvGrpSpPr/>
-        <p:nvPr/>
-      </p:nvGrpSpPr>
-      <p:grpSpPr>
-        <a:xfrm>
-          <a:off x="0" y="0"/>
-          <a:ext cx="0" cy="0"/>
-          <a:chOff x="0" y="0"/>
-          <a:chExt cx="0" cy="0"/>
-        </a:xfrm>
-      </p:grpSpPr>
-      <p:sp>
-        <p:nvSpPr>
-          <p:cNvPr id="2" name="제목 1"/>
-          <p:cNvSpPr>
-            <a:spLocks noGrp="1"/>
-          </p:cNvSpPr>
-          <p:nvPr>
-            <p:ph type="title"/>
-          </p:nvPr>
-        </p:nvSpPr>
-        <p:spPr/>
-        <p:txBody>
-          <a:bodyPr/>
-          <a:lstStyle/>
-          <a:p>
-            <a:r>
-              <a:rPr lang="ko-KR" altLang="en-US" smtClean="0"/>
-              <a:t>레벨</a:t>
-            </a:r>
-            <a:endParaRPr lang="ko-KR" altLang="en-US"/>
-          </a:p>
-        </p:txBody>
-      </p:sp>
-      <p:sp>
-        <p:nvSpPr>
-          <p:cNvPr id="3" name="내용 개체 틀 2"/>
-          <p:cNvSpPr>
-            <a:spLocks noGrp="1"/>
-          </p:cNvSpPr>
-          <p:nvPr>
-            <p:ph idx="1"/>
-          </p:nvPr>
-        </p:nvSpPr>
-        <p:spPr/>
-        <p:txBody>
-          <a:bodyPr/>
-          <a:lstStyle/>
-          <a:p>
-            <a:r>
-              <a:rPr lang="ko-KR" altLang="en-US" smtClean="0"/>
-              <a:t>콘텐츠 제시의 순서</a:t>
-            </a:r>
-            <a:endParaRPr lang="en-US" altLang="ko-KR" smtClean="0"/>
-          </a:p>
-          <a:p>
-            <a:r>
-              <a:rPr lang="ko-KR" altLang="en-US" smtClean="0"/>
-              <a:t>레벨 소모를 리드해야 한다</a:t>
-            </a:r>
-            <a:r>
-              <a:rPr lang="en-US" altLang="ko-KR" smtClean="0"/>
-              <a:t>.</a:t>
-            </a:r>
-          </a:p>
-          <a:p>
-            <a:endParaRPr lang="en-US" altLang="ko-KR"/>
-          </a:p>
-          <a:p>
-            <a:r>
-              <a:rPr lang="ko-KR" altLang="en-US" smtClean="0"/>
-              <a:t>스토리텔링</a:t>
-            </a:r>
-            <a:endParaRPr lang="en-US" altLang="ko-KR" smtClean="0"/>
-          </a:p>
-          <a:p>
-            <a:r>
-              <a:rPr lang="ko-KR" altLang="en-US" smtClean="0"/>
-              <a:t>맵</a:t>
-            </a:r>
-            <a:endParaRPr lang="en-US" altLang="ko-KR" smtClean="0"/>
-          </a:p>
-          <a:p>
-            <a:r>
-              <a:rPr lang="ko-KR" altLang="en-US" smtClean="0"/>
-              <a:t>몬스터</a:t>
-            </a:r>
-            <a:endParaRPr lang="en-US" altLang="ko-KR" smtClean="0"/>
-          </a:p>
-          <a:p>
-            <a:r>
-              <a:rPr lang="ko-KR" altLang="en-US" smtClean="0"/>
-              <a:t>아이템</a:t>
-            </a:r>
-            <a:endParaRPr lang="en-US" altLang="ko-KR" smtClean="0"/>
-          </a:p>
-          <a:p>
-            <a:r>
-              <a:rPr lang="ko-KR" altLang="en-US" smtClean="0"/>
-              <a:t>스킬 등등</a:t>
-            </a:r>
-            <a:endParaRPr lang="ko-KR" altLang="en-US"/>
-          </a:p>
-        </p:txBody>
-      </p:sp>
-    </p:spTree>
-    <p:extLst>
-      <p:ext uri="{BB962C8B-B14F-4D97-AF65-F5344CB8AC3E}">
-        <p14:creationId xmlns:p14="http://schemas.microsoft.com/office/powerpoint/2010/main" val="1689659867"/>
-      </p:ext>
-    </p:extLst>
-  </p:cSld>
-  <p:clrMapOvr>
-    <a:masterClrMapping/>
-  </p:clrMapOvr>
-</p:sld>
-</file>
-
-<file path=ppt/slides/slide19.xml><?xml version="1.0" encoding="utf-8"?>
-<p:sld xmlns:a="http://schemas.openxmlformats.org/drawingml/2006/main" xmlns:r="http://schemas.openxmlformats.org/officeDocument/2006/relationships" xmlns:p="http://schemas.openxmlformats.org/presentationml/2006/main">
-  <p:cSld>
-    <p:spTree>
-      <p:nvGrpSpPr>
-        <p:cNvPr id="1" name=""/>
-        <p:cNvGrpSpPr/>
-        <p:nvPr/>
-      </p:nvGrpSpPr>
-      <p:grpSpPr>
-        <a:xfrm>
-          <a:off x="0" y="0"/>
-          <a:ext cx="0" cy="0"/>
-          <a:chOff x="0" y="0"/>
-          <a:chExt cx="0" cy="0"/>
-        </a:xfrm>
-      </p:grpSpPr>
-      <p:sp>
-        <p:nvSpPr>
-          <p:cNvPr id="2" name="제목 1"/>
-          <p:cNvSpPr>
-            <a:spLocks noGrp="1"/>
-          </p:cNvSpPr>
-          <p:nvPr>
-            <p:ph type="title"/>
-          </p:nvPr>
-        </p:nvSpPr>
-        <p:spPr/>
-        <p:txBody>
-          <a:bodyPr/>
-          <a:lstStyle/>
-          <a:p>
-            <a:r>
-              <a:rPr lang="ko-KR" altLang="en-US" smtClean="0"/>
-              <a:t>콘텐츠</a:t>
-            </a:r>
-            <a:endParaRPr lang="ko-KR" altLang="en-US"/>
-          </a:p>
-        </p:txBody>
-      </p:sp>
-      <p:sp>
-        <p:nvSpPr>
-          <p:cNvPr id="3" name="내용 개체 틀 2"/>
-          <p:cNvSpPr>
-            <a:spLocks noGrp="1"/>
-          </p:cNvSpPr>
-          <p:nvPr>
-            <p:ph idx="1"/>
-          </p:nvPr>
-        </p:nvSpPr>
-        <p:spPr/>
-        <p:txBody>
-          <a:bodyPr/>
-          <a:lstStyle/>
-          <a:p>
-            <a:r>
-              <a:rPr lang="ko-KR" altLang="en-US" smtClean="0"/>
-              <a:t>소모필요 콘텐츠 </a:t>
-            </a:r>
-            <a:r>
-              <a:rPr lang="en-US" altLang="ko-KR" smtClean="0"/>
-              <a:t>: </a:t>
-            </a:r>
-            <a:r>
-              <a:rPr lang="ko-KR" altLang="en-US" smtClean="0"/>
-              <a:t>성장에 필수인 콘텐츠</a:t>
-            </a:r>
-            <a:endParaRPr lang="en-US" altLang="ko-KR" smtClean="0"/>
-          </a:p>
-          <a:p>
-            <a:r>
-              <a:rPr lang="ko-KR" altLang="en-US" smtClean="0"/>
-              <a:t>킬러 콘텐츠 </a:t>
-            </a:r>
-            <a:r>
-              <a:rPr lang="en-US" altLang="ko-KR" smtClean="0"/>
-              <a:t>: </a:t>
-            </a:r>
-            <a:r>
-              <a:rPr lang="ko-KR" altLang="en-US" smtClean="0"/>
-              <a:t>유저가 우리 게임을 떠나지 못할 정도로 재밌는 콘텐츠</a:t>
-            </a:r>
-            <a:endParaRPr lang="en-US" altLang="ko-KR" smtClean="0"/>
-          </a:p>
-          <a:p>
-            <a:endParaRPr lang="en-US" altLang="ko-KR" smtClean="0"/>
-          </a:p>
-          <a:p>
-            <a:r>
-              <a:rPr lang="ko-KR" altLang="en-US" smtClean="0"/>
-              <a:t>메인 </a:t>
-            </a:r>
-            <a:r>
-              <a:rPr lang="en-US" altLang="ko-KR" smtClean="0"/>
-              <a:t>/ </a:t>
-            </a:r>
-            <a:r>
-              <a:rPr lang="ko-KR" altLang="en-US" smtClean="0"/>
-              <a:t>서브 퀘스트</a:t>
-            </a:r>
-            <a:endParaRPr lang="en-US" altLang="ko-KR" smtClean="0"/>
-          </a:p>
-          <a:p>
-            <a:r>
-              <a:rPr lang="ko-KR" altLang="en-US" smtClean="0"/>
-              <a:t>이 둘의 내용은 서로 독립적이어도 된다</a:t>
-            </a:r>
-            <a:r>
-              <a:rPr lang="en-US" altLang="ko-KR" smtClean="0"/>
-              <a:t>.</a:t>
-            </a:r>
-            <a:endParaRPr lang="ko-KR" altLang="en-US"/>
-          </a:p>
-        </p:txBody>
-      </p:sp>
-    </p:spTree>
-    <p:extLst>
-      <p:ext uri="{BB962C8B-B14F-4D97-AF65-F5344CB8AC3E}">
-        <p14:creationId xmlns:p14="http://schemas.microsoft.com/office/powerpoint/2010/main" val="3416103802"/>
       </p:ext>
     </p:extLst>
   </p:cSld>
@@ -4395,22 +3625,21 @@
           <a:lstStyle/>
           <a:p>
             <a:r>
-              <a:rPr lang="ko-KR" altLang="en-US" dirty="0" err="1" smtClean="0"/>
+              <a:rPr lang="ko-KR" altLang="en-US" dirty="0" err="1"/>
               <a:t>추가조건</a:t>
             </a:r>
             <a:r>
-              <a:rPr lang="ko-KR" altLang="en-US" smtClean="0"/>
+              <a:rPr lang="ko-KR" altLang="en-US"/>
               <a:t> </a:t>
             </a:r>
             <a:r>
-              <a:rPr lang="en-US" altLang="ko-KR" smtClean="0"/>
+              <a:rPr lang="en-US" altLang="ko-KR"/>
               <a:t>/ </a:t>
             </a:r>
             <a:r>
-              <a:rPr lang="ko-KR" altLang="en-US" smtClean="0"/>
+              <a:rPr lang="ko-KR" altLang="en-US"/>
               <a:t>기타조건</a:t>
             </a:r>
-            <a:endParaRPr lang="ko-KR" altLang="en-US"/>
           </a:p>
         </p:txBody>
       </p:sp>
@@ -4430,10 +3659,9 @@
           <a:lstStyle/>
           <a:p>
             <a:r>
-              <a:rPr lang="ko-KR" altLang="en-US" smtClean="0"/>
+              <a:rPr lang="ko-KR" altLang="en-US"/>
               <a:t>아직 선생님께서 용어를 정확히 명명하지 않으셨다고 함</a:t>
             </a:r>
-            <a:endParaRPr lang="ko-KR" altLang="en-US"/>
           </a:p>
         </p:txBody>
       </p:sp>
@@ -4441,1639 +3669,6 @@
     <p:extLst>
       <p:ext uri="{BB962C8B-B14F-4D97-AF65-F5344CB8AC3E}">
         <p14:creationId xmlns:p14="http://schemas.microsoft.com/office/powerpoint/2010/main" val="2485691121"/>
-      </p:ext>
-    </p:extLst>
-  </p:cSld>
-  <p:clrMapOvr>
-    <a:masterClrMapping/>
-  </p:clrMapOvr>
-</p:sld>
-</file>
-
-<file path=ppt/slides/slide20.xml><?xml version="1.0" encoding="utf-8"?>
-<p:sld xmlns:a="http://schemas.openxmlformats.org/drawingml/2006/main" xmlns:r="http://schemas.openxmlformats.org/officeDocument/2006/relationships" xmlns:p="http://schemas.openxmlformats.org/presentationml/2006/main">
-  <p:cSld>
-    <p:spTree>
-      <p:nvGrpSpPr>
-        <p:cNvPr id="1" name=""/>
-        <p:cNvGrpSpPr/>
-        <p:nvPr/>
-      </p:nvGrpSpPr>
-      <p:grpSpPr>
-        <a:xfrm>
-          <a:off x="0" y="0"/>
-          <a:ext cx="0" cy="0"/>
-          <a:chOff x="0" y="0"/>
-          <a:chExt cx="0" cy="0"/>
-        </a:xfrm>
-      </p:grpSpPr>
-      <p:sp>
-        <p:nvSpPr>
-          <p:cNvPr id="2" name="제목 1"/>
-          <p:cNvSpPr>
-            <a:spLocks noGrp="1"/>
-          </p:cNvSpPr>
-          <p:nvPr>
-            <p:ph type="title"/>
-          </p:nvPr>
-        </p:nvSpPr>
-        <p:spPr/>
-        <p:txBody>
-          <a:bodyPr/>
-          <a:lstStyle/>
-          <a:p>
-            <a:r>
-              <a:rPr lang="ko-KR" altLang="en-US" smtClean="0"/>
-              <a:t>밸런스</a:t>
-            </a:r>
-            <a:endParaRPr lang="ko-KR" altLang="en-US"/>
-          </a:p>
-        </p:txBody>
-      </p:sp>
-      <p:sp>
-        <p:nvSpPr>
-          <p:cNvPr id="3" name="내용 개체 틀 2"/>
-          <p:cNvSpPr>
-            <a:spLocks noGrp="1"/>
-          </p:cNvSpPr>
-          <p:nvPr>
-            <p:ph idx="1"/>
-          </p:nvPr>
-        </p:nvSpPr>
-        <p:spPr/>
-        <p:txBody>
-          <a:bodyPr>
-            <a:normAutofit lnSpcReduction="10000"/>
-          </a:bodyPr>
-          <a:lstStyle/>
-          <a:p>
-            <a:r>
-              <a:rPr lang="ko-KR" altLang="en-US" smtClean="0"/>
-              <a:t>라이프 사이클 </a:t>
-            </a:r>
-            <a:r>
-              <a:rPr lang="en-US" altLang="ko-KR" smtClean="0"/>
-              <a:t>(</a:t>
-            </a:r>
-            <a:r>
-              <a:rPr lang="ko-KR" altLang="en-US" smtClean="0"/>
-              <a:t>생명 주기</a:t>
-            </a:r>
-            <a:r>
-              <a:rPr lang="en-US" altLang="ko-KR" smtClean="0"/>
-              <a:t>)</a:t>
-            </a:r>
-          </a:p>
-          <a:p>
-            <a:r>
-              <a:rPr lang="ko-KR" altLang="en-US" smtClean="0"/>
-              <a:t>얼마 만큼의 시간 동안 어느 정도의 난이도로 할 지 정하는 영역</a:t>
-            </a:r>
-            <a:endParaRPr lang="en-US" altLang="ko-KR" smtClean="0"/>
-          </a:p>
-          <a:p>
-            <a:endParaRPr lang="en-US" altLang="ko-KR"/>
-          </a:p>
-          <a:p>
-            <a:r>
-              <a:rPr lang="ko-KR" altLang="en-US" smtClean="0"/>
-              <a:t>소모 난이도 </a:t>
-            </a:r>
-            <a:r>
-              <a:rPr lang="en-US" altLang="ko-KR" smtClean="0"/>
-              <a:t>+ </a:t>
-            </a:r>
-            <a:r>
-              <a:rPr lang="ko-KR" altLang="en-US" smtClean="0"/>
-              <a:t>재미있는 시간</a:t>
-            </a:r>
-            <a:endParaRPr lang="en-US" altLang="ko-KR" smtClean="0"/>
-          </a:p>
-          <a:p>
-            <a:endParaRPr lang="en-US" altLang="ko-KR"/>
-          </a:p>
-          <a:p>
-            <a:r>
-              <a:rPr lang="ko-KR" altLang="en-US" smtClean="0"/>
-              <a:t>게임 머니 보상</a:t>
-            </a:r>
-            <a:endParaRPr lang="en-US" altLang="ko-KR" smtClean="0"/>
-          </a:p>
-          <a:p>
-            <a:r>
-              <a:rPr lang="ko-KR" altLang="en-US" smtClean="0"/>
-              <a:t>게임 경험치 보상</a:t>
-            </a:r>
-            <a:endParaRPr lang="en-US" altLang="ko-KR" smtClean="0"/>
-          </a:p>
-          <a:p>
-            <a:r>
-              <a:rPr lang="ko-KR" altLang="en-US" smtClean="0"/>
-              <a:t>필수 요구 아이템</a:t>
-            </a:r>
-            <a:endParaRPr lang="ko-KR" altLang="en-US"/>
-          </a:p>
-        </p:txBody>
-      </p:sp>
-    </p:spTree>
-    <p:extLst>
-      <p:ext uri="{BB962C8B-B14F-4D97-AF65-F5344CB8AC3E}">
-        <p14:creationId xmlns:p14="http://schemas.microsoft.com/office/powerpoint/2010/main" val="3492165951"/>
-      </p:ext>
-    </p:extLst>
-  </p:cSld>
-  <p:clrMapOvr>
-    <a:masterClrMapping/>
-  </p:clrMapOvr>
-</p:sld>
-</file>
-
-<file path=ppt/slides/slide21.xml><?xml version="1.0" encoding="utf-8"?>
-<p:sld xmlns:a="http://schemas.openxmlformats.org/drawingml/2006/main" xmlns:r="http://schemas.openxmlformats.org/officeDocument/2006/relationships" xmlns:p="http://schemas.openxmlformats.org/presentationml/2006/main">
-  <p:cSld>
-    <p:spTree>
-      <p:nvGrpSpPr>
-        <p:cNvPr id="1" name=""/>
-        <p:cNvGrpSpPr/>
-        <p:nvPr/>
-      </p:nvGrpSpPr>
-      <p:grpSpPr>
-        <a:xfrm>
-          <a:off x="0" y="0"/>
-          <a:ext cx="0" cy="0"/>
-          <a:chOff x="0" y="0"/>
-          <a:chExt cx="0" cy="0"/>
-        </a:xfrm>
-      </p:grpSpPr>
-      <p:sp>
-        <p:nvSpPr>
-          <p:cNvPr id="2" name="제목 1"/>
-          <p:cNvSpPr>
-            <a:spLocks noGrp="1"/>
-          </p:cNvSpPr>
-          <p:nvPr>
-            <p:ph type="title"/>
-          </p:nvPr>
-        </p:nvSpPr>
-        <p:spPr/>
-        <p:txBody>
-          <a:bodyPr/>
-          <a:lstStyle/>
-          <a:p>
-            <a:r>
-              <a:rPr lang="ko-KR" altLang="en-US" smtClean="0"/>
-              <a:t>시스템</a:t>
-            </a:r>
-            <a:endParaRPr lang="ko-KR" altLang="en-US"/>
-          </a:p>
-        </p:txBody>
-      </p:sp>
-      <p:sp>
-        <p:nvSpPr>
-          <p:cNvPr id="3" name="내용 개체 틀 2"/>
-          <p:cNvSpPr>
-            <a:spLocks noGrp="1"/>
-          </p:cNvSpPr>
-          <p:nvPr>
-            <p:ph idx="1"/>
-          </p:nvPr>
-        </p:nvSpPr>
-        <p:spPr/>
-        <p:txBody>
-          <a:bodyPr/>
-          <a:lstStyle/>
-          <a:p>
-            <a:r>
-              <a:rPr lang="ko-KR" altLang="en-US" smtClean="0"/>
-              <a:t>유기성 디자인</a:t>
-            </a:r>
-            <a:endParaRPr lang="en-US" altLang="ko-KR" smtClean="0"/>
-          </a:p>
-          <a:p>
-            <a:r>
-              <a:rPr lang="ko-KR" altLang="en-US" smtClean="0"/>
-              <a:t>시스템과 콘텐츠가 서로 잘 맞물리도록 </a:t>
-            </a:r>
-            <a:r>
-              <a:rPr lang="en-US" altLang="ko-KR" smtClean="0"/>
-              <a:t>‘</a:t>
-            </a:r>
-            <a:r>
-              <a:rPr lang="ko-KR" altLang="en-US" smtClean="0"/>
-              <a:t>약속을 설계</a:t>
-            </a:r>
-            <a:r>
-              <a:rPr lang="en-US" altLang="ko-KR" smtClean="0"/>
-              <a:t>’</a:t>
-            </a:r>
-          </a:p>
-          <a:p>
-            <a:endParaRPr lang="en-US" altLang="ko-KR"/>
-          </a:p>
-          <a:p>
-            <a:r>
-              <a:rPr lang="en-US" altLang="ko-KR" smtClean="0"/>
-              <a:t>[WOW] – </a:t>
-            </a:r>
-            <a:r>
-              <a:rPr lang="ko-KR" altLang="en-US" smtClean="0"/>
-              <a:t>옷감 예시</a:t>
-            </a:r>
-            <a:endParaRPr lang="en-US" altLang="ko-KR" smtClean="0"/>
-          </a:p>
-          <a:p>
-            <a:endParaRPr lang="en-US" altLang="ko-KR"/>
-          </a:p>
-          <a:p>
-            <a:r>
-              <a:rPr lang="ko-KR" altLang="en-US" b="1" smtClean="0">
-                <a:solidFill>
-                  <a:srgbClr val="FF0000"/>
-                </a:solidFill>
-              </a:rPr>
-              <a:t>사용법 학습</a:t>
-            </a:r>
-            <a:r>
-              <a:rPr lang="en-US" altLang="ko-KR" b="1" smtClean="0">
-                <a:solidFill>
-                  <a:srgbClr val="FF0000"/>
-                </a:solidFill>
-              </a:rPr>
-              <a:t>(</a:t>
-            </a:r>
-            <a:r>
-              <a:rPr lang="ko-KR" altLang="en-US" b="1" smtClean="0">
-                <a:solidFill>
-                  <a:srgbClr val="FF0000"/>
-                </a:solidFill>
-              </a:rPr>
-              <a:t>튜토리얼</a:t>
-            </a:r>
-            <a:r>
-              <a:rPr lang="en-US" altLang="ko-KR" b="1" smtClean="0">
-                <a:solidFill>
-                  <a:srgbClr val="FF0000"/>
-                </a:solidFill>
-              </a:rPr>
-              <a:t>)</a:t>
-            </a:r>
-          </a:p>
-          <a:p>
-            <a:r>
-              <a:rPr lang="ko-KR" altLang="en-US" b="1" smtClean="0">
-                <a:solidFill>
-                  <a:srgbClr val="FF0000"/>
-                </a:solidFill>
-              </a:rPr>
-              <a:t>활용</a:t>
-            </a:r>
-            <a:endParaRPr lang="en-US" altLang="ko-KR" b="1" smtClean="0">
-              <a:solidFill>
-                <a:srgbClr val="FF0000"/>
-              </a:solidFill>
-            </a:endParaRPr>
-          </a:p>
-        </p:txBody>
-      </p:sp>
-    </p:spTree>
-    <p:extLst>
-      <p:ext uri="{BB962C8B-B14F-4D97-AF65-F5344CB8AC3E}">
-        <p14:creationId xmlns:p14="http://schemas.microsoft.com/office/powerpoint/2010/main" val="1476836200"/>
-      </p:ext>
-    </p:extLst>
-  </p:cSld>
-  <p:clrMapOvr>
-    <a:masterClrMapping/>
-  </p:clrMapOvr>
-</p:sld>
-</file>
-
-<file path=ppt/slides/slide22.xml><?xml version="1.0" encoding="utf-8"?>
-<p:sld xmlns:a="http://schemas.openxmlformats.org/drawingml/2006/main" xmlns:r="http://schemas.openxmlformats.org/officeDocument/2006/relationships" xmlns:p="http://schemas.openxmlformats.org/presentationml/2006/main">
-  <p:cSld>
-    <p:spTree>
-      <p:nvGrpSpPr>
-        <p:cNvPr id="1" name=""/>
-        <p:cNvGrpSpPr/>
-        <p:nvPr/>
-      </p:nvGrpSpPr>
-      <p:grpSpPr>
-        <a:xfrm>
-          <a:off x="0" y="0"/>
-          <a:ext cx="0" cy="0"/>
-          <a:chOff x="0" y="0"/>
-          <a:chExt cx="0" cy="0"/>
-        </a:xfrm>
-      </p:grpSpPr>
-      <p:sp>
-        <p:nvSpPr>
-          <p:cNvPr id="2" name="제목 1"/>
-          <p:cNvSpPr>
-            <a:spLocks noGrp="1"/>
-          </p:cNvSpPr>
-          <p:nvPr>
-            <p:ph type="title"/>
-          </p:nvPr>
-        </p:nvSpPr>
-        <p:spPr/>
-        <p:txBody>
-          <a:bodyPr/>
-          <a:lstStyle/>
-          <a:p>
-            <a:r>
-              <a:rPr lang="ko-KR" altLang="en-US" smtClean="0"/>
-              <a:t>웃음</a:t>
-            </a:r>
-            <a:endParaRPr lang="ko-KR" altLang="en-US"/>
-          </a:p>
-        </p:txBody>
-      </p:sp>
-      <p:sp>
-        <p:nvSpPr>
-          <p:cNvPr id="3" name="내용 개체 틀 2"/>
-          <p:cNvSpPr>
-            <a:spLocks noGrp="1"/>
-          </p:cNvSpPr>
-          <p:nvPr>
-            <p:ph idx="1"/>
-          </p:nvPr>
-        </p:nvSpPr>
-        <p:spPr/>
-        <p:txBody>
-          <a:bodyPr/>
-          <a:lstStyle/>
-          <a:p>
-            <a:r>
-              <a:rPr lang="ko-KR" altLang="en-US" smtClean="0"/>
-              <a:t>개발자의 유희</a:t>
-            </a:r>
-            <a:endParaRPr lang="en-US" altLang="ko-KR" smtClean="0"/>
-          </a:p>
-          <a:p>
-            <a:r>
-              <a:rPr lang="ko-KR" altLang="en-US" smtClean="0"/>
-              <a:t>사회 풍자</a:t>
-            </a:r>
-            <a:endParaRPr lang="en-US" altLang="ko-KR" smtClean="0"/>
-          </a:p>
-          <a:p>
-            <a:r>
-              <a:rPr lang="ko-KR" altLang="en-US" smtClean="0"/>
-              <a:t>오마쥬</a:t>
-            </a:r>
-            <a:endParaRPr lang="ko-KR" altLang="en-US"/>
-          </a:p>
-        </p:txBody>
-      </p:sp>
-    </p:spTree>
-    <p:extLst>
-      <p:ext uri="{BB962C8B-B14F-4D97-AF65-F5344CB8AC3E}">
-        <p14:creationId xmlns:p14="http://schemas.microsoft.com/office/powerpoint/2010/main" val="1863423515"/>
-      </p:ext>
-    </p:extLst>
-  </p:cSld>
-  <p:clrMapOvr>
-    <a:masterClrMapping/>
-  </p:clrMapOvr>
-</p:sld>
-</file>
-
-<file path=ppt/slides/slide23.xml><?xml version="1.0" encoding="utf-8"?>
-<p:sld xmlns:a="http://schemas.openxmlformats.org/drawingml/2006/main" xmlns:r="http://schemas.openxmlformats.org/officeDocument/2006/relationships" xmlns:p="http://schemas.openxmlformats.org/presentationml/2006/main">
-  <p:cSld>
-    <p:spTree>
-      <p:nvGrpSpPr>
-        <p:cNvPr id="1" name=""/>
-        <p:cNvGrpSpPr/>
-        <p:nvPr/>
-      </p:nvGrpSpPr>
-      <p:grpSpPr>
-        <a:xfrm>
-          <a:off x="0" y="0"/>
-          <a:ext cx="0" cy="0"/>
-          <a:chOff x="0" y="0"/>
-          <a:chExt cx="0" cy="0"/>
-        </a:xfrm>
-      </p:grpSpPr>
-      <p:sp>
-        <p:nvSpPr>
-          <p:cNvPr id="2" name="제목 1"/>
-          <p:cNvSpPr>
-            <a:spLocks noGrp="1"/>
-          </p:cNvSpPr>
-          <p:nvPr>
-            <p:ph type="title"/>
-          </p:nvPr>
-        </p:nvSpPr>
-        <p:spPr/>
-        <p:txBody>
-          <a:bodyPr/>
-          <a:lstStyle/>
-          <a:p>
-            <a:r>
-              <a:rPr lang="ko-KR" altLang="en-US" smtClean="0"/>
-              <a:t>이벤트</a:t>
-            </a:r>
-            <a:endParaRPr lang="ko-KR" altLang="en-US"/>
-          </a:p>
-        </p:txBody>
-      </p:sp>
-      <p:sp>
-        <p:nvSpPr>
-          <p:cNvPr id="3" name="내용 개체 틀 2"/>
-          <p:cNvSpPr>
-            <a:spLocks noGrp="1"/>
-          </p:cNvSpPr>
-          <p:nvPr>
-            <p:ph idx="1"/>
-          </p:nvPr>
-        </p:nvSpPr>
-        <p:spPr/>
-        <p:txBody>
-          <a:bodyPr/>
-          <a:lstStyle/>
-          <a:p>
-            <a:r>
-              <a:rPr lang="en-US" altLang="ko-KR" smtClean="0"/>
-              <a:t>CRM – </a:t>
-            </a:r>
-            <a:r>
-              <a:rPr lang="ko-KR" altLang="en-US" smtClean="0"/>
-              <a:t>고객과의 관계를 관리</a:t>
-            </a:r>
-            <a:endParaRPr lang="en-US" altLang="ko-KR" smtClean="0"/>
-          </a:p>
-          <a:p>
-            <a:endParaRPr lang="en-US" altLang="ko-KR"/>
-          </a:p>
-          <a:p>
-            <a:r>
-              <a:rPr lang="ko-KR" altLang="en-US" smtClean="0"/>
-              <a:t>국가별 로컬라이징 </a:t>
-            </a:r>
-            <a:r>
-              <a:rPr lang="en-US" altLang="ko-KR" b="1" smtClean="0">
-                <a:solidFill>
-                  <a:srgbClr val="FF0000"/>
-                </a:solidFill>
-              </a:rPr>
-              <a:t>=&gt; </a:t>
-            </a:r>
-            <a:r>
-              <a:rPr lang="ko-KR" altLang="en-US" b="1" smtClean="0">
-                <a:solidFill>
-                  <a:srgbClr val="FF0000"/>
-                </a:solidFill>
-              </a:rPr>
-              <a:t>국가별 특색 수렴</a:t>
-            </a:r>
-            <a:endParaRPr lang="en-US" altLang="ko-KR" b="1" smtClean="0">
-              <a:solidFill>
-                <a:srgbClr val="FF0000"/>
-              </a:solidFill>
-            </a:endParaRPr>
-          </a:p>
-          <a:p>
-            <a:r>
-              <a:rPr lang="ko-KR" altLang="en-US" smtClean="0"/>
-              <a:t>국내 고객 유치</a:t>
-            </a:r>
-            <a:r>
-              <a:rPr lang="en-US" altLang="ko-KR" smtClean="0"/>
-              <a:t>	     </a:t>
-            </a:r>
-            <a:r>
-              <a:rPr lang="en-US" altLang="ko-KR" b="1" smtClean="0">
-                <a:solidFill>
-                  <a:srgbClr val="FF0000"/>
-                </a:solidFill>
-              </a:rPr>
-              <a:t>=&gt; </a:t>
-            </a:r>
-            <a:r>
-              <a:rPr lang="ko-KR" altLang="en-US" b="1" smtClean="0">
-                <a:solidFill>
-                  <a:srgbClr val="FF0000"/>
-                </a:solidFill>
-              </a:rPr>
-              <a:t>킬러 콘텐츠와의 접근성</a:t>
-            </a:r>
-            <a:endParaRPr lang="en-US" altLang="ko-KR" b="1" smtClean="0">
-              <a:solidFill>
-                <a:srgbClr val="FF0000"/>
-              </a:solidFill>
-            </a:endParaRPr>
-          </a:p>
-          <a:p>
-            <a:r>
-              <a:rPr lang="ko-KR" altLang="en-US" smtClean="0"/>
-              <a:t>시즌 부여</a:t>
-            </a:r>
-            <a:endParaRPr lang="en-US" altLang="ko-KR" smtClean="0"/>
-          </a:p>
-          <a:p>
-            <a:r>
-              <a:rPr lang="en-US" altLang="ko-KR" smtClean="0"/>
-              <a:t>BM</a:t>
-            </a:r>
-            <a:r>
-              <a:rPr lang="ko-KR" altLang="en-US" smtClean="0"/>
-              <a:t>용 이벤트</a:t>
-            </a:r>
-            <a:endParaRPr lang="en-US" altLang="ko-KR" smtClean="0"/>
-          </a:p>
-          <a:p>
-            <a:r>
-              <a:rPr lang="ko-KR" altLang="en-US" smtClean="0"/>
-              <a:t>출석 체크 이벤트 같은 타입화된 이벤트</a:t>
-            </a:r>
-            <a:endParaRPr lang="ko-KR" altLang="en-US"/>
-          </a:p>
-        </p:txBody>
-      </p:sp>
-    </p:spTree>
-    <p:extLst>
-      <p:ext uri="{BB962C8B-B14F-4D97-AF65-F5344CB8AC3E}">
-        <p14:creationId xmlns:p14="http://schemas.microsoft.com/office/powerpoint/2010/main" val="1464112840"/>
-      </p:ext>
-    </p:extLst>
-  </p:cSld>
-  <p:clrMapOvr>
-    <a:masterClrMapping/>
-  </p:clrMapOvr>
-</p:sld>
-</file>
-
-<file path=ppt/slides/slide24.xml><?xml version="1.0" encoding="utf-8"?>
-<p:sld xmlns:a="http://schemas.openxmlformats.org/drawingml/2006/main" xmlns:r="http://schemas.openxmlformats.org/officeDocument/2006/relationships" xmlns:p="http://schemas.openxmlformats.org/presentationml/2006/main">
-  <p:cSld>
-    <p:spTree>
-      <p:nvGrpSpPr>
-        <p:cNvPr id="1" name=""/>
-        <p:cNvGrpSpPr/>
-        <p:nvPr/>
-      </p:nvGrpSpPr>
-      <p:grpSpPr>
-        <a:xfrm>
-          <a:off x="0" y="0"/>
-          <a:ext cx="0" cy="0"/>
-          <a:chOff x="0" y="0"/>
-          <a:chExt cx="0" cy="0"/>
-        </a:xfrm>
-      </p:grpSpPr>
-      <p:sp>
-        <p:nvSpPr>
-          <p:cNvPr id="2" name="제목 1"/>
-          <p:cNvSpPr>
-            <a:spLocks noGrp="1"/>
-          </p:cNvSpPr>
-          <p:nvPr>
-            <p:ph type="title"/>
-          </p:nvPr>
-        </p:nvSpPr>
-        <p:spPr/>
-        <p:txBody>
-          <a:bodyPr/>
-          <a:lstStyle/>
-          <a:p>
-            <a:r>
-              <a:rPr lang="ko-KR" altLang="en-US" smtClean="0"/>
-              <a:t>퀘스트의 조건</a:t>
-            </a:r>
-            <a:endParaRPr lang="ko-KR" altLang="en-US"/>
-          </a:p>
-        </p:txBody>
-      </p:sp>
-      <p:sp>
-        <p:nvSpPr>
-          <p:cNvPr id="3" name="내용 개체 틀 2"/>
-          <p:cNvSpPr>
-            <a:spLocks noGrp="1"/>
-          </p:cNvSpPr>
-          <p:nvPr>
-            <p:ph idx="1"/>
-          </p:nvPr>
-        </p:nvSpPr>
-        <p:spPr/>
-        <p:txBody>
-          <a:bodyPr/>
-          <a:lstStyle/>
-          <a:p>
-            <a:r>
-              <a:rPr lang="ko-KR" altLang="en-US" smtClean="0"/>
-              <a:t>부여조건</a:t>
-            </a:r>
-            <a:endParaRPr lang="en-US" altLang="ko-KR" smtClean="0"/>
-          </a:p>
-          <a:p>
-            <a:r>
-              <a:rPr lang="ko-KR" altLang="en-US" smtClean="0"/>
-              <a:t>발동조건</a:t>
-            </a:r>
-            <a:endParaRPr lang="en-US" altLang="ko-KR" smtClean="0"/>
-          </a:p>
-          <a:p>
-            <a:r>
-              <a:rPr lang="ko-KR" altLang="en-US" smtClean="0"/>
-              <a:t>진행조건</a:t>
-            </a:r>
-            <a:endParaRPr lang="en-US" altLang="ko-KR" smtClean="0"/>
-          </a:p>
-          <a:p>
-            <a:r>
-              <a:rPr lang="ko-KR" altLang="en-US" smtClean="0"/>
-              <a:t>완료조건</a:t>
-            </a:r>
-            <a:endParaRPr lang="en-US" altLang="ko-KR" smtClean="0"/>
-          </a:p>
-          <a:p>
-            <a:r>
-              <a:rPr lang="ko-KR" altLang="en-US" smtClean="0"/>
-              <a:t>완료보상조건</a:t>
-            </a:r>
-            <a:endParaRPr lang="ko-KR" altLang="en-US"/>
-          </a:p>
-        </p:txBody>
-      </p:sp>
-    </p:spTree>
-    <p:extLst>
-      <p:ext uri="{BB962C8B-B14F-4D97-AF65-F5344CB8AC3E}">
-        <p14:creationId xmlns:p14="http://schemas.microsoft.com/office/powerpoint/2010/main" val="1832786870"/>
-      </p:ext>
-    </p:extLst>
-  </p:cSld>
-  <p:clrMapOvr>
-    <a:masterClrMapping/>
-  </p:clrMapOvr>
-</p:sld>
-</file>
-
-<file path=ppt/slides/slide25.xml><?xml version="1.0" encoding="utf-8"?>
-<p:sld xmlns:a="http://schemas.openxmlformats.org/drawingml/2006/main" xmlns:r="http://schemas.openxmlformats.org/officeDocument/2006/relationships" xmlns:p="http://schemas.openxmlformats.org/presentationml/2006/main">
-  <p:cSld>
-    <p:spTree>
-      <p:nvGrpSpPr>
-        <p:cNvPr id="1" name=""/>
-        <p:cNvGrpSpPr/>
-        <p:nvPr/>
-      </p:nvGrpSpPr>
-      <p:grpSpPr>
-        <a:xfrm>
-          <a:off x="0" y="0"/>
-          <a:ext cx="0" cy="0"/>
-          <a:chOff x="0" y="0"/>
-          <a:chExt cx="0" cy="0"/>
-        </a:xfrm>
-      </p:grpSpPr>
-      <p:sp>
-        <p:nvSpPr>
-          <p:cNvPr id="2" name="제목 1"/>
-          <p:cNvSpPr>
-            <a:spLocks noGrp="1"/>
-          </p:cNvSpPr>
-          <p:nvPr>
-            <p:ph type="title"/>
-          </p:nvPr>
-        </p:nvSpPr>
-        <p:spPr/>
-        <p:txBody>
-          <a:bodyPr/>
-          <a:lstStyle/>
-          <a:p>
-            <a:r>
-              <a:rPr lang="ko-KR" altLang="en-US" smtClean="0"/>
-              <a:t>부여조건</a:t>
-            </a:r>
-            <a:endParaRPr lang="ko-KR" altLang="en-US"/>
-          </a:p>
-        </p:txBody>
-      </p:sp>
-      <p:sp>
-        <p:nvSpPr>
-          <p:cNvPr id="3" name="내용 개체 틀 2"/>
-          <p:cNvSpPr>
-            <a:spLocks noGrp="1"/>
-          </p:cNvSpPr>
-          <p:nvPr>
-            <p:ph idx="1"/>
-          </p:nvPr>
-        </p:nvSpPr>
-        <p:spPr/>
-        <p:txBody>
-          <a:bodyPr>
-            <a:normAutofit fontScale="70000" lnSpcReduction="20000"/>
-          </a:bodyPr>
-          <a:lstStyle/>
-          <a:p>
-            <a:r>
-              <a:rPr lang="ko-KR" altLang="en-US" smtClean="0"/>
-              <a:t>직업 </a:t>
-            </a:r>
-            <a:r>
-              <a:rPr lang="en-US" altLang="ko-KR" smtClean="0"/>
-              <a:t>– </a:t>
-            </a:r>
-            <a:r>
-              <a:rPr lang="ko-KR" altLang="en-US" smtClean="0"/>
-              <a:t>승급</a:t>
-            </a:r>
-            <a:r>
-              <a:rPr lang="en-US" altLang="ko-KR" smtClean="0"/>
-              <a:t>/</a:t>
-            </a:r>
-            <a:r>
-              <a:rPr lang="ko-KR" altLang="en-US" smtClean="0"/>
-              <a:t>전직</a:t>
-            </a:r>
-            <a:endParaRPr lang="en-US" altLang="ko-KR" smtClean="0"/>
-          </a:p>
-          <a:p>
-            <a:r>
-              <a:rPr lang="ko-KR" altLang="en-US" smtClean="0"/>
-              <a:t>레벨</a:t>
-            </a:r>
-            <a:endParaRPr lang="en-US" altLang="ko-KR" smtClean="0"/>
-          </a:p>
-          <a:p>
-            <a:r>
-              <a:rPr lang="ko-KR" altLang="en-US" smtClean="0"/>
-              <a:t>몬스터 킬 상태 </a:t>
-            </a:r>
-            <a:r>
-              <a:rPr lang="en-US" altLang="ko-KR" b="1" smtClean="0">
-                <a:solidFill>
-                  <a:srgbClr val="FF0000"/>
-                </a:solidFill>
-              </a:rPr>
-              <a:t>– </a:t>
-            </a:r>
-            <a:r>
-              <a:rPr lang="ko-KR" altLang="en-US" b="1" smtClean="0">
-                <a:solidFill>
-                  <a:srgbClr val="FF0000"/>
-                </a:solidFill>
-              </a:rPr>
-              <a:t>던전 공략 상태 </a:t>
-            </a:r>
-            <a:r>
-              <a:rPr lang="en-US" altLang="ko-KR" b="1" smtClean="0">
-                <a:solidFill>
-                  <a:srgbClr val="FF0000"/>
-                </a:solidFill>
-              </a:rPr>
-              <a:t>/ </a:t>
-            </a:r>
-            <a:r>
-              <a:rPr lang="ko-KR" altLang="en-US" b="1" smtClean="0">
-                <a:solidFill>
-                  <a:srgbClr val="FF0000"/>
-                </a:solidFill>
-              </a:rPr>
-              <a:t>몬스터 </a:t>
-            </a:r>
-            <a:r>
-              <a:rPr lang="en-US" altLang="ko-KR" b="1" smtClean="0">
-                <a:solidFill>
-                  <a:srgbClr val="FF0000"/>
-                </a:solidFill>
-              </a:rPr>
-              <a:t>HP(%) </a:t>
-            </a:r>
-            <a:r>
-              <a:rPr lang="ko-KR" altLang="en-US" b="1" smtClean="0">
-                <a:solidFill>
-                  <a:srgbClr val="FF0000"/>
-                </a:solidFill>
-              </a:rPr>
-              <a:t>체크</a:t>
-            </a:r>
-            <a:endParaRPr lang="en-US" altLang="ko-KR" b="1" smtClean="0">
-              <a:solidFill>
-                <a:srgbClr val="FF0000"/>
-              </a:solidFill>
-            </a:endParaRPr>
-          </a:p>
-          <a:p>
-            <a:r>
-              <a:rPr lang="ko-KR" altLang="en-US" smtClean="0"/>
-              <a:t>이전 퀘스트 완료 및 진행 상태</a:t>
-            </a:r>
-            <a:endParaRPr lang="en-US" altLang="ko-KR" smtClean="0"/>
-          </a:p>
-          <a:p>
-            <a:endParaRPr lang="en-US" altLang="ko-KR"/>
-          </a:p>
-          <a:p>
-            <a:r>
-              <a:rPr lang="ko-KR" altLang="en-US" smtClean="0"/>
-              <a:t>위치 정보 </a:t>
-            </a:r>
-            <a:r>
-              <a:rPr lang="en-US" altLang="ko-KR" b="1" smtClean="0">
-                <a:solidFill>
-                  <a:srgbClr val="FF0000"/>
-                </a:solidFill>
-              </a:rPr>
-              <a:t>– Dummy Check (Volume In/Out)</a:t>
-            </a:r>
-          </a:p>
-          <a:p>
-            <a:r>
-              <a:rPr lang="ko-KR" altLang="en-US" smtClean="0"/>
-              <a:t>업적</a:t>
-            </a:r>
-            <a:r>
-              <a:rPr lang="en-US" altLang="ko-KR" smtClean="0"/>
-              <a:t>/</a:t>
-            </a:r>
-            <a:r>
-              <a:rPr lang="ko-KR" altLang="en-US" smtClean="0"/>
-              <a:t>칭호 상태</a:t>
-            </a:r>
-            <a:endParaRPr lang="en-US" altLang="ko-KR" smtClean="0"/>
-          </a:p>
-          <a:p>
-            <a:r>
-              <a:rPr lang="ko-KR" altLang="en-US" smtClean="0"/>
-              <a:t>인벤토리 및 창고 아이템 습득 상태</a:t>
-            </a:r>
-            <a:endParaRPr lang="en-US" altLang="ko-KR" smtClean="0"/>
-          </a:p>
-          <a:p>
-            <a:pPr lvl="1"/>
-            <a:r>
-              <a:rPr lang="ko-KR" altLang="en-US" b="1" smtClean="0">
-                <a:solidFill>
-                  <a:srgbClr val="FF0000"/>
-                </a:solidFill>
-              </a:rPr>
-              <a:t>소모아이템 사용 상태</a:t>
-            </a:r>
-            <a:r>
-              <a:rPr lang="en-US" altLang="ko-KR" b="1" smtClean="0">
-                <a:solidFill>
-                  <a:srgbClr val="FF0000"/>
-                </a:solidFill>
-              </a:rPr>
-              <a:t>(=</a:t>
-            </a:r>
-            <a:r>
-              <a:rPr lang="ko-KR" altLang="en-US" b="1" smtClean="0">
-                <a:solidFill>
-                  <a:srgbClr val="FF0000"/>
-                </a:solidFill>
-              </a:rPr>
-              <a:t>스킬</a:t>
-            </a:r>
-            <a:r>
-              <a:rPr lang="en-US" altLang="ko-KR" b="1" smtClean="0">
-                <a:solidFill>
-                  <a:srgbClr val="FF0000"/>
-                </a:solidFill>
-              </a:rPr>
-              <a:t>)</a:t>
-            </a:r>
-          </a:p>
-          <a:p>
-            <a:pPr lvl="1"/>
-            <a:r>
-              <a:rPr lang="ko-KR" altLang="en-US" b="1" smtClean="0">
-                <a:solidFill>
-                  <a:srgbClr val="FF0000"/>
-                </a:solidFill>
-              </a:rPr>
-              <a:t>아이템 보유</a:t>
-            </a:r>
-            <a:r>
-              <a:rPr lang="en-US" altLang="ko-KR" b="1" smtClean="0">
-                <a:solidFill>
-                  <a:srgbClr val="FF0000"/>
-                </a:solidFill>
-              </a:rPr>
-              <a:t>/</a:t>
-            </a:r>
-            <a:r>
-              <a:rPr lang="ko-KR" altLang="en-US" b="1" smtClean="0">
-                <a:solidFill>
-                  <a:srgbClr val="FF0000"/>
-                </a:solidFill>
-              </a:rPr>
-              <a:t>거래 상태</a:t>
-            </a:r>
-            <a:endParaRPr lang="en-US" altLang="ko-KR" b="1" smtClean="0">
-              <a:solidFill>
-                <a:srgbClr val="FF0000"/>
-              </a:solidFill>
-            </a:endParaRPr>
-          </a:p>
-          <a:p>
-            <a:pPr lvl="1"/>
-            <a:r>
-              <a:rPr lang="ko-KR" altLang="en-US" b="1" smtClean="0">
-                <a:solidFill>
-                  <a:srgbClr val="FF0000"/>
-                </a:solidFill>
-              </a:rPr>
-              <a:t>가상의 아이템</a:t>
-            </a:r>
-            <a:endParaRPr lang="en-US" altLang="ko-KR" b="1" smtClean="0">
-              <a:solidFill>
-                <a:srgbClr val="FF0000"/>
-              </a:solidFill>
-            </a:endParaRPr>
-          </a:p>
-          <a:p>
-            <a:r>
-              <a:rPr lang="ko-KR" altLang="en-US" smtClean="0"/>
-              <a:t>스킬 습득 및 사용 상태</a:t>
-            </a:r>
-            <a:r>
-              <a:rPr lang="en-US" altLang="ko-KR" smtClean="0"/>
-              <a:t>, </a:t>
-            </a:r>
-            <a:r>
-              <a:rPr lang="ko-KR" altLang="en-US" smtClean="0"/>
-              <a:t>버프</a:t>
-            </a:r>
-            <a:r>
-              <a:rPr lang="en-US" altLang="ko-KR" smtClean="0"/>
-              <a:t>/</a:t>
-            </a:r>
-            <a:r>
-              <a:rPr lang="ko-KR" altLang="en-US" smtClean="0"/>
-              <a:t>디버프</a:t>
-            </a:r>
-            <a:endParaRPr lang="en-US" altLang="ko-KR" smtClean="0"/>
-          </a:p>
-          <a:p>
-            <a:r>
-              <a:rPr lang="ko-KR" altLang="en-US" b="1" smtClean="0">
-                <a:solidFill>
-                  <a:srgbClr val="FF0000"/>
-                </a:solidFill>
-              </a:rPr>
-              <a:t>국가나 종족 등의 소속 및 평판 데이터 등을 통한 귀속상태여부 체크</a:t>
-            </a:r>
-            <a:endParaRPr lang="ko-KR" altLang="en-US" b="1">
-              <a:solidFill>
-                <a:srgbClr val="FF0000"/>
-              </a:solidFill>
-            </a:endParaRPr>
-          </a:p>
-        </p:txBody>
-      </p:sp>
-    </p:spTree>
-    <p:extLst>
-      <p:ext uri="{BB962C8B-B14F-4D97-AF65-F5344CB8AC3E}">
-        <p14:creationId xmlns:p14="http://schemas.microsoft.com/office/powerpoint/2010/main" val="2426901003"/>
-      </p:ext>
-    </p:extLst>
-  </p:cSld>
-  <p:clrMapOvr>
-    <a:masterClrMapping/>
-  </p:clrMapOvr>
-</p:sld>
-</file>
-
-<file path=ppt/slides/slide26.xml><?xml version="1.0" encoding="utf-8"?>
-<p:sld xmlns:a="http://schemas.openxmlformats.org/drawingml/2006/main" xmlns:r="http://schemas.openxmlformats.org/officeDocument/2006/relationships" xmlns:p="http://schemas.openxmlformats.org/presentationml/2006/main">
-  <p:cSld>
-    <p:spTree>
-      <p:nvGrpSpPr>
-        <p:cNvPr id="1" name=""/>
-        <p:cNvGrpSpPr/>
-        <p:nvPr/>
-      </p:nvGrpSpPr>
-      <p:grpSpPr>
-        <a:xfrm>
-          <a:off x="0" y="0"/>
-          <a:ext cx="0" cy="0"/>
-          <a:chOff x="0" y="0"/>
-          <a:chExt cx="0" cy="0"/>
-        </a:xfrm>
-      </p:grpSpPr>
-      <p:sp>
-        <p:nvSpPr>
-          <p:cNvPr id="2" name="제목 1"/>
-          <p:cNvSpPr>
-            <a:spLocks noGrp="1"/>
-          </p:cNvSpPr>
-          <p:nvPr>
-            <p:ph type="title"/>
-          </p:nvPr>
-        </p:nvSpPr>
-        <p:spPr/>
-        <p:txBody>
-          <a:bodyPr/>
-          <a:lstStyle/>
-          <a:p>
-            <a:r>
-              <a:rPr lang="ko-KR" altLang="en-US" smtClean="0"/>
-              <a:t>발동 조건</a:t>
-            </a:r>
-            <a:endParaRPr lang="ko-KR" altLang="en-US"/>
-          </a:p>
-        </p:txBody>
-      </p:sp>
-      <p:sp>
-        <p:nvSpPr>
-          <p:cNvPr id="3" name="내용 개체 틀 2"/>
-          <p:cNvSpPr>
-            <a:spLocks noGrp="1"/>
-          </p:cNvSpPr>
-          <p:nvPr>
-            <p:ph idx="1"/>
-          </p:nvPr>
-        </p:nvSpPr>
-        <p:spPr/>
-        <p:txBody>
-          <a:bodyPr/>
-          <a:lstStyle/>
-          <a:p>
-            <a:r>
-              <a:rPr lang="en-US" altLang="ko-KR" smtClean="0"/>
-              <a:t>NPC </a:t>
-            </a:r>
-            <a:r>
-              <a:rPr lang="ko-KR" altLang="en-US" smtClean="0"/>
-              <a:t>대화</a:t>
-            </a:r>
-            <a:endParaRPr lang="en-US" altLang="ko-KR" smtClean="0"/>
-          </a:p>
-          <a:p>
-            <a:r>
-              <a:rPr lang="ko-KR" altLang="en-US" smtClean="0"/>
-              <a:t>우편물 시스템</a:t>
-            </a:r>
-            <a:endParaRPr lang="en-US" altLang="ko-KR" smtClean="0"/>
-          </a:p>
-          <a:p>
-            <a:r>
-              <a:rPr lang="en-US" altLang="ko-KR" smtClean="0"/>
-              <a:t>UI Event</a:t>
-            </a:r>
-          </a:p>
-          <a:p>
-            <a:r>
-              <a:rPr lang="ko-KR" altLang="en-US" smtClean="0"/>
-              <a:t>아이템</a:t>
-            </a:r>
-            <a:r>
-              <a:rPr lang="en-US" altLang="ko-KR" b="1" smtClean="0">
-                <a:solidFill>
-                  <a:srgbClr val="FF0000"/>
-                </a:solidFill>
-              </a:rPr>
-              <a:t>(=</a:t>
-            </a:r>
-            <a:r>
-              <a:rPr lang="ko-KR" altLang="en-US" b="1" smtClean="0">
-                <a:solidFill>
-                  <a:srgbClr val="FF0000"/>
-                </a:solidFill>
-              </a:rPr>
-              <a:t>스킬</a:t>
-            </a:r>
-            <a:r>
-              <a:rPr lang="en-US" altLang="ko-KR" b="1" smtClean="0">
-                <a:solidFill>
-                  <a:srgbClr val="FF0000"/>
-                </a:solidFill>
-              </a:rPr>
-              <a:t>) </a:t>
-            </a:r>
-            <a:r>
-              <a:rPr lang="ko-KR" altLang="en-US" b="1" smtClean="0">
-                <a:solidFill>
-                  <a:srgbClr val="FF0000"/>
-                </a:solidFill>
-              </a:rPr>
-              <a:t>획득 및 사용</a:t>
-            </a:r>
-            <a:endParaRPr lang="en-US" altLang="ko-KR" b="1" smtClean="0">
-              <a:solidFill>
-                <a:srgbClr val="FF0000"/>
-              </a:solidFill>
-            </a:endParaRPr>
-          </a:p>
-          <a:p>
-            <a:r>
-              <a:rPr lang="en-US" altLang="ko-KR" smtClean="0"/>
-              <a:t>Event Dummy</a:t>
-            </a:r>
-          </a:p>
-          <a:p>
-            <a:r>
-              <a:rPr lang="en-US" altLang="ko-KR" smtClean="0"/>
-              <a:t>TIME</a:t>
-            </a:r>
-          </a:p>
-          <a:p>
-            <a:r>
-              <a:rPr lang="en-US" altLang="ko-KR" b="1" smtClean="0">
-                <a:solidFill>
-                  <a:srgbClr val="FF0000"/>
-                </a:solidFill>
-              </a:rPr>
-              <a:t>Event</a:t>
-            </a:r>
-          </a:p>
-          <a:p>
-            <a:r>
-              <a:rPr lang="en-US" altLang="ko-KR" smtClean="0"/>
-              <a:t>AI</a:t>
-            </a:r>
-            <a:endParaRPr lang="ko-KR" altLang="en-US"/>
-          </a:p>
-        </p:txBody>
-      </p:sp>
-    </p:spTree>
-    <p:extLst>
-      <p:ext uri="{BB962C8B-B14F-4D97-AF65-F5344CB8AC3E}">
-        <p14:creationId xmlns:p14="http://schemas.microsoft.com/office/powerpoint/2010/main" val="919743998"/>
-      </p:ext>
-    </p:extLst>
-  </p:cSld>
-  <p:clrMapOvr>
-    <a:masterClrMapping/>
-  </p:clrMapOvr>
-</p:sld>
-</file>
-
-<file path=ppt/slides/slide27.xml><?xml version="1.0" encoding="utf-8"?>
-<p:sld xmlns:a="http://schemas.openxmlformats.org/drawingml/2006/main" xmlns:r="http://schemas.openxmlformats.org/officeDocument/2006/relationships" xmlns:p="http://schemas.openxmlformats.org/presentationml/2006/main">
-  <p:cSld>
-    <p:spTree>
-      <p:nvGrpSpPr>
-        <p:cNvPr id="1" name=""/>
-        <p:cNvGrpSpPr/>
-        <p:nvPr/>
-      </p:nvGrpSpPr>
-      <p:grpSpPr>
-        <a:xfrm>
-          <a:off x="0" y="0"/>
-          <a:ext cx="0" cy="0"/>
-          <a:chOff x="0" y="0"/>
-          <a:chExt cx="0" cy="0"/>
-        </a:xfrm>
-      </p:grpSpPr>
-      <p:sp>
-        <p:nvSpPr>
-          <p:cNvPr id="2" name="제목 1"/>
-          <p:cNvSpPr>
-            <a:spLocks noGrp="1"/>
-          </p:cNvSpPr>
-          <p:nvPr>
-            <p:ph type="title"/>
-          </p:nvPr>
-        </p:nvSpPr>
-        <p:spPr/>
-        <p:txBody>
-          <a:bodyPr/>
-          <a:lstStyle/>
-          <a:p>
-            <a:r>
-              <a:rPr lang="ko-KR" altLang="en-US" smtClean="0"/>
-              <a:t>진행조건</a:t>
-            </a:r>
-            <a:endParaRPr lang="ko-KR" altLang="en-US"/>
-          </a:p>
-        </p:txBody>
-      </p:sp>
-      <p:sp>
-        <p:nvSpPr>
-          <p:cNvPr id="3" name="내용 개체 틀 2"/>
-          <p:cNvSpPr>
-            <a:spLocks noGrp="1"/>
-          </p:cNvSpPr>
-          <p:nvPr>
-            <p:ph idx="1"/>
-          </p:nvPr>
-        </p:nvSpPr>
-        <p:spPr/>
-        <p:txBody>
-          <a:bodyPr/>
-          <a:lstStyle/>
-          <a:p>
-            <a:r>
-              <a:rPr lang="ko-KR" altLang="en-US" smtClean="0"/>
-              <a:t>직렬식 </a:t>
-            </a:r>
-            <a:r>
-              <a:rPr lang="en-US" altLang="ko-KR" smtClean="0"/>
-              <a:t>: </a:t>
-            </a:r>
-            <a:r>
-              <a:rPr lang="ko-KR" altLang="en-US" smtClean="0"/>
-              <a:t>이전 조건을 완료하지 못하면 다음 조건을 시작할 수 </a:t>
-            </a:r>
-            <a:r>
-              <a:rPr lang="en-US" altLang="ko-KR" smtClean="0"/>
-              <a:t>x</a:t>
-            </a:r>
-          </a:p>
-          <a:p>
-            <a:r>
-              <a:rPr lang="ko-KR" altLang="en-US" smtClean="0"/>
-              <a:t>병렬식 </a:t>
-            </a:r>
-            <a:r>
-              <a:rPr lang="en-US" altLang="ko-KR" smtClean="0"/>
-              <a:t>: </a:t>
-            </a:r>
-            <a:r>
-              <a:rPr lang="ko-KR" altLang="en-US" smtClean="0"/>
-              <a:t>어떤 조건을 먼저 시작해도 상관 </a:t>
-            </a:r>
-            <a:r>
-              <a:rPr lang="en-US" altLang="ko-KR" smtClean="0"/>
-              <a:t>x. </a:t>
-            </a:r>
-            <a:r>
-              <a:rPr lang="ko-KR" altLang="en-US" smtClean="0"/>
-              <a:t>즉</a:t>
-            </a:r>
-            <a:r>
-              <a:rPr lang="en-US" altLang="ko-KR" smtClean="0"/>
-              <a:t>, </a:t>
-            </a:r>
-            <a:r>
-              <a:rPr lang="ko-KR" altLang="en-US" smtClean="0"/>
-              <a:t>조건의 진행 순서는 상관</a:t>
-            </a:r>
-            <a:r>
-              <a:rPr lang="en-US" altLang="ko-KR"/>
-              <a:t> </a:t>
-            </a:r>
-            <a:r>
-              <a:rPr lang="en-US" altLang="ko-KR" smtClean="0"/>
-              <a:t>x.</a:t>
-            </a:r>
-          </a:p>
-          <a:p>
-            <a:endParaRPr lang="en-US" altLang="ko-KR"/>
-          </a:p>
-          <a:p>
-            <a:r>
-              <a:rPr lang="ko-KR" altLang="en-US" smtClean="0"/>
-              <a:t>다만</a:t>
-            </a:r>
-            <a:r>
-              <a:rPr lang="en-US" altLang="ko-KR" smtClean="0"/>
-              <a:t>, </a:t>
-            </a:r>
-            <a:r>
-              <a:rPr lang="ko-KR" altLang="en-US" smtClean="0"/>
-              <a:t>조건 달성 실패 시 어디부터 다시 시작할 지에 대해서 잘 설계할 필요가 있다</a:t>
-            </a:r>
-            <a:r>
-              <a:rPr lang="en-US" altLang="ko-KR" smtClean="0"/>
-              <a:t>.</a:t>
-            </a:r>
-            <a:endParaRPr lang="ko-KR" altLang="en-US"/>
-          </a:p>
-        </p:txBody>
-      </p:sp>
-    </p:spTree>
-    <p:extLst>
-      <p:ext uri="{BB962C8B-B14F-4D97-AF65-F5344CB8AC3E}">
-        <p14:creationId xmlns:p14="http://schemas.microsoft.com/office/powerpoint/2010/main" val="651504962"/>
-      </p:ext>
-    </p:extLst>
-  </p:cSld>
-  <p:clrMapOvr>
-    <a:masterClrMapping/>
-  </p:clrMapOvr>
-</p:sld>
-</file>
-
-<file path=ppt/slides/slide28.xml><?xml version="1.0" encoding="utf-8"?>
-<p:sld xmlns:a="http://schemas.openxmlformats.org/drawingml/2006/main" xmlns:r="http://schemas.openxmlformats.org/officeDocument/2006/relationships" xmlns:p="http://schemas.openxmlformats.org/presentationml/2006/main">
-  <p:cSld>
-    <p:spTree>
-      <p:nvGrpSpPr>
-        <p:cNvPr id="1" name=""/>
-        <p:cNvGrpSpPr/>
-        <p:nvPr/>
-      </p:nvGrpSpPr>
-      <p:grpSpPr>
-        <a:xfrm>
-          <a:off x="0" y="0"/>
-          <a:ext cx="0" cy="0"/>
-          <a:chOff x="0" y="0"/>
-          <a:chExt cx="0" cy="0"/>
-        </a:xfrm>
-      </p:grpSpPr>
-      <p:sp>
-        <p:nvSpPr>
-          <p:cNvPr id="2" name="제목 1"/>
-          <p:cNvSpPr>
-            <a:spLocks noGrp="1"/>
-          </p:cNvSpPr>
-          <p:nvPr>
-            <p:ph type="title"/>
-          </p:nvPr>
-        </p:nvSpPr>
-        <p:spPr/>
-        <p:txBody>
-          <a:bodyPr/>
-          <a:lstStyle/>
-          <a:p>
-            <a:r>
-              <a:rPr lang="ko-KR" altLang="en-US" smtClean="0"/>
-              <a:t>완료조건</a:t>
-            </a:r>
-            <a:endParaRPr lang="ko-KR" altLang="en-US"/>
-          </a:p>
-        </p:txBody>
-      </p:sp>
-      <p:sp>
-        <p:nvSpPr>
-          <p:cNvPr id="3" name="내용 개체 틀 2"/>
-          <p:cNvSpPr>
-            <a:spLocks noGrp="1"/>
-          </p:cNvSpPr>
-          <p:nvPr>
-            <p:ph idx="1"/>
-          </p:nvPr>
-        </p:nvSpPr>
-        <p:spPr/>
-        <p:txBody>
-          <a:bodyPr/>
-          <a:lstStyle/>
-          <a:p>
-            <a:r>
-              <a:rPr lang="ko-KR" altLang="en-US" smtClean="0"/>
-              <a:t>던전</a:t>
-            </a:r>
-            <a:r>
-              <a:rPr lang="en-US" altLang="ko-KR" smtClean="0"/>
-              <a:t>/</a:t>
-            </a:r>
-            <a:r>
-              <a:rPr lang="ko-KR" altLang="en-US" smtClean="0"/>
-              <a:t>투기장</a:t>
-            </a:r>
-            <a:r>
-              <a:rPr lang="en-US" altLang="ko-KR" smtClean="0"/>
-              <a:t>/</a:t>
-            </a:r>
-            <a:r>
-              <a:rPr lang="ko-KR" altLang="en-US" smtClean="0"/>
-              <a:t>레이드 </a:t>
-            </a:r>
-            <a:r>
-              <a:rPr lang="en-US" altLang="ko-KR" smtClean="0"/>
-              <a:t>=&gt; </a:t>
-            </a:r>
-            <a:r>
-              <a:rPr lang="ko-KR" altLang="en-US" smtClean="0"/>
-              <a:t>성공</a:t>
-            </a:r>
-            <a:r>
-              <a:rPr lang="en-US" altLang="ko-KR" smtClean="0"/>
-              <a:t>/</a:t>
-            </a:r>
-            <a:r>
-              <a:rPr lang="ko-KR" altLang="en-US" smtClean="0"/>
-              <a:t>실패</a:t>
-            </a:r>
-            <a:r>
-              <a:rPr lang="en-US" altLang="ko-KR" smtClean="0"/>
-              <a:t>/</a:t>
-            </a:r>
-            <a:r>
-              <a:rPr lang="ko-KR" altLang="en-US" smtClean="0"/>
-              <a:t>무승부 여부 체크</a:t>
-            </a:r>
-            <a:endParaRPr lang="en-US" altLang="ko-KR" smtClean="0"/>
-          </a:p>
-          <a:p>
-            <a:r>
-              <a:rPr lang="ko-KR" altLang="en-US" smtClean="0"/>
-              <a:t>몬스터 킬 </a:t>
-            </a:r>
-            <a:r>
-              <a:rPr lang="en-US" altLang="ko-KR" smtClean="0"/>
-              <a:t>=&gt; </a:t>
-            </a:r>
-            <a:r>
-              <a:rPr lang="ko-KR" altLang="en-US" smtClean="0"/>
-              <a:t>파티 </a:t>
-            </a:r>
-            <a:r>
-              <a:rPr lang="en-US" altLang="ko-KR" smtClean="0"/>
-              <a:t>full / </a:t>
-            </a:r>
-            <a:r>
-              <a:rPr lang="ko-KR" altLang="en-US" smtClean="0"/>
-              <a:t>인원 수 체크</a:t>
-            </a:r>
-            <a:endParaRPr lang="en-US" altLang="ko-KR" smtClean="0"/>
-          </a:p>
-          <a:p>
-            <a:r>
-              <a:rPr lang="ko-KR" altLang="en-US" smtClean="0"/>
-              <a:t>아이템 </a:t>
-            </a:r>
-            <a:r>
-              <a:rPr lang="en-US" altLang="ko-KR" smtClean="0"/>
-              <a:t>=&gt; </a:t>
-            </a:r>
-            <a:r>
-              <a:rPr lang="ko-KR" altLang="en-US" smtClean="0"/>
-              <a:t>습득 </a:t>
-            </a:r>
-            <a:r>
-              <a:rPr lang="en-US" altLang="ko-KR" smtClean="0"/>
-              <a:t>-&gt; </a:t>
-            </a:r>
-            <a:r>
-              <a:rPr lang="ko-KR" altLang="en-US" smtClean="0"/>
-              <a:t>착용</a:t>
-            </a:r>
-            <a:r>
-              <a:rPr lang="en-US" altLang="ko-KR" smtClean="0"/>
-              <a:t>/</a:t>
-            </a:r>
-            <a:r>
-              <a:rPr lang="ko-KR" altLang="en-US" smtClean="0"/>
-              <a:t>강화</a:t>
-            </a:r>
-            <a:endParaRPr lang="en-US" altLang="ko-KR" smtClean="0"/>
-          </a:p>
-          <a:p>
-            <a:r>
-              <a:rPr lang="ko-KR" altLang="en-US" smtClean="0"/>
-              <a:t>위치 선정 </a:t>
-            </a:r>
-            <a:r>
-              <a:rPr lang="en-US" altLang="ko-KR" smtClean="0"/>
-              <a:t>(</a:t>
-            </a:r>
-            <a:r>
-              <a:rPr lang="ko-KR" altLang="en-US" smtClean="0"/>
-              <a:t>플레이어</a:t>
-            </a:r>
-            <a:r>
-              <a:rPr lang="en-US" altLang="ko-KR" smtClean="0"/>
-              <a:t>,NPC,</a:t>
-            </a:r>
-            <a:r>
-              <a:rPr lang="ko-KR" altLang="en-US" smtClean="0"/>
-              <a:t>몬스터</a:t>
-            </a:r>
-            <a:r>
-              <a:rPr lang="en-US" altLang="ko-KR" smtClean="0"/>
-              <a:t>,Event Object)</a:t>
-            </a:r>
-          </a:p>
-          <a:p>
-            <a:r>
-              <a:rPr lang="ko-KR" altLang="en-US" smtClean="0"/>
-              <a:t>스킬 사용 상태 </a:t>
-            </a:r>
-            <a:r>
-              <a:rPr lang="en-US" altLang="ko-KR" smtClean="0"/>
-              <a:t>(</a:t>
-            </a:r>
-            <a:r>
-              <a:rPr lang="ko-KR" altLang="en-US" smtClean="0"/>
-              <a:t>플레이어</a:t>
-            </a:r>
-            <a:r>
-              <a:rPr lang="en-US" altLang="ko-KR" smtClean="0"/>
-              <a:t>, NPC, </a:t>
-            </a:r>
-            <a:r>
-              <a:rPr lang="ko-KR" altLang="en-US" smtClean="0"/>
-              <a:t>몬스터</a:t>
-            </a:r>
-            <a:r>
-              <a:rPr lang="en-US" altLang="ko-KR" smtClean="0"/>
-              <a:t>, Event Object)</a:t>
-            </a:r>
-          </a:p>
-          <a:p>
-            <a:r>
-              <a:rPr lang="ko-KR" altLang="en-US" smtClean="0"/>
-              <a:t>기능 사용 </a:t>
-            </a:r>
-            <a:r>
-              <a:rPr lang="en-US" altLang="ko-KR" smtClean="0"/>
-              <a:t>(</a:t>
-            </a:r>
-            <a:r>
-              <a:rPr lang="ko-KR" altLang="en-US" smtClean="0"/>
-              <a:t>트리거 조작 상태</a:t>
-            </a:r>
-            <a:r>
-              <a:rPr lang="en-US" altLang="ko-KR" smtClean="0"/>
-              <a:t>)</a:t>
-            </a:r>
-            <a:endParaRPr lang="ko-KR" altLang="en-US"/>
-          </a:p>
-        </p:txBody>
-      </p:sp>
-    </p:spTree>
-    <p:extLst>
-      <p:ext uri="{BB962C8B-B14F-4D97-AF65-F5344CB8AC3E}">
-        <p14:creationId xmlns:p14="http://schemas.microsoft.com/office/powerpoint/2010/main" val="4082190073"/>
-      </p:ext>
-    </p:extLst>
-  </p:cSld>
-  <p:clrMapOvr>
-    <a:masterClrMapping/>
-  </p:clrMapOvr>
-</p:sld>
-</file>
-
-<file path=ppt/slides/slide29.xml><?xml version="1.0" encoding="utf-8"?>
-<p:sld xmlns:a="http://schemas.openxmlformats.org/drawingml/2006/main" xmlns:r="http://schemas.openxmlformats.org/officeDocument/2006/relationships" xmlns:p="http://schemas.openxmlformats.org/presentationml/2006/main">
-  <p:cSld>
-    <p:spTree>
-      <p:nvGrpSpPr>
-        <p:cNvPr id="1" name=""/>
-        <p:cNvGrpSpPr/>
-        <p:nvPr/>
-      </p:nvGrpSpPr>
-      <p:grpSpPr>
-        <a:xfrm>
-          <a:off x="0" y="0"/>
-          <a:ext cx="0" cy="0"/>
-          <a:chOff x="0" y="0"/>
-          <a:chExt cx="0" cy="0"/>
-        </a:xfrm>
-      </p:grpSpPr>
-      <p:sp>
-        <p:nvSpPr>
-          <p:cNvPr id="2" name="제목 1"/>
-          <p:cNvSpPr>
-            <a:spLocks noGrp="1"/>
-          </p:cNvSpPr>
-          <p:nvPr>
-            <p:ph type="title"/>
-          </p:nvPr>
-        </p:nvSpPr>
-        <p:spPr/>
-        <p:txBody>
-          <a:bodyPr/>
-          <a:lstStyle/>
-          <a:p>
-            <a:r>
-              <a:rPr lang="ko-KR" altLang="en-US" smtClean="0"/>
-              <a:t>완료 보상 조건</a:t>
-            </a:r>
-            <a:endParaRPr lang="ko-KR" altLang="en-US"/>
-          </a:p>
-        </p:txBody>
-      </p:sp>
-      <p:sp>
-        <p:nvSpPr>
-          <p:cNvPr id="3" name="내용 개체 틀 2"/>
-          <p:cNvSpPr>
-            <a:spLocks noGrp="1"/>
-          </p:cNvSpPr>
-          <p:nvPr>
-            <p:ph idx="1"/>
-          </p:nvPr>
-        </p:nvSpPr>
-        <p:spPr/>
-        <p:txBody>
-          <a:bodyPr/>
-          <a:lstStyle/>
-          <a:p>
-            <a:r>
-              <a:rPr lang="ko-KR" altLang="en-US" smtClean="0"/>
-              <a:t>완료 조건 달성 후 해당 퀘스트를 </a:t>
-            </a:r>
-            <a:r>
-              <a:rPr lang="en-US" altLang="ko-KR" smtClean="0"/>
-              <a:t>On</a:t>
-            </a:r>
-            <a:r>
-              <a:rPr lang="ko-KR" altLang="en-US" smtClean="0"/>
-              <a:t>으로 기록</a:t>
-            </a:r>
-            <a:endParaRPr lang="en-US" altLang="ko-KR" smtClean="0"/>
-          </a:p>
-          <a:p>
-            <a:r>
-              <a:rPr lang="en-US" altLang="ko-KR" smtClean="0"/>
-              <a:t>On</a:t>
-            </a:r>
-            <a:r>
-              <a:rPr lang="ko-KR" altLang="en-US" smtClean="0"/>
-              <a:t>으로 기록된 퀘스트에 대해서 보상 지급</a:t>
-            </a:r>
-            <a:endParaRPr lang="ko-KR" altLang="en-US"/>
-          </a:p>
-        </p:txBody>
-      </p:sp>
-    </p:spTree>
-    <p:extLst>
-      <p:ext uri="{BB962C8B-B14F-4D97-AF65-F5344CB8AC3E}">
-        <p14:creationId xmlns:p14="http://schemas.microsoft.com/office/powerpoint/2010/main" val="2613412630"/>
       </p:ext>
     </p:extLst>
   </p:cSld>
@@ -6116,10 +3711,9 @@
           <a:lstStyle/>
           <a:p>
             <a:r>
-              <a:rPr lang="ko-KR" altLang="en-US" smtClean="0"/>
+              <a:rPr lang="ko-KR" altLang="en-US"/>
               <a:t>추가조건</a:t>
             </a:r>
-            <a:endParaRPr lang="ko-KR" altLang="en-US"/>
           </a:p>
         </p:txBody>
       </p:sp>
@@ -6139,62 +3733,62 @@
           <a:lstStyle/>
           <a:p>
             <a:r>
-              <a:rPr lang="en-US" altLang="ko-KR" smtClean="0"/>
+              <a:rPr lang="en-US" altLang="ko-KR"/>
               <a:t>In game </a:t>
             </a:r>
             <a:r>
-              <a:rPr lang="ko-KR" altLang="en-US" smtClean="0"/>
+              <a:rPr lang="ko-KR" altLang="en-US"/>
               <a:t>상에서</a:t>
             </a:r>
-            <a:endParaRPr lang="en-US" altLang="ko-KR" smtClean="0"/>
+            <a:endParaRPr lang="en-US" altLang="ko-KR"/>
           </a:p>
           <a:p>
             <a:pPr lvl="1"/>
             <a:r>
-              <a:rPr lang="ko-KR" altLang="en-US" smtClean="0"/>
+              <a:rPr lang="ko-KR" altLang="en-US"/>
               <a:t>현실 시간을 체크할 필요가 있나</a:t>
             </a:r>
             <a:r>
-              <a:rPr lang="en-US" altLang="ko-KR" smtClean="0"/>
+              <a:rPr lang="en-US" altLang="ko-KR"/>
               <a:t>?</a:t>
             </a:r>
           </a:p>
           <a:p>
             <a:pPr lvl="2"/>
             <a:r>
-              <a:rPr lang="ko-KR" altLang="en-US" smtClean="0"/>
+              <a:rPr lang="ko-KR" altLang="en-US"/>
               <a:t>예</a:t>
             </a:r>
             <a:r>
-              <a:rPr lang="en-US" altLang="ko-KR" smtClean="0"/>
+              <a:rPr lang="en-US" altLang="ko-KR"/>
               <a:t>) </a:t>
             </a:r>
             <a:r>
-              <a:rPr lang="ko-KR" altLang="en-US" smtClean="0"/>
+              <a:rPr lang="ko-KR" altLang="en-US"/>
               <a:t>크리스마스 이벤트 </a:t>
             </a:r>
             <a:r>
-              <a:rPr lang="en-US" altLang="ko-KR" smtClean="0"/>
+              <a:rPr lang="en-US" altLang="ko-KR"/>
               <a:t>– 12</a:t>
             </a:r>
             <a:r>
-              <a:rPr lang="ko-KR" altLang="en-US" smtClean="0"/>
+              <a:rPr lang="ko-KR" altLang="en-US"/>
               <a:t>월 </a:t>
             </a:r>
             <a:r>
-              <a:rPr lang="en-US" altLang="ko-KR" smtClean="0"/>
+              <a:rPr lang="en-US" altLang="ko-KR"/>
               <a:t>10~15</a:t>
             </a:r>
             <a:r>
-              <a:rPr lang="ko-KR" altLang="en-US" smtClean="0"/>
+              <a:rPr lang="ko-KR" altLang="en-US"/>
               <a:t>일 사이에 시작</a:t>
             </a:r>
-            <a:endParaRPr lang="en-US" altLang="ko-KR" smtClean="0"/>
+            <a:endParaRPr lang="en-US" altLang="ko-KR"/>
           </a:p>
           <a:p>
             <a:pPr lvl="2"/>
             <a:r>
-              <a:rPr lang="ko-KR" altLang="en-US" smtClean="0"/>
+              <a:rPr lang="ko-KR" altLang="en-US"/>
               <a:t>날짜가 되면 이벤트가 자동으로 시작하게 만드는 것</a:t>
             </a:r>
             <a:endParaRPr lang="en-US" altLang="ko-KR"/>
@@ -6202,76 +3796,68 @@
           <a:p>
             <a:pPr lvl="1"/>
             <a:r>
-              <a:rPr lang="ko-KR" altLang="en-US" smtClean="0"/>
+              <a:rPr lang="ko-KR" altLang="en-US"/>
               <a:t>파트너사와의 협업</a:t>
             </a:r>
-            <a:endParaRPr lang="en-US" altLang="ko-KR" smtClean="0"/>
+            <a:endParaRPr lang="en-US" altLang="ko-KR"/>
           </a:p>
           <a:p>
             <a:pPr lvl="2"/>
             <a:r>
-              <a:rPr lang="ko-KR" altLang="en-US" smtClean="0"/>
+              <a:rPr lang="ko-KR" altLang="en-US"/>
               <a:t>애니메이션과 콜라보</a:t>
             </a:r>
-            <a:r>
-              <a:rPr lang="en-US" altLang="ko-KR" smtClean="0"/>
-              <a:t/>
-            </a:r>
             <a:br>
-              <a:rPr lang="en-US" altLang="ko-KR" smtClean="0"/>
+              <a:rPr lang="en-US" altLang="ko-KR"/>
             </a:br>
             <a:r>
-              <a:rPr lang="en-US" altLang="ko-KR" smtClean="0"/>
+              <a:rPr lang="en-US" altLang="ko-KR"/>
               <a:t>– </a:t>
             </a:r>
             <a:r>
-              <a:rPr lang="ko-KR" altLang="en-US" smtClean="0"/>
+              <a:rPr lang="ko-KR" altLang="en-US"/>
               <a:t>조건 </a:t>
             </a:r>
             <a:r>
-              <a:rPr lang="en-US" altLang="ko-KR" smtClean="0"/>
+              <a:rPr lang="en-US" altLang="ko-KR"/>
               <a:t>: </a:t>
             </a:r>
             <a:r>
-              <a:rPr lang="ko-KR" altLang="en-US" smtClean="0"/>
+              <a:rPr lang="ko-KR" altLang="en-US"/>
               <a:t>캐릭터는 빌려주지만</a:t>
             </a:r>
             <a:r>
-              <a:rPr lang="en-US" altLang="ko-KR" smtClean="0"/>
+              <a:rPr lang="en-US" altLang="ko-KR"/>
               <a:t>, </a:t>
             </a:r>
             <a:r>
-              <a:rPr lang="ko-KR" altLang="en-US" smtClean="0"/>
+              <a:rPr lang="ko-KR" altLang="en-US"/>
               <a:t>이야기는 안 돼</a:t>
             </a:r>
             <a:r>
-              <a:rPr lang="en-US" altLang="ko-KR" smtClean="0"/>
+              <a:rPr lang="en-US" altLang="ko-KR"/>
               <a:t>.</a:t>
             </a:r>
             <a:br>
-              <a:rPr lang="en-US" altLang="ko-KR" smtClean="0"/>
+              <a:rPr lang="en-US" altLang="ko-KR"/>
             </a:br>
             <a:r>
-              <a:rPr lang="en-US" altLang="ko-KR" smtClean="0"/>
+              <a:rPr lang="en-US" altLang="ko-KR"/>
               <a:t>	   2</a:t>
             </a:r>
             <a:r>
-              <a:rPr lang="ko-KR" altLang="en-US" smtClean="0"/>
+              <a:rPr lang="ko-KR" altLang="en-US"/>
               <a:t>차 창작을 막기 위해서</a:t>
             </a:r>
             <a:r>
-              <a:rPr lang="en-US" altLang="ko-KR" smtClean="0"/>
+              <a:rPr lang="en-US" altLang="ko-KR"/>
               <a:t>, </a:t>
             </a:r>
             <a:r>
-              <a:rPr lang="ko-KR" altLang="en-US" smtClean="0"/>
-              <a:t>원래 이야기의 아이덴티티를 지키기 </a:t>
-            </a:r>
-            <a:r>
-              <a:rPr lang="ko-KR" altLang="en-US" smtClean="0"/>
-              <a:t>위해서</a:t>
-            </a:r>
-            <a:endParaRPr lang="en-US" altLang="ko-KR" smtClean="0"/>
+              <a:rPr lang="ko-KR" altLang="en-US"/>
+              <a:t>원래 이야기의 아이덴티티를 지키기 위해서</a:t>
+            </a:r>
+            <a:endParaRPr lang="en-US" altLang="ko-KR"/>
           </a:p>
         </p:txBody>
       </p:sp>
@@ -6279,783 +3865,6 @@
     <p:extLst>
       <p:ext uri="{BB962C8B-B14F-4D97-AF65-F5344CB8AC3E}">
         <p14:creationId xmlns:p14="http://schemas.microsoft.com/office/powerpoint/2010/main" val="2480908244"/>
-      </p:ext>
-    </p:extLst>
-  </p:cSld>
-  <p:clrMapOvr>
-    <a:masterClrMapping/>
-  </p:clrMapOvr>
-</p:sld>
-</file>
-
-<file path=ppt/slides/slide30.xml><?xml version="1.0" encoding="utf-8"?>
-<p:sld xmlns:a="http://schemas.openxmlformats.org/drawingml/2006/main" xmlns:r="http://schemas.openxmlformats.org/officeDocument/2006/relationships" xmlns:p="http://schemas.openxmlformats.org/presentationml/2006/main">
-  <p:cSld>
-    <p:spTree>
-      <p:nvGrpSpPr>
-        <p:cNvPr id="1" name=""/>
-        <p:cNvGrpSpPr/>
-        <p:nvPr/>
-      </p:nvGrpSpPr>
-      <p:grpSpPr>
-        <a:xfrm>
-          <a:off x="0" y="0"/>
-          <a:ext cx="0" cy="0"/>
-          <a:chOff x="0" y="0"/>
-          <a:chExt cx="0" cy="0"/>
-        </a:xfrm>
-      </p:grpSpPr>
-      <p:sp>
-        <p:nvSpPr>
-          <p:cNvPr id="2" name="제목 1"/>
-          <p:cNvSpPr>
-            <a:spLocks noGrp="1"/>
-          </p:cNvSpPr>
-          <p:nvPr>
-            <p:ph type="title"/>
-          </p:nvPr>
-        </p:nvSpPr>
-        <p:spPr/>
-        <p:txBody>
-          <a:bodyPr/>
-          <a:lstStyle/>
-          <a:p>
-            <a:r>
-              <a:rPr lang="ko-KR" altLang="en-US" smtClean="0"/>
-              <a:t>추가 조건</a:t>
-            </a:r>
-            <a:endParaRPr lang="ko-KR" altLang="en-US"/>
-          </a:p>
-        </p:txBody>
-      </p:sp>
-      <p:sp>
-        <p:nvSpPr>
-          <p:cNvPr id="3" name="내용 개체 틀 2"/>
-          <p:cNvSpPr>
-            <a:spLocks noGrp="1"/>
-          </p:cNvSpPr>
-          <p:nvPr>
-            <p:ph idx="1"/>
-          </p:nvPr>
-        </p:nvSpPr>
-        <p:spPr/>
-        <p:txBody>
-          <a:bodyPr/>
-          <a:lstStyle/>
-          <a:p>
-            <a:r>
-              <a:rPr lang="ko-KR" altLang="en-US" smtClean="0"/>
-              <a:t>현실 시간을 </a:t>
-            </a:r>
-            <a:r>
-              <a:rPr lang="en-US" altLang="ko-KR" smtClean="0"/>
-              <a:t>in game</a:t>
-            </a:r>
-            <a:r>
-              <a:rPr lang="ko-KR" altLang="en-US" smtClean="0"/>
-              <a:t>에 적용</a:t>
-            </a:r>
-            <a:endParaRPr lang="en-US" altLang="ko-KR" smtClean="0"/>
-          </a:p>
-          <a:p>
-            <a:pPr lvl="1"/>
-            <a:r>
-              <a:rPr lang="ko-KR" altLang="en-US" smtClean="0"/>
-              <a:t>크리스마스 이벤트</a:t>
-            </a:r>
-            <a:endParaRPr lang="en-US" altLang="ko-KR"/>
-          </a:p>
-          <a:p>
-            <a:endParaRPr lang="en-US" altLang="ko-KR" smtClean="0"/>
-          </a:p>
-          <a:p>
-            <a:r>
-              <a:rPr lang="ko-KR" altLang="en-US" smtClean="0"/>
-              <a:t>파트너사와 협업</a:t>
-            </a:r>
-            <a:endParaRPr lang="en-US" altLang="ko-KR" smtClean="0"/>
-          </a:p>
-          <a:p>
-            <a:pPr lvl="1"/>
-            <a:r>
-              <a:rPr lang="ko-KR" altLang="en-US" smtClean="0"/>
-              <a:t>애니메이션 </a:t>
-            </a:r>
-            <a:r>
-              <a:rPr lang="en-US" altLang="ko-KR" smtClean="0"/>
-              <a:t>– </a:t>
-            </a:r>
-            <a:r>
-              <a:rPr lang="ko-KR" altLang="en-US" smtClean="0"/>
-              <a:t>캐릭터는 빌림</a:t>
-            </a:r>
-            <a:r>
-              <a:rPr lang="en-US" altLang="ko-KR" smtClean="0"/>
-              <a:t>, </a:t>
-            </a:r>
-            <a:r>
-              <a:rPr lang="ko-KR" altLang="en-US" smtClean="0"/>
-              <a:t>이야기는 </a:t>
-            </a:r>
-            <a:r>
-              <a:rPr lang="en-US" altLang="ko-KR" smtClean="0"/>
-              <a:t>x</a:t>
-            </a:r>
-          </a:p>
-          <a:p>
-            <a:pPr lvl="1"/>
-            <a:r>
-              <a:rPr lang="ko-KR" altLang="en-US" smtClean="0"/>
-              <a:t>원래 이야기의 아이덴티티를 지키기 위해</a:t>
-            </a:r>
-            <a:r>
-              <a:rPr lang="en-US" altLang="ko-KR" smtClean="0"/>
-              <a:t>.</a:t>
-            </a:r>
-            <a:endParaRPr lang="ko-KR" altLang="en-US"/>
-          </a:p>
-        </p:txBody>
-      </p:sp>
-    </p:spTree>
-    <p:extLst>
-      <p:ext uri="{BB962C8B-B14F-4D97-AF65-F5344CB8AC3E}">
-        <p14:creationId xmlns:p14="http://schemas.microsoft.com/office/powerpoint/2010/main" val="1986544078"/>
-      </p:ext>
-    </p:extLst>
-  </p:cSld>
-  <p:clrMapOvr>
-    <a:masterClrMapping/>
-  </p:clrMapOvr>
-</p:sld>
-</file>
-
-<file path=ppt/slides/slide31.xml><?xml version="1.0" encoding="utf-8"?>
-<p:sld xmlns:a="http://schemas.openxmlformats.org/drawingml/2006/main" xmlns:r="http://schemas.openxmlformats.org/officeDocument/2006/relationships" xmlns:p="http://schemas.openxmlformats.org/presentationml/2006/main">
-  <p:cSld>
-    <p:spTree>
-      <p:nvGrpSpPr>
-        <p:cNvPr id="1" name=""/>
-        <p:cNvGrpSpPr/>
-        <p:nvPr/>
-      </p:nvGrpSpPr>
-      <p:grpSpPr>
-        <a:xfrm>
-          <a:off x="0" y="0"/>
-          <a:ext cx="0" cy="0"/>
-          <a:chOff x="0" y="0"/>
-          <a:chExt cx="0" cy="0"/>
-        </a:xfrm>
-      </p:grpSpPr>
-      <p:sp>
-        <p:nvSpPr>
-          <p:cNvPr id="2" name="제목 1"/>
-          <p:cNvSpPr>
-            <a:spLocks noGrp="1"/>
-          </p:cNvSpPr>
-          <p:nvPr>
-            <p:ph type="title"/>
-          </p:nvPr>
-        </p:nvSpPr>
-        <p:spPr/>
-        <p:txBody>
-          <a:bodyPr/>
-          <a:lstStyle/>
-          <a:p>
-            <a:r>
-              <a:rPr lang="ko-KR" altLang="en-US" smtClean="0"/>
-              <a:t>기타 조건</a:t>
-            </a:r>
-            <a:endParaRPr lang="ko-KR" altLang="en-US"/>
-          </a:p>
-        </p:txBody>
-      </p:sp>
-      <p:sp>
-        <p:nvSpPr>
-          <p:cNvPr id="3" name="내용 개체 틀 2"/>
-          <p:cNvSpPr>
-            <a:spLocks noGrp="1"/>
-          </p:cNvSpPr>
-          <p:nvPr>
-            <p:ph idx="1"/>
-          </p:nvPr>
-        </p:nvSpPr>
-        <p:spPr/>
-        <p:txBody>
-          <a:bodyPr/>
-          <a:lstStyle/>
-          <a:p>
-            <a:r>
-              <a:rPr lang="ko-KR" altLang="en-US" smtClean="0"/>
-              <a:t>현실의 행사</a:t>
-            </a:r>
-            <a:r>
-              <a:rPr lang="en-US" altLang="ko-KR" smtClean="0"/>
-              <a:t>/</a:t>
-            </a:r>
-            <a:r>
-              <a:rPr lang="ko-KR" altLang="en-US" smtClean="0"/>
-              <a:t>축제에 유저가 직접 참여해서 현장에서 받은 쿠폰</a:t>
-            </a:r>
-            <a:endParaRPr lang="en-US" altLang="ko-KR" smtClean="0"/>
-          </a:p>
-          <a:p>
-            <a:r>
-              <a:rPr lang="ko-KR" altLang="en-US" smtClean="0"/>
-              <a:t>편의점에 유저가 직접 가서 산 쿠폰</a:t>
-            </a:r>
-            <a:endParaRPr lang="en-US" altLang="ko-KR" smtClean="0"/>
-          </a:p>
-          <a:p>
-            <a:endParaRPr lang="en-US" altLang="ko-KR"/>
-          </a:p>
-          <a:p>
-            <a:r>
-              <a:rPr lang="ko-KR" altLang="en-US" smtClean="0"/>
-              <a:t>이 쿠폰을 </a:t>
-            </a:r>
-            <a:r>
-              <a:rPr lang="en-US" altLang="ko-KR" smtClean="0"/>
-              <a:t>in game</a:t>
-            </a:r>
-            <a:r>
-              <a:rPr lang="ko-KR" altLang="en-US" smtClean="0"/>
-              <a:t>에서 아이템을 사는 등 자원으로 사용</a:t>
-            </a:r>
-            <a:endParaRPr lang="en-US" altLang="ko-KR" smtClean="0"/>
-          </a:p>
-          <a:p>
-            <a:endParaRPr lang="en-US" altLang="ko-KR"/>
-          </a:p>
-          <a:p>
-            <a:r>
-              <a:rPr lang="ko-KR" altLang="en-US" smtClean="0"/>
-              <a:t>서브 컬쳐에서 많이 사용하는 조건</a:t>
-            </a:r>
-            <a:endParaRPr lang="en-US" altLang="ko-KR" dirty="0" smtClean="0"/>
-          </a:p>
-        </p:txBody>
-      </p:sp>
-    </p:spTree>
-    <p:extLst>
-      <p:ext uri="{BB962C8B-B14F-4D97-AF65-F5344CB8AC3E}">
-        <p14:creationId xmlns:p14="http://schemas.microsoft.com/office/powerpoint/2010/main" val="1277656511"/>
-      </p:ext>
-    </p:extLst>
-  </p:cSld>
-  <p:clrMapOvr>
-    <a:masterClrMapping/>
-  </p:clrMapOvr>
-</p:sld>
-</file>
-
-<file path=ppt/slides/slide32.xml><?xml version="1.0" encoding="utf-8"?>
-<p:sld xmlns:a="http://schemas.openxmlformats.org/drawingml/2006/main" xmlns:r="http://schemas.openxmlformats.org/officeDocument/2006/relationships" xmlns:p="http://schemas.openxmlformats.org/presentationml/2006/main">
-  <p:cSld>
-    <p:spTree>
-      <p:nvGrpSpPr>
-        <p:cNvPr id="1" name=""/>
-        <p:cNvGrpSpPr/>
-        <p:nvPr/>
-      </p:nvGrpSpPr>
-      <p:grpSpPr>
-        <a:xfrm>
-          <a:off x="0" y="0"/>
-          <a:ext cx="0" cy="0"/>
-          <a:chOff x="0" y="0"/>
-          <a:chExt cx="0" cy="0"/>
-        </a:xfrm>
-      </p:grpSpPr>
-      <p:sp>
-        <p:nvSpPr>
-          <p:cNvPr id="2" name="제목 1"/>
-          <p:cNvSpPr>
-            <a:spLocks noGrp="1"/>
-          </p:cNvSpPr>
-          <p:nvPr>
-            <p:ph type="title"/>
-          </p:nvPr>
-        </p:nvSpPr>
-        <p:spPr/>
-        <p:txBody>
-          <a:bodyPr/>
-          <a:lstStyle/>
-          <a:p>
-            <a:r>
-              <a:rPr lang="ko-KR" altLang="en-US" smtClean="0"/>
-              <a:t>분기 조건</a:t>
-            </a:r>
-            <a:endParaRPr lang="ko-KR" altLang="en-US"/>
-          </a:p>
-        </p:txBody>
-      </p:sp>
-      <p:sp>
-        <p:nvSpPr>
-          <p:cNvPr id="3" name="내용 개체 틀 2"/>
-          <p:cNvSpPr>
-            <a:spLocks noGrp="1"/>
-          </p:cNvSpPr>
-          <p:nvPr>
-            <p:ph idx="1"/>
-          </p:nvPr>
-        </p:nvSpPr>
-        <p:spPr/>
-        <p:txBody>
-          <a:bodyPr/>
-          <a:lstStyle/>
-          <a:p>
-            <a:r>
-              <a:rPr lang="ko-KR" altLang="en-US" smtClean="0"/>
-              <a:t>단순히 스토리상의 이야기의 갈라짐이 아니다</a:t>
-            </a:r>
-            <a:r>
-              <a:rPr lang="en-US" altLang="ko-KR" smtClean="0"/>
-              <a:t>.</a:t>
-            </a:r>
-          </a:p>
-          <a:p>
-            <a:endParaRPr lang="en-US" altLang="ko-KR"/>
-          </a:p>
-          <a:p>
-            <a:r>
-              <a:rPr lang="ko-KR" altLang="en-US" smtClean="0"/>
-              <a:t>스테이지별</a:t>
-            </a:r>
-            <a:r>
-              <a:rPr lang="en-US" altLang="ko-KR"/>
-              <a:t> </a:t>
-            </a:r>
-            <a:r>
-              <a:rPr lang="ko-KR" altLang="en-US" smtClean="0"/>
-              <a:t>점수를 산정하고</a:t>
-            </a:r>
-            <a:endParaRPr lang="en-US" altLang="ko-KR" smtClean="0"/>
-          </a:p>
-          <a:p>
-            <a:r>
-              <a:rPr lang="ko-KR" altLang="en-US" smtClean="0"/>
-              <a:t>이를 통해 여러 가지</a:t>
-            </a:r>
-            <a:r>
-              <a:rPr lang="en-US" altLang="ko-KR" smtClean="0"/>
-              <a:t>(</a:t>
-            </a:r>
-            <a:r>
-              <a:rPr lang="ko-KR" altLang="en-US" smtClean="0"/>
-              <a:t>멀티</a:t>
-            </a:r>
-            <a:r>
-              <a:rPr lang="en-US" altLang="ko-KR" smtClean="0"/>
-              <a:t>) </a:t>
-            </a:r>
-            <a:r>
-              <a:rPr lang="ko-KR" altLang="en-US" smtClean="0"/>
-              <a:t>엔딩으로 보여줄 수 있다</a:t>
-            </a:r>
-            <a:r>
-              <a:rPr lang="en-US" altLang="ko-KR" smtClean="0"/>
-              <a:t>.</a:t>
-            </a:r>
-          </a:p>
-          <a:p>
-            <a:endParaRPr lang="en-US" altLang="ko-KR"/>
-          </a:p>
-          <a:p>
-            <a:r>
-              <a:rPr lang="en-US" altLang="ko-KR" smtClean="0"/>
-              <a:t>[</a:t>
-            </a:r>
-            <a:r>
-              <a:rPr lang="ko-KR" altLang="en-US" smtClean="0"/>
-              <a:t>프린세스 메이커 </a:t>
-            </a:r>
-            <a:r>
-              <a:rPr lang="en-US" altLang="ko-KR" smtClean="0"/>
-              <a:t>2]</a:t>
-            </a:r>
-            <a:endParaRPr lang="ko-KR" altLang="en-US"/>
-          </a:p>
-        </p:txBody>
-      </p:sp>
-    </p:spTree>
-    <p:extLst>
-      <p:ext uri="{BB962C8B-B14F-4D97-AF65-F5344CB8AC3E}">
-        <p14:creationId xmlns:p14="http://schemas.microsoft.com/office/powerpoint/2010/main" val="545765313"/>
-      </p:ext>
-    </p:extLst>
-  </p:cSld>
-  <p:clrMapOvr>
-    <a:masterClrMapping/>
-  </p:clrMapOvr>
-</p:sld>
-</file>
-
-<file path=ppt/slides/slide33.xml><?xml version="1.0" encoding="utf-8"?>
-<p:sld xmlns:a="http://schemas.openxmlformats.org/drawingml/2006/main" xmlns:r="http://schemas.openxmlformats.org/officeDocument/2006/relationships" xmlns:p="http://schemas.openxmlformats.org/presentationml/2006/main">
-  <p:cSld>
-    <p:spTree>
-      <p:nvGrpSpPr>
-        <p:cNvPr id="1" name=""/>
-        <p:cNvGrpSpPr/>
-        <p:nvPr/>
-      </p:nvGrpSpPr>
-      <p:grpSpPr>
-        <a:xfrm>
-          <a:off x="0" y="0"/>
-          <a:ext cx="0" cy="0"/>
-          <a:chOff x="0" y="0"/>
-          <a:chExt cx="0" cy="0"/>
-        </a:xfrm>
-      </p:grpSpPr>
-      <p:sp>
-        <p:nvSpPr>
-          <p:cNvPr id="2" name="제목 1"/>
-          <p:cNvSpPr>
-            <a:spLocks noGrp="1"/>
-          </p:cNvSpPr>
-          <p:nvPr>
-            <p:ph type="title"/>
-          </p:nvPr>
-        </p:nvSpPr>
-        <p:spPr/>
-        <p:txBody>
-          <a:bodyPr/>
-          <a:lstStyle/>
-          <a:p>
-            <a:r>
-              <a:rPr lang="ko-KR" altLang="en-US" smtClean="0"/>
-              <a:t>퀘스트</a:t>
-            </a:r>
-            <a:endParaRPr lang="ko-KR" altLang="en-US"/>
-          </a:p>
-        </p:txBody>
-      </p:sp>
-      <p:sp>
-        <p:nvSpPr>
-          <p:cNvPr id="3" name="내용 개체 틀 2"/>
-          <p:cNvSpPr>
-            <a:spLocks noGrp="1"/>
-          </p:cNvSpPr>
-          <p:nvPr>
-            <p:ph idx="1"/>
-          </p:nvPr>
-        </p:nvSpPr>
-        <p:spPr/>
-        <p:txBody>
-          <a:bodyPr/>
-          <a:lstStyle/>
-          <a:p>
-            <a:r>
-              <a:rPr lang="ko-KR" altLang="en-US" smtClean="0"/>
-              <a:t>조건의 복수계 또는 단수계의 집합</a:t>
-            </a:r>
-            <a:endParaRPr lang="ko-KR" altLang="en-US"/>
-          </a:p>
-        </p:txBody>
-      </p:sp>
-    </p:spTree>
-    <p:extLst>
-      <p:ext uri="{BB962C8B-B14F-4D97-AF65-F5344CB8AC3E}">
-        <p14:creationId xmlns:p14="http://schemas.microsoft.com/office/powerpoint/2010/main" val="1815935716"/>
-      </p:ext>
-    </p:extLst>
-  </p:cSld>
-  <p:clrMapOvr>
-    <a:masterClrMapping/>
-  </p:clrMapOvr>
-</p:sld>
-</file>
-
-<file path=ppt/slides/slide34.xml><?xml version="1.0" encoding="utf-8"?>
-<p:sld xmlns:a="http://schemas.openxmlformats.org/drawingml/2006/main" xmlns:r="http://schemas.openxmlformats.org/officeDocument/2006/relationships" xmlns:p="http://schemas.openxmlformats.org/presentationml/2006/main">
-  <p:cSld>
-    <p:spTree>
-      <p:nvGrpSpPr>
-        <p:cNvPr id="1" name=""/>
-        <p:cNvGrpSpPr/>
-        <p:nvPr/>
-      </p:nvGrpSpPr>
-      <p:grpSpPr>
-        <a:xfrm>
-          <a:off x="0" y="0"/>
-          <a:ext cx="0" cy="0"/>
-          <a:chOff x="0" y="0"/>
-          <a:chExt cx="0" cy="0"/>
-        </a:xfrm>
-      </p:grpSpPr>
-      <p:sp>
-        <p:nvSpPr>
-          <p:cNvPr id="2" name="제목 1"/>
-          <p:cNvSpPr>
-            <a:spLocks noGrp="1"/>
-          </p:cNvSpPr>
-          <p:nvPr>
-            <p:ph type="title"/>
-          </p:nvPr>
-        </p:nvSpPr>
-        <p:spPr/>
-        <p:txBody>
-          <a:bodyPr/>
-          <a:lstStyle/>
-          <a:p>
-            <a:r>
-              <a:rPr lang="ko-KR" altLang="en-US" smtClean="0"/>
-              <a:t>퀘스트의 진행 단계별 연출 동반</a:t>
-            </a:r>
-            <a:endParaRPr lang="ko-KR" altLang="en-US"/>
-          </a:p>
-        </p:txBody>
-      </p:sp>
-      <p:sp>
-        <p:nvSpPr>
-          <p:cNvPr id="3" name="내용 개체 틀 2"/>
-          <p:cNvSpPr>
-            <a:spLocks noGrp="1"/>
-          </p:cNvSpPr>
-          <p:nvPr>
-            <p:ph idx="1"/>
-          </p:nvPr>
-        </p:nvSpPr>
-        <p:spPr/>
-        <p:txBody>
-          <a:bodyPr/>
-          <a:lstStyle/>
-          <a:p>
-            <a:r>
-              <a:rPr lang="ko-KR" altLang="en-US" smtClean="0"/>
-              <a:t>퀘스트의 보상으로 수치나 아이템을 지급하는 게 </a:t>
-            </a:r>
-            <a:r>
-              <a:rPr lang="en-US" altLang="ko-KR" smtClean="0"/>
-              <a:t>x</a:t>
-            </a:r>
-          </a:p>
-          <a:p>
-            <a:r>
-              <a:rPr lang="ko-KR" altLang="en-US" smtClean="0"/>
-              <a:t>영상이나 애니메이션 등 연출로 플레이어에게</a:t>
-            </a:r>
-            <a:endParaRPr lang="en-US" altLang="ko-KR" smtClean="0"/>
-          </a:p>
-          <a:p>
-            <a:r>
-              <a:rPr lang="ko-KR" altLang="en-US" smtClean="0"/>
-              <a:t>보상이라고 느끼게 하는 연출을 보여주는 것</a:t>
-            </a:r>
-            <a:endParaRPr lang="en-US" altLang="ko-KR" smtClean="0"/>
-          </a:p>
-          <a:p>
-            <a:endParaRPr lang="en-US" altLang="ko-KR"/>
-          </a:p>
-          <a:p>
-            <a:r>
-              <a:rPr lang="ko-KR" altLang="en-US" smtClean="0"/>
-              <a:t>그냥 영상 </a:t>
-            </a:r>
-            <a:r>
-              <a:rPr lang="en-US" altLang="ko-KR" smtClean="0"/>
-              <a:t>x</a:t>
-            </a:r>
-          </a:p>
-          <a:p>
-            <a:r>
-              <a:rPr lang="ko-KR" altLang="en-US" smtClean="0"/>
-              <a:t>연출이 좋아야</a:t>
-            </a:r>
-            <a:r>
-              <a:rPr lang="en-US" altLang="ko-KR" smtClean="0"/>
-              <a:t>/</a:t>
-            </a:r>
-            <a:r>
-              <a:rPr lang="ko-KR" altLang="en-US" smtClean="0"/>
-              <a:t>뛰어나야 한다</a:t>
-            </a:r>
-            <a:r>
-              <a:rPr lang="en-US" altLang="ko-KR" smtClean="0"/>
-              <a:t>.</a:t>
-            </a:r>
-            <a:endParaRPr lang="ko-KR" altLang="en-US"/>
-          </a:p>
-        </p:txBody>
-      </p:sp>
-    </p:spTree>
-    <p:extLst>
-      <p:ext uri="{BB962C8B-B14F-4D97-AF65-F5344CB8AC3E}">
-        <p14:creationId xmlns:p14="http://schemas.microsoft.com/office/powerpoint/2010/main" val="13818139"/>
-      </p:ext>
-    </p:extLst>
-  </p:cSld>
-  <p:clrMapOvr>
-    <a:masterClrMapping/>
-  </p:clrMapOvr>
-</p:sld>
-</file>
-
-<file path=ppt/slides/slide35.xml><?xml version="1.0" encoding="utf-8"?>
-<p:sld xmlns:a="http://schemas.openxmlformats.org/drawingml/2006/main" xmlns:r="http://schemas.openxmlformats.org/officeDocument/2006/relationships" xmlns:p="http://schemas.openxmlformats.org/presentationml/2006/main">
-  <p:cSld>
-    <p:spTree>
-      <p:nvGrpSpPr>
-        <p:cNvPr id="1" name=""/>
-        <p:cNvGrpSpPr/>
-        <p:nvPr/>
-      </p:nvGrpSpPr>
-      <p:grpSpPr>
-        <a:xfrm>
-          <a:off x="0" y="0"/>
-          <a:ext cx="0" cy="0"/>
-          <a:chOff x="0" y="0"/>
-          <a:chExt cx="0" cy="0"/>
-        </a:xfrm>
-      </p:grpSpPr>
-      <p:sp>
-        <p:nvSpPr>
-          <p:cNvPr id="2" name="제목 1"/>
-          <p:cNvSpPr>
-            <a:spLocks noGrp="1"/>
-          </p:cNvSpPr>
-          <p:nvPr>
-            <p:ph type="title"/>
-          </p:nvPr>
-        </p:nvSpPr>
-        <p:spPr/>
-        <p:txBody>
-          <a:bodyPr/>
-          <a:lstStyle/>
-          <a:p>
-            <a:r>
-              <a:rPr lang="ko-KR" altLang="en-US" smtClean="0"/>
-              <a:t>고객을 오해하게 만들자</a:t>
-            </a:r>
-            <a:endParaRPr lang="ko-KR" altLang="en-US"/>
-          </a:p>
-        </p:txBody>
-      </p:sp>
-      <p:sp>
-        <p:nvSpPr>
-          <p:cNvPr id="3" name="내용 개체 틀 2"/>
-          <p:cNvSpPr>
-            <a:spLocks noGrp="1"/>
-          </p:cNvSpPr>
-          <p:nvPr>
-            <p:ph idx="1"/>
-          </p:nvPr>
-        </p:nvSpPr>
-        <p:spPr/>
-        <p:txBody>
-          <a:bodyPr/>
-          <a:lstStyle/>
-          <a:p>
-            <a:r>
-              <a:rPr lang="ko-KR" altLang="en-US" smtClean="0"/>
-              <a:t>개발 단계에서 구현하지 못한 걸</a:t>
-            </a:r>
-            <a:r>
-              <a:rPr lang="en-US" altLang="ko-KR" smtClean="0"/>
-              <a:t>, </a:t>
-            </a:r>
-            <a:r>
-              <a:rPr lang="ko-KR" altLang="en-US" smtClean="0"/>
-              <a:t>실제 유저들은 구현됐다고 느끼게 만드는 것</a:t>
-            </a:r>
-            <a:endParaRPr lang="en-US" altLang="ko-KR" smtClean="0"/>
-          </a:p>
-          <a:p>
-            <a:endParaRPr lang="en-US" altLang="ko-KR"/>
-          </a:p>
-          <a:p>
-            <a:r>
-              <a:rPr lang="ko-KR" altLang="en-US" smtClean="0"/>
-              <a:t>예</a:t>
-            </a:r>
-            <a:r>
-              <a:rPr lang="en-US" altLang="ko-KR" smtClean="0"/>
-              <a:t>) </a:t>
-            </a:r>
-            <a:r>
-              <a:rPr lang="ko-KR" altLang="en-US" smtClean="0"/>
-              <a:t>플레이어의 소속 국가를 구분하는 기능을 개발 단계에서 구현하지 못했을 때</a:t>
-            </a:r>
-            <a:r>
-              <a:rPr lang="en-US" altLang="ko-KR" smtClean="0"/>
-              <a:t/>
-            </a:r>
-            <a:br>
-              <a:rPr lang="en-US" altLang="ko-KR" smtClean="0"/>
-            </a:br>
-            <a:r>
-              <a:rPr lang="en-US" altLang="ko-KR" smtClean="0"/>
-              <a:t>- </a:t>
-            </a:r>
-            <a:r>
-              <a:rPr lang="ko-KR" altLang="en-US" smtClean="0"/>
-              <a:t>일정 퀘스트 이후에 </a:t>
-            </a:r>
-            <a:r>
-              <a:rPr lang="en-US" altLang="ko-KR" smtClean="0"/>
-              <a:t>NPC</a:t>
-            </a:r>
-            <a:r>
-              <a:rPr lang="ko-KR" altLang="en-US" smtClean="0"/>
-              <a:t>의 대사 중 </a:t>
-            </a:r>
-            <a:r>
-              <a:rPr lang="en-US" altLang="ko-KR" smtClean="0"/>
-              <a:t>‘</a:t>
-            </a:r>
-            <a:r>
-              <a:rPr lang="ko-KR" altLang="en-US" smtClean="0"/>
-              <a:t>너 첩자지</a:t>
-            </a:r>
-            <a:r>
-              <a:rPr lang="en-US" altLang="ko-KR" smtClean="0"/>
-              <a:t>? </a:t>
-            </a:r>
-            <a:r>
-              <a:rPr lang="ko-KR" altLang="en-US" smtClean="0"/>
-              <a:t>옷 왜그래</a:t>
-            </a:r>
-            <a:r>
-              <a:rPr lang="en-US" altLang="ko-KR" smtClean="0"/>
-              <a:t>!’ </a:t>
-            </a:r>
-            <a:r>
-              <a:rPr lang="ko-KR" altLang="en-US" smtClean="0"/>
-              <a:t>하는 대사를 랜덤하게 출력하게 만든다</a:t>
-            </a:r>
-            <a:r>
-              <a:rPr lang="en-US" altLang="ko-KR" smtClean="0"/>
-              <a:t>.</a:t>
-            </a:r>
-            <a:br>
-              <a:rPr lang="en-US" altLang="ko-KR" smtClean="0"/>
-            </a:br>
-            <a:r>
-              <a:rPr lang="en-US" altLang="ko-KR" smtClean="0"/>
-              <a:t>- </a:t>
-            </a:r>
-            <a:r>
-              <a:rPr lang="ko-KR" altLang="en-US" smtClean="0"/>
-              <a:t>플레이어의 소속이 관계없는 퀘스트를 만든다</a:t>
-            </a:r>
-            <a:r>
-              <a:rPr lang="en-US" altLang="ko-KR" smtClean="0"/>
-              <a:t>.(</a:t>
-            </a:r>
-            <a:r>
-              <a:rPr lang="ko-KR" altLang="en-US" smtClean="0"/>
-              <a:t>영토 점령</a:t>
-            </a:r>
-            <a:r>
-              <a:rPr lang="en-US" altLang="ko-KR" smtClean="0"/>
-              <a:t>)</a:t>
-            </a:r>
-          </a:p>
-        </p:txBody>
-      </p:sp>
-    </p:spTree>
-    <p:extLst>
-      <p:ext uri="{BB962C8B-B14F-4D97-AF65-F5344CB8AC3E}">
-        <p14:creationId xmlns:p14="http://schemas.microsoft.com/office/powerpoint/2010/main" val="1539058159"/>
       </p:ext>
     </p:extLst>
   </p:cSld>
@@ -7098,10 +3907,9 @@
           <a:lstStyle/>
           <a:p>
             <a:r>
-              <a:rPr lang="ko-KR" altLang="en-US" smtClean="0"/>
+              <a:rPr lang="ko-KR" altLang="en-US"/>
               <a:t>기타 조건</a:t>
             </a:r>
-            <a:endParaRPr lang="ko-KR" altLang="en-US"/>
           </a:p>
         </p:txBody>
       </p:sp>
@@ -7121,57 +3929,57 @@
           <a:lstStyle/>
           <a:p>
             <a:r>
-              <a:rPr lang="ko-KR" altLang="en-US" smtClean="0"/>
+              <a:rPr lang="ko-KR" altLang="en-US"/>
               <a:t>현실</a:t>
             </a:r>
-            <a:endParaRPr lang="en-US" altLang="ko-KR" smtClean="0"/>
-          </a:p>
-          <a:p>
-            <a:r>
-              <a:rPr lang="ko-KR" altLang="en-US" smtClean="0"/>
+            <a:endParaRPr lang="en-US" altLang="ko-KR"/>
+          </a:p>
+          <a:p>
+            <a:r>
+              <a:rPr lang="ko-KR" altLang="en-US"/>
               <a:t>예</a:t>
             </a:r>
             <a:r>
-              <a:rPr lang="en-US" altLang="ko-KR" smtClean="0"/>
+              <a:rPr lang="en-US" altLang="ko-KR"/>
               <a:t>) </a:t>
             </a:r>
             <a:r>
-              <a:rPr lang="ko-KR" altLang="en-US" smtClean="0"/>
+              <a:rPr lang="ko-KR" altLang="en-US"/>
               <a:t>편의점에서 게임 카드를 사서 그 시리얼 코드로 게임의 아이템을 구매하는 것</a:t>
             </a:r>
-            <a:endParaRPr lang="en-US" altLang="ko-KR" smtClean="0"/>
-          </a:p>
-          <a:p>
-            <a:r>
-              <a:rPr lang="ko-KR" altLang="en-US" smtClean="0"/>
+            <a:endParaRPr lang="en-US" altLang="ko-KR"/>
+          </a:p>
+          <a:p>
+            <a:r>
+              <a:rPr lang="ko-KR" altLang="en-US"/>
               <a:t>즉</a:t>
             </a:r>
             <a:r>
-              <a:rPr lang="en-US" altLang="ko-KR" smtClean="0"/>
+              <a:rPr lang="en-US" altLang="ko-KR"/>
               <a:t>, </a:t>
             </a:r>
             <a:r>
-              <a:rPr lang="ko-KR" altLang="en-US" smtClean="0"/>
+              <a:rPr lang="ko-KR" altLang="en-US"/>
               <a:t>현실 세계에서 행사</a:t>
             </a:r>
             <a:r>
-              <a:rPr lang="en-US" altLang="ko-KR" smtClean="0"/>
+              <a:rPr lang="en-US" altLang="ko-KR"/>
               <a:t>/</a:t>
             </a:r>
             <a:r>
-              <a:rPr lang="ko-KR" altLang="en-US" smtClean="0"/>
+              <a:rPr lang="ko-KR" altLang="en-US"/>
               <a:t>축제 장소에 왔기 때문에 </a:t>
             </a:r>
             <a:r>
-              <a:rPr lang="en-US" altLang="ko-KR" smtClean="0"/>
+              <a:rPr lang="en-US" altLang="ko-KR"/>
               <a:t>In game </a:t>
             </a:r>
             <a:r>
-              <a:rPr lang="ko-KR" altLang="en-US" smtClean="0"/>
+              <a:rPr lang="ko-KR" altLang="en-US"/>
               <a:t>상에서 그걸 퀘스트 달성했다고 하고 그에 대한 보상을 주는 것</a:t>
             </a:r>
             <a:r>
-              <a:rPr lang="en-US" altLang="ko-KR" smtClean="0"/>
+              <a:rPr lang="en-US" altLang="ko-KR"/>
               <a:t>.</a:t>
             </a:r>
           </a:p>
@@ -7180,11 +3988,11 @@
           </a:p>
           <a:p>
             <a:r>
-              <a:rPr lang="ko-KR" altLang="en-US" smtClean="0"/>
+              <a:rPr lang="ko-KR" altLang="en-US"/>
               <a:t>서브 컬쳐 세계에서 많이 쓰는 것</a:t>
             </a:r>
             <a:r>
-              <a:rPr lang="en-US" altLang="ko-KR" smtClean="0"/>
+              <a:rPr lang="en-US" altLang="ko-KR"/>
               <a:t>.</a:t>
             </a:r>
             <a:endParaRPr lang="ko-KR" altLang="en-US"/>
@@ -7237,10 +4045,9 @@
           <a:lstStyle/>
           <a:p>
             <a:r>
-              <a:rPr lang="ko-KR" altLang="en-US" smtClean="0"/>
+              <a:rPr lang="ko-KR" altLang="en-US"/>
               <a:t>분기 조건</a:t>
             </a:r>
-            <a:endParaRPr lang="ko-KR" altLang="en-US"/>
           </a:p>
         </p:txBody>
       </p:sp>
@@ -7262,139 +4069,134 @@
           <a:lstStyle/>
           <a:p>
             <a:r>
-              <a:rPr lang="ko-KR" altLang="en-US" smtClean="0"/>
+              <a:rPr lang="ko-KR" altLang="en-US"/>
               <a:t>어떤 분기에 따라서 다른 방향으로 이야기들이 흘러가는 것</a:t>
             </a:r>
-            <a:endParaRPr lang="en-US" altLang="ko-KR" smtClean="0"/>
-          </a:p>
-          <a:p>
             <a:endParaRPr lang="en-US" altLang="ko-KR"/>
           </a:p>
           <a:p>
-            <a:r>
-              <a:rPr lang="ko-KR" altLang="en-US" smtClean="0"/>
+            <a:endParaRPr lang="en-US" altLang="ko-KR"/>
+          </a:p>
+          <a:p>
+            <a:r>
+              <a:rPr lang="ko-KR" altLang="en-US"/>
               <a:t>온라인 게임에서는 분기로 이야기가 달라졌다가</a:t>
             </a:r>
             <a:r>
-              <a:rPr lang="en-US" altLang="ko-KR" smtClean="0"/>
+              <a:rPr lang="en-US" altLang="ko-KR"/>
               <a:t>,</a:t>
             </a:r>
             <a:br>
-              <a:rPr lang="en-US" altLang="ko-KR" smtClean="0"/>
+              <a:rPr lang="en-US" altLang="ko-KR"/>
             </a:br>
             <a:r>
-              <a:rPr lang="ko-KR" altLang="en-US" smtClean="0"/>
+              <a:rPr lang="ko-KR" altLang="en-US"/>
               <a:t>결국에는 하나의 이야기로 귀결된다</a:t>
             </a:r>
             <a:r>
-              <a:rPr lang="en-US" altLang="ko-KR" smtClean="0"/>
+              <a:rPr lang="en-US" altLang="ko-KR"/>
               <a:t>.</a:t>
             </a:r>
           </a:p>
           <a:p>
             <a:r>
-              <a:rPr lang="ko-KR" altLang="en-US" smtClean="0"/>
+              <a:rPr lang="ko-KR" altLang="en-US"/>
               <a:t>상대적 박탈감을 느끼게 하면 안 되기 때문</a:t>
             </a:r>
             <a:r>
-              <a:rPr lang="en-US" altLang="ko-KR" smtClean="0"/>
+              <a:rPr lang="en-US" altLang="ko-KR"/>
               <a:t>.</a:t>
             </a:r>
           </a:p>
           <a:p>
             <a:r>
-              <a:rPr lang="ko-KR" altLang="en-US" smtClean="0"/>
+              <a:rPr lang="ko-KR" altLang="en-US"/>
               <a:t>온라인 게임에서 가장 성공한 분기 조건이 바로</a:t>
             </a:r>
-            <a:r>
-              <a:rPr lang="en-US" altLang="ko-KR" smtClean="0"/>
-              <a:t/>
-            </a:r>
             <a:br>
-              <a:rPr lang="en-US" altLang="ko-KR" smtClean="0"/>
+              <a:rPr lang="en-US" altLang="ko-KR"/>
             </a:br>
             <a:r>
-              <a:rPr lang="en-US" altLang="ko-KR" smtClean="0"/>
+              <a:rPr lang="en-US" altLang="ko-KR"/>
               <a:t>‘</a:t>
             </a:r>
             <a:r>
-              <a:rPr lang="ko-KR" altLang="en-US" smtClean="0"/>
+              <a:rPr lang="ko-KR" altLang="en-US"/>
               <a:t>캐릭터 선택</a:t>
             </a:r>
             <a:r>
-              <a:rPr lang="en-US" altLang="ko-KR" smtClean="0"/>
+              <a:rPr lang="en-US" altLang="ko-KR"/>
               <a:t>＇</a:t>
             </a:r>
             <a:r>
-              <a:rPr lang="ko-KR" altLang="en-US" smtClean="0"/>
+              <a:rPr lang="ko-KR" altLang="en-US"/>
               <a:t>화면이다</a:t>
             </a:r>
             <a:r>
-              <a:rPr lang="en-US" altLang="ko-KR" smtClean="0"/>
+              <a:rPr lang="en-US" altLang="ko-KR"/>
               <a:t>.</a:t>
             </a:r>
           </a:p>
           <a:p>
             <a:r>
-              <a:rPr lang="ko-KR" altLang="en-US" smtClean="0"/>
+              <a:rPr lang="ko-KR" altLang="en-US"/>
               <a:t>예</a:t>
             </a:r>
             <a:r>
-              <a:rPr lang="en-US" altLang="ko-KR" smtClean="0"/>
+              <a:rPr lang="en-US" altLang="ko-KR"/>
               <a:t>) </a:t>
             </a:r>
             <a:r>
-              <a:rPr lang="ko-KR" altLang="en-US" smtClean="0"/>
+              <a:rPr lang="ko-KR" altLang="en-US"/>
               <a:t>사제 캐릭터가 같은 레벨인데도 전사보다 잘 살아남는다</a:t>
             </a:r>
             <a:r>
-              <a:rPr lang="en-US" altLang="ko-KR" smtClean="0"/>
+              <a:rPr lang="en-US" altLang="ko-KR"/>
               <a:t>.</a:t>
             </a:r>
             <a:br>
-              <a:rPr lang="en-US" altLang="ko-KR" smtClean="0"/>
+              <a:rPr lang="en-US" altLang="ko-KR"/>
             </a:br>
             <a:r>
-              <a:rPr lang="en-US" altLang="ko-KR" smtClean="0"/>
+              <a:rPr lang="en-US" altLang="ko-KR"/>
               <a:t>=&gt; ‘</a:t>
             </a:r>
             <a:r>
-              <a:rPr lang="ko-KR" altLang="en-US" smtClean="0"/>
+              <a:rPr lang="ko-KR" altLang="en-US"/>
               <a:t>상대적 박탈감</a:t>
             </a:r>
             <a:r>
-              <a:rPr lang="en-US" altLang="ko-KR" smtClean="0"/>
+              <a:rPr lang="en-US" altLang="ko-KR"/>
               <a:t>＇</a:t>
             </a:r>
             <a:r>
-              <a:rPr lang="ko-KR" altLang="en-US" smtClean="0"/>
+              <a:rPr lang="ko-KR" altLang="en-US"/>
               <a:t>을 느끼기보다는</a:t>
             </a:r>
             <a:r>
-              <a:rPr lang="en-US" altLang="ko-KR" smtClean="0"/>
+              <a:rPr lang="en-US" altLang="ko-KR"/>
               <a:t>, ‘</a:t>
             </a:r>
             <a:r>
-              <a:rPr lang="ko-KR" altLang="en-US" smtClean="0"/>
+              <a:rPr lang="ko-KR" altLang="en-US"/>
               <a:t>너도 그러면 사제 키우면 되지</a:t>
             </a:r>
             <a:r>
-              <a:rPr lang="en-US" altLang="ko-KR" smtClean="0"/>
+              <a:rPr lang="en-US" altLang="ko-KR"/>
               <a:t>.’</a:t>
             </a:r>
             <a:r>
-              <a:rPr lang="ko-KR" altLang="en-US" smtClean="0"/>
+              <a:rPr lang="ko-KR" altLang="en-US"/>
               <a:t>하기 때문</a:t>
             </a:r>
             <a:r>
-              <a:rPr lang="en-US" altLang="ko-KR" smtClean="0"/>
+              <a:rPr lang="en-US" altLang="ko-KR"/>
               <a:t>…</a:t>
             </a:r>
             <a:r>
-              <a:rPr lang="ko-KR" altLang="en-US" smtClean="0"/>
+              <a:rPr lang="ko-KR" altLang="en-US"/>
               <a:t>ㅋㅋㅋ</a:t>
             </a:r>
-            <a:endParaRPr lang="ko-KR" altLang="en-US"/>
           </a:p>
         </p:txBody>
       </p:sp>
@@ -7444,10 +4246,9 @@
           <a:lstStyle/>
           <a:p>
             <a:r>
-              <a:rPr lang="ko-KR" altLang="en-US" smtClean="0"/>
+              <a:rPr lang="ko-KR" altLang="en-US"/>
               <a:t>분기 조건</a:t>
             </a:r>
-            <a:endParaRPr lang="ko-KR" altLang="en-US"/>
           </a:p>
         </p:txBody>
       </p:sp>
@@ -7469,27 +4270,27 @@
           <a:lstStyle/>
           <a:p>
             <a:r>
-              <a:rPr lang="ko-KR" altLang="en-US" smtClean="0"/>
+              <a:rPr lang="ko-KR" altLang="en-US"/>
               <a:t>선생님께서 말하는 </a:t>
             </a:r>
             <a:r>
-              <a:rPr lang="en-US" altLang="ko-KR" smtClean="0"/>
+              <a:rPr lang="en-US" altLang="ko-KR"/>
               <a:t>‘</a:t>
             </a:r>
             <a:r>
-              <a:rPr lang="ko-KR" altLang="en-US" smtClean="0"/>
+              <a:rPr lang="ko-KR" altLang="en-US"/>
               <a:t>분기</a:t>
             </a:r>
             <a:r>
-              <a:rPr lang="en-US" altLang="ko-KR" smtClean="0"/>
+              <a:rPr lang="en-US" altLang="ko-KR"/>
               <a:t>’</a:t>
             </a:r>
             <a:r>
-              <a:rPr lang="ko-KR" altLang="en-US" smtClean="0"/>
+              <a:rPr lang="ko-KR" altLang="en-US"/>
               <a:t>는 이전 페이지같은 걸 말하는 게 </a:t>
             </a:r>
             <a:r>
-              <a:rPr lang="en-US" altLang="ko-KR" smtClean="0"/>
+              <a:rPr lang="en-US" altLang="ko-KR"/>
               <a:t>x.</a:t>
             </a:r>
           </a:p>
@@ -7498,84 +4299,83 @@
           </a:p>
           <a:p>
             <a:r>
-              <a:rPr lang="ko-KR" altLang="en-US" smtClean="0"/>
+              <a:rPr lang="ko-KR" altLang="en-US"/>
               <a:t>예시 게임 </a:t>
             </a:r>
             <a:r>
-              <a:rPr lang="en-US" altLang="ko-KR" smtClean="0"/>
+              <a:rPr lang="en-US" altLang="ko-KR"/>
               <a:t>: [</a:t>
             </a:r>
             <a:r>
-              <a:rPr lang="ko-KR" altLang="en-US" smtClean="0"/>
+              <a:rPr lang="ko-KR" altLang="en-US"/>
               <a:t>프린세스 메이커 </a:t>
             </a:r>
             <a:r>
-              <a:rPr lang="en-US" altLang="ko-KR" smtClean="0"/>
+              <a:rPr lang="en-US" altLang="ko-KR"/>
               <a:t>2]</a:t>
             </a:r>
           </a:p>
           <a:p>
             <a:r>
-              <a:rPr lang="ko-KR" altLang="en-US" smtClean="0"/>
+              <a:rPr lang="ko-KR" altLang="en-US"/>
               <a:t>각각의 스테이지마다 해당되는 요소에 점수를 산정</a:t>
             </a:r>
-            <a:endParaRPr lang="en-US" altLang="ko-KR" smtClean="0"/>
+            <a:endParaRPr lang="en-US" altLang="ko-KR"/>
           </a:p>
           <a:p>
             <a:pPr lvl="1"/>
             <a:r>
-              <a:rPr lang="ko-KR" altLang="en-US" smtClean="0"/>
+              <a:rPr lang="ko-KR" altLang="en-US"/>
               <a:t>어떤 행동에 따른 각각의 요소에 점수들이 다 다르다</a:t>
             </a:r>
             <a:r>
-              <a:rPr lang="en-US" altLang="ko-KR" smtClean="0"/>
+              <a:rPr lang="en-US" altLang="ko-KR"/>
               <a:t>.</a:t>
             </a:r>
           </a:p>
           <a:p>
             <a:pPr lvl="1"/>
             <a:r>
-              <a:rPr lang="ko-KR" altLang="en-US" smtClean="0"/>
+              <a:rPr lang="ko-KR" altLang="en-US"/>
               <a:t>그 점수에 따라 분기를 다르게 한다</a:t>
             </a:r>
             <a:r>
-              <a:rPr lang="en-US" altLang="ko-KR" smtClean="0"/>
+              <a:rPr lang="en-US" altLang="ko-KR"/>
               <a:t>.</a:t>
             </a:r>
           </a:p>
           <a:p>
             <a:pPr lvl="1"/>
             <a:r>
-              <a:rPr lang="ko-KR" altLang="en-US" smtClean="0"/>
+              <a:rPr lang="ko-KR" altLang="en-US"/>
               <a:t>이를 통해 다양한 엔딩들을 보여준다</a:t>
             </a:r>
             <a:r>
-              <a:rPr lang="en-US" altLang="ko-KR" smtClean="0"/>
+              <a:rPr lang="en-US" altLang="ko-KR"/>
               <a:t>.</a:t>
             </a:r>
+          </a:p>
+          <a:p>
             <a:endParaRPr lang="en-US" altLang="ko-KR"/>
           </a:p>
           <a:p>
-            <a:endParaRPr lang="en-US" altLang="ko-KR" smtClean="0"/>
-          </a:p>
-          <a:p>
-            <a:r>
-              <a:rPr lang="ko-KR" altLang="en-US" smtClean="0"/>
+            <a:r>
+              <a:rPr lang="ko-KR" altLang="en-US"/>
               <a:t>진짜 분기는 선택에 따라 영역별로 점수를 메기고</a:t>
             </a:r>
             <a:r>
-              <a:rPr lang="en-US" altLang="ko-KR" smtClean="0"/>
+              <a:rPr lang="en-US" altLang="ko-KR"/>
               <a:t>,</a:t>
             </a:r>
             <a:br>
-              <a:rPr lang="en-US" altLang="ko-KR" smtClean="0"/>
+              <a:rPr lang="en-US" altLang="ko-KR"/>
             </a:br>
             <a:r>
-              <a:rPr lang="ko-KR" altLang="en-US" smtClean="0"/>
+              <a:rPr lang="ko-KR" altLang="en-US"/>
               <a:t>그 점수에 따라 분기를 나눠서 엔딩을 보여주는 것</a:t>
             </a:r>
             <a:r>
-              <a:rPr lang="en-US" altLang="ko-KR" smtClean="0"/>
+              <a:rPr lang="en-US" altLang="ko-KR"/>
               <a:t>.</a:t>
             </a:r>
             <a:endParaRPr lang="ko-KR" altLang="en-US"/>
@@ -7628,10 +4428,9 @@
           <a:lstStyle/>
           <a:p>
             <a:r>
-              <a:rPr lang="ko-KR" altLang="en-US" smtClean="0"/>
+              <a:rPr lang="ko-KR" altLang="en-US"/>
               <a:t>조건의 복수계 또는 단수계의 연계</a:t>
             </a:r>
-            <a:endParaRPr lang="ko-KR" altLang="en-US"/>
           </a:p>
         </p:txBody>
       </p:sp>
@@ -7651,18 +4450,17 @@
           <a:lstStyle/>
           <a:p>
             <a:r>
-              <a:rPr lang="ko-KR" altLang="en-US" smtClean="0"/>
+              <a:rPr lang="ko-KR" altLang="en-US"/>
               <a:t>퀘스트 </a:t>
             </a:r>
             <a:r>
-              <a:rPr lang="en-US" altLang="ko-KR" smtClean="0"/>
+              <a:rPr lang="en-US" altLang="ko-KR"/>
               <a:t>= </a:t>
             </a:r>
             <a:r>
-              <a:rPr lang="ko-KR" altLang="en-US" smtClean="0"/>
+              <a:rPr lang="ko-KR" altLang="en-US"/>
               <a:t>조건의 복수계 또는 단수계의 집합</a:t>
             </a:r>
-            <a:endParaRPr lang="ko-KR" altLang="en-US"/>
           </a:p>
         </p:txBody>
       </p:sp>
@@ -7712,10 +4510,9 @@
           <a:lstStyle/>
           <a:p>
             <a:r>
-              <a:rPr lang="ko-KR" altLang="en-US" smtClean="0"/>
+              <a:rPr lang="ko-KR" altLang="en-US"/>
               <a:t>퀘스트의 진행단계별로 연출 동반</a:t>
             </a:r>
-            <a:endParaRPr lang="ko-KR" altLang="en-US"/>
           </a:p>
         </p:txBody>
       </p:sp>
@@ -7735,49 +4532,49 @@
           <a:lstStyle/>
           <a:p>
             <a:r>
-              <a:rPr lang="ko-KR" altLang="en-US" smtClean="0"/>
+              <a:rPr lang="ko-KR" altLang="en-US"/>
               <a:t>아이템</a:t>
             </a:r>
             <a:r>
-              <a:rPr lang="en-US" altLang="ko-KR" smtClean="0"/>
+              <a:rPr lang="en-US" altLang="ko-KR"/>
               <a:t>/</a:t>
             </a:r>
             <a:r>
-              <a:rPr lang="ko-KR" altLang="en-US" smtClean="0"/>
+              <a:rPr lang="ko-KR" altLang="en-US"/>
               <a:t>게임머니</a:t>
             </a:r>
             <a:r>
-              <a:rPr lang="en-US" altLang="ko-KR" smtClean="0"/>
+              <a:rPr lang="en-US" altLang="ko-KR"/>
               <a:t>/</a:t>
             </a:r>
             <a:r>
-              <a:rPr lang="ko-KR" altLang="en-US" smtClean="0"/>
+              <a:rPr lang="ko-KR" altLang="en-US"/>
               <a:t>경험치같은 보상이 아니라 영화같은 동영상을 보상으로 틀어준다</a:t>
             </a:r>
             <a:r>
-              <a:rPr lang="en-US" altLang="ko-KR" smtClean="0"/>
+              <a:rPr lang="en-US" altLang="ko-KR"/>
               <a:t>.</a:t>
             </a:r>
           </a:p>
           <a:p>
             <a:r>
-              <a:rPr lang="en-US" altLang="ko-KR" smtClean="0"/>
+              <a:rPr lang="en-US" altLang="ko-KR"/>
               <a:t>[</a:t>
             </a:r>
             <a:r>
-              <a:rPr lang="ko-KR" altLang="en-US" smtClean="0"/>
+              <a:rPr lang="ko-KR" altLang="en-US"/>
               <a:t>라스트 오브 어스</a:t>
             </a:r>
             <a:r>
-              <a:rPr lang="en-US" altLang="ko-KR" smtClean="0"/>
+              <a:rPr lang="en-US" altLang="ko-KR"/>
               <a:t>]</a:t>
             </a:r>
             <a:r>
-              <a:rPr lang="ko-KR" altLang="en-US" smtClean="0"/>
+              <a:rPr lang="ko-KR" altLang="en-US"/>
               <a:t>같은 뛰어난 연출력을 가진 영상을 말한다</a:t>
             </a:r>
             <a:r>
-              <a:rPr lang="en-US" altLang="ko-KR" smtClean="0"/>
+              <a:rPr lang="en-US" altLang="ko-KR"/>
               <a:t>.</a:t>
             </a:r>
           </a:p>
@@ -7786,45 +4583,44 @@
           </a:p>
           <a:p>
             <a:r>
-              <a:rPr lang="ko-KR" altLang="en-US" smtClean="0"/>
+              <a:rPr lang="ko-KR" altLang="en-US"/>
               <a:t>동영상이나 하이 폴리곤의 뛰어난 모델링이 아니더라도</a:t>
             </a:r>
-            <a:endParaRPr lang="en-US" altLang="ko-KR" smtClean="0"/>
-          </a:p>
-          <a:p>
-            <a:r>
-              <a:rPr lang="en-US" altLang="ko-KR" smtClean="0"/>
+            <a:endParaRPr lang="en-US" altLang="ko-KR"/>
+          </a:p>
+          <a:p>
+            <a:r>
+              <a:rPr lang="en-US" altLang="ko-KR"/>
               <a:t>[</a:t>
             </a:r>
             <a:r>
-              <a:rPr lang="ko-KR" altLang="en-US" smtClean="0"/>
+              <a:rPr lang="ko-KR" altLang="en-US"/>
               <a:t>산나비</a:t>
             </a:r>
             <a:r>
-              <a:rPr lang="en-US" altLang="ko-KR" smtClean="0"/>
+              <a:rPr lang="en-US" altLang="ko-KR"/>
               <a:t>] – ‘</a:t>
             </a:r>
             <a:r>
-              <a:rPr lang="ko-KR" altLang="en-US" smtClean="0"/>
+              <a:rPr lang="ko-KR" altLang="en-US"/>
               <a:t>사이버펑크 조선의 모두를 경악시킨 산나비의 정체</a:t>
             </a:r>
             <a:r>
-              <a:rPr lang="en-US" altLang="ko-KR" smtClean="0"/>
+              <a:rPr lang="en-US" altLang="ko-KR"/>
               <a:t>‘ </a:t>
             </a:r>
             <a:r>
-              <a:rPr lang="ko-KR" altLang="en-US" smtClean="0"/>
+              <a:rPr lang="ko-KR" altLang="en-US"/>
               <a:t>유튜브 영상 </a:t>
             </a:r>
             <a:r>
-              <a:rPr lang="en-US" altLang="ko-KR" smtClean="0"/>
+              <a:rPr lang="en-US" altLang="ko-KR"/>
               <a:t>– </a:t>
             </a:r>
             <a:r>
-              <a:rPr lang="ko-KR" altLang="en-US" smtClean="0"/>
+              <a:rPr lang="ko-KR" altLang="en-US"/>
               <a:t>말풍선이 진짜 타자기로 치는 것처럼 연출</a:t>
             </a:r>
-            <a:endParaRPr lang="ko-KR" altLang="en-US"/>
           </a:p>
         </p:txBody>
       </p:sp>
@@ -7874,10 +4670,9 @@
           <a:lstStyle/>
           <a:p>
             <a:r>
-              <a:rPr lang="ko-KR" altLang="en-US" smtClean="0"/>
+              <a:rPr lang="ko-KR" altLang="en-US"/>
               <a:t>퀘스트</a:t>
             </a:r>
-            <a:endParaRPr lang="ko-KR" altLang="en-US"/>
           </a:p>
         </p:txBody>
       </p:sp>
@@ -7897,34 +4692,34 @@
           <a:lstStyle/>
           <a:p>
             <a:r>
-              <a:rPr lang="ko-KR" altLang="en-US" smtClean="0"/>
+              <a:rPr lang="ko-KR" altLang="en-US"/>
               <a:t>상황에 대한 </a:t>
             </a:r>
             <a:r>
-              <a:rPr lang="en-US" altLang="ko-KR" smtClean="0"/>
+              <a:rPr lang="en-US" altLang="ko-KR"/>
               <a:t>/ </a:t>
             </a:r>
             <a:r>
-              <a:rPr lang="ko-KR" altLang="en-US" smtClean="0"/>
+              <a:rPr lang="ko-KR" altLang="en-US"/>
               <a:t>어떤 이야기를 그 상황에 넣을 지 </a:t>
             </a:r>
             <a:r>
-              <a:rPr lang="en-US" altLang="ko-KR" smtClean="0"/>
+              <a:rPr lang="en-US" altLang="ko-KR"/>
               <a:t>/ </a:t>
             </a:r>
             <a:r>
-              <a:rPr lang="ko-KR" altLang="en-US" smtClean="0"/>
+              <a:rPr lang="ko-KR" altLang="en-US"/>
               <a:t>어떤 상황의 다음에 어떤 이야기를 넣을 지</a:t>
             </a:r>
-            <a:endParaRPr lang="en-US" altLang="ko-KR" smtClean="0"/>
-          </a:p>
-          <a:p>
-            <a:r>
-              <a:rPr lang="ko-KR" altLang="en-US" smtClean="0"/>
+            <a:endParaRPr lang="en-US" altLang="ko-KR"/>
+          </a:p>
+          <a:p>
+            <a:r>
+              <a:rPr lang="ko-KR" altLang="en-US"/>
               <a:t>이에 대한 생각과 이해가 없으면 안 된다</a:t>
             </a:r>
             <a:r>
-              <a:rPr lang="en-US" altLang="ko-KR" smtClean="0"/>
+              <a:rPr lang="en-US" altLang="ko-KR"/>
               <a:t>.</a:t>
             </a:r>
           </a:p>
@@ -7933,11 +4728,11 @@
           </a:p>
           <a:p>
             <a:r>
-              <a:rPr lang="ko-KR" altLang="en-US" smtClean="0"/>
+              <a:rPr lang="ko-KR" altLang="en-US"/>
               <a:t>스토리텔링에 대한 경험이 게임을 잊지 못하게 만든다</a:t>
             </a:r>
             <a:r>
-              <a:rPr lang="en-US" altLang="ko-KR" smtClean="0"/>
+              <a:rPr lang="en-US" altLang="ko-KR"/>
               <a:t>.</a:t>
             </a:r>
             <a:endParaRPr lang="ko-KR" altLang="en-US"/>
